--- a/onboarding/PMP-Incoming-Marketing-Manager-Detailed-Onboarding.pptx
+++ b/onboarding/PMP-Incoming-Marketing-Manager-Detailed-Onboarding.pptx
@@ -53,6 +53,9 @@
     <p:sldId id="301" r:id="rId53"/>
     <p:sldId id="302" r:id="rId54"/>
     <p:sldId id="303" r:id="rId55"/>
+    <p:sldId id="304" r:id="rId56"/>
+    <p:sldId id="305" r:id="rId57"/>
+    <p:sldId id="306" r:id="rId58"/>
   </p:sldIdLst>
   <p:sldSz cx="14630400" cy="8229600" type="screen4x3"/>
   <p:notesSz cx="6858000" cy="9144000"/>
@@ -3514,7 +3517,217 @@
 </p:notes>
 </file>
 
+<file path=ppt/notesSlides/notesSlide49.xml><?xml version="1.0" encoding="utf-8"?>
+<p:notes xmlns:a="http://schemas.openxmlformats.org/drawingml/2006/main" xmlns:p="http://schemas.openxmlformats.org/presentationml/2006/main" xmlns:r="http://schemas.openxmlformats.org/officeDocument/2006/relationships">
+  <p:cSld>
+    <p:spTree>
+      <p:nvGrpSpPr>
+        <p:cNvPr id="1" name=""/>
+        <p:cNvGrpSpPr/>
+        <p:nvPr/>
+      </p:nvGrpSpPr>
+      <p:grpSpPr>
+        <a:xfrm>
+          <a:off x="0" y="0"/>
+          <a:ext cx="0" cy="0"/>
+          <a:chOff x="0" y="0"/>
+          <a:chExt cx="0" cy="0"/>
+        </a:xfrm>
+      </p:grpSpPr>
+      <p:sp>
+        <p:nvSpPr>
+          <p:cNvPr id="2" name="Slide Image Placeholder 1"/>
+          <p:cNvSpPr>
+            <a:spLocks noGrp="1"/>
+          </p:cNvSpPr>
+          <p:nvPr>
+            <p:ph type="sldImg" idx="2"/>
+          </p:nvPr>
+        </p:nvSpPr>
+        <p:spPr/>
+      </p:sp>
+      <p:sp>
+        <p:nvSpPr>
+          <p:cNvPr id="3" name="Notes Placeholder 2"/>
+          <p:cNvSpPr>
+            <a:spLocks noGrp="1"/>
+          </p:cNvSpPr>
+          <p:nvPr>
+            <p:ph type="body" idx="3" sz="quarter"/>
+          </p:nvPr>
+        </p:nvSpPr>
+        <p:spPr/>
+        <p:txBody>
+          <a:bodyPr/>
+          <a:lstStyle/>
+          <a:p>
+            <a:r>
+              <a:t>Training companion to the detailed runbook. Confirmed rules derive from user instructions; manager inspection aids and routines are recommendations. No real client data, completion claim, live authority or actual access is implied. Use the corresponding runbook chapter for full procedure, evidence and exceptions.</a:t>
+            </a:r>
+          </a:p>
+        </p:txBody>
+      </p:sp>
+      <p:sp>
+        <p:nvSpPr>
+          <p:cNvPr id="4" name="Slide Number Placeholder 3"/>
+          <p:cNvSpPr>
+            <a:spLocks noGrp="1"/>
+          </p:cNvSpPr>
+          <p:nvPr>
+            <p:ph type="sldNum" idx="5" sz="quarter"/>
+          </p:nvPr>
+        </p:nvSpPr>
+        <p:spPr/>
+      </p:sp>
+    </p:spTree>
+  </p:cSld>
+  <p:clrMapOvr>
+    <a:masterClrMapping/>
+  </p:clrMapOvr>
+</p:notes>
+</file>
+
 <file path=ppt/notesSlides/notesSlide5.xml><?xml version="1.0" encoding="utf-8"?>
+<p:notes xmlns:a="http://schemas.openxmlformats.org/drawingml/2006/main" xmlns:p="http://schemas.openxmlformats.org/presentationml/2006/main" xmlns:r="http://schemas.openxmlformats.org/officeDocument/2006/relationships">
+  <p:cSld>
+    <p:spTree>
+      <p:nvGrpSpPr>
+        <p:cNvPr id="1" name=""/>
+        <p:cNvGrpSpPr/>
+        <p:nvPr/>
+      </p:nvGrpSpPr>
+      <p:grpSpPr>
+        <a:xfrm>
+          <a:off x="0" y="0"/>
+          <a:ext cx="0" cy="0"/>
+          <a:chOff x="0" y="0"/>
+          <a:chExt cx="0" cy="0"/>
+        </a:xfrm>
+      </p:grpSpPr>
+      <p:sp>
+        <p:nvSpPr>
+          <p:cNvPr id="2" name="Slide Image Placeholder 1"/>
+          <p:cNvSpPr>
+            <a:spLocks noGrp="1"/>
+          </p:cNvSpPr>
+          <p:nvPr>
+            <p:ph type="sldImg" idx="2"/>
+          </p:nvPr>
+        </p:nvSpPr>
+        <p:spPr/>
+      </p:sp>
+      <p:sp>
+        <p:nvSpPr>
+          <p:cNvPr id="3" name="Notes Placeholder 2"/>
+          <p:cNvSpPr>
+            <a:spLocks noGrp="1"/>
+          </p:cNvSpPr>
+          <p:nvPr>
+            <p:ph type="body" idx="3" sz="quarter"/>
+          </p:nvPr>
+        </p:nvSpPr>
+        <p:spPr/>
+        <p:txBody>
+          <a:bodyPr/>
+          <a:lstStyle/>
+          <a:p>
+            <a:r>
+              <a:t>Training companion to the detailed runbook. Confirmed rules derive from user instructions; manager inspection aids and routines are recommendations. No real client data, completion claim, live authority or actual access is implied. Use the corresponding runbook chapter for full procedure, evidence and exceptions.</a:t>
+            </a:r>
+          </a:p>
+        </p:txBody>
+      </p:sp>
+      <p:sp>
+        <p:nvSpPr>
+          <p:cNvPr id="4" name="Slide Number Placeholder 3"/>
+          <p:cNvSpPr>
+            <a:spLocks noGrp="1"/>
+          </p:cNvSpPr>
+          <p:nvPr>
+            <p:ph type="sldNum" idx="5" sz="quarter"/>
+          </p:nvPr>
+        </p:nvSpPr>
+        <p:spPr/>
+      </p:sp>
+    </p:spTree>
+  </p:cSld>
+  <p:clrMapOvr>
+    <a:masterClrMapping/>
+  </p:clrMapOvr>
+</p:notes>
+</file>
+
+<file path=ppt/notesSlides/notesSlide50.xml><?xml version="1.0" encoding="utf-8"?>
+<p:notes xmlns:a="http://schemas.openxmlformats.org/drawingml/2006/main" xmlns:p="http://schemas.openxmlformats.org/presentationml/2006/main" xmlns:r="http://schemas.openxmlformats.org/officeDocument/2006/relationships">
+  <p:cSld>
+    <p:spTree>
+      <p:nvGrpSpPr>
+        <p:cNvPr id="1" name=""/>
+        <p:cNvGrpSpPr/>
+        <p:nvPr/>
+      </p:nvGrpSpPr>
+      <p:grpSpPr>
+        <a:xfrm>
+          <a:off x="0" y="0"/>
+          <a:ext cx="0" cy="0"/>
+          <a:chOff x="0" y="0"/>
+          <a:chExt cx="0" cy="0"/>
+        </a:xfrm>
+      </p:grpSpPr>
+      <p:sp>
+        <p:nvSpPr>
+          <p:cNvPr id="2" name="Slide Image Placeholder 1"/>
+          <p:cNvSpPr>
+            <a:spLocks noGrp="1"/>
+          </p:cNvSpPr>
+          <p:nvPr>
+            <p:ph type="sldImg" idx="2"/>
+          </p:nvPr>
+        </p:nvSpPr>
+        <p:spPr/>
+      </p:sp>
+      <p:sp>
+        <p:nvSpPr>
+          <p:cNvPr id="3" name="Notes Placeholder 2"/>
+          <p:cNvSpPr>
+            <a:spLocks noGrp="1"/>
+          </p:cNvSpPr>
+          <p:nvPr>
+            <p:ph type="body" idx="3" sz="quarter"/>
+          </p:nvPr>
+        </p:nvSpPr>
+        <p:spPr/>
+        <p:txBody>
+          <a:bodyPr/>
+          <a:lstStyle/>
+          <a:p>
+            <a:r>
+              <a:t>Training companion to the detailed runbook. Confirmed rules derive from user instructions; manager inspection aids and routines are recommendations. No real client data, completion claim, live authority or actual access is implied. Use the corresponding runbook chapter for full procedure, evidence and exceptions.</a:t>
+            </a:r>
+          </a:p>
+        </p:txBody>
+      </p:sp>
+      <p:sp>
+        <p:nvSpPr>
+          <p:cNvPr id="4" name="Slide Number Placeholder 3"/>
+          <p:cNvSpPr>
+            <a:spLocks noGrp="1"/>
+          </p:cNvSpPr>
+          <p:nvPr>
+            <p:ph type="sldNum" idx="5" sz="quarter"/>
+          </p:nvPr>
+        </p:nvSpPr>
+        <p:spPr/>
+      </p:sp>
+    </p:spTree>
+  </p:cSld>
+  <p:clrMapOvr>
+    <a:masterClrMapping/>
+  </p:clrMapOvr>
+</p:notes>
+</file>
+
+<file path=ppt/notesSlides/notesSlide51.xml><?xml version="1.0" encoding="utf-8"?>
 <p:notes xmlns:a="http://schemas.openxmlformats.org/drawingml/2006/main" xmlns:p="http://schemas.openxmlformats.org/presentationml/2006/main" xmlns:r="http://schemas.openxmlformats.org/officeDocument/2006/relationships">
   <p:cSld>
     <p:spTree>
@@ -21189,7 +21402,7 @@
               </a:defRPr>
             </a:pPr>
             <a:r>
-              <a:t>QUALITY / CONTENT AND DESIGN</a:t>
+              <a:t>SOP-14 / RUN THE MONTHLY TEAM PERFORMANCE APPRAISAL</a:t>
             </a:r>
           </a:p>
         </p:txBody>
@@ -21280,14 +21493,14 @@
         </p:nvSpPr>
         <p:spPr>
           <a:xfrm>
-            <a:off x="777240" y="2468880"/>
-            <a:ext cx="6400800" cy="4480560"/>
+            <a:off x="777240" y="2423160"/>
+            <a:ext cx="3840480" cy="4572000"/>
           </a:xfrm>
           <a:prstGeom prst="rect">
             <a:avLst/>
           </a:prstGeom>
           <a:solidFill>
-            <a:srgbClr val="FFFFFF"/>
+            <a:srgbClr val="7D2B42"/>
           </a:solidFill>
           <a:ln>
             <a:noFill/>
@@ -21323,33 +21536,33 @@
         </p:nvSpPr>
         <p:spPr>
           <a:xfrm>
-            <a:off x="1005840" y="2743200"/>
-            <a:ext cx="5943600" cy="822960"/>
-          </a:xfrm>
-          <a:prstGeom prst="rect">
-            <a:avLst/>
-          </a:prstGeom>
-          <a:noFill/>
-        </p:spPr>
-        <p:txBody>
-          <a:bodyPr wrap="square" lIns="18288" rIns="18288" tIns="0" bIns="0">
-            <a:spAutoFit/>
-          </a:bodyPr>
-          <a:lstStyle/>
-          <a:p>
-            <a:pPr>
-              <a:spcAft>
-                <a:spcPts val="600"/>
-              </a:spcAft>
-              <a:defRPr sz="2200" b="1">
-                <a:solidFill>
-                  <a:srgbClr val="7D2B42"/>
-                </a:solidFill>
-                <a:latin typeface="Montserrat"/>
-              </a:defRPr>
-            </a:pPr>
-            <a:r>
-              <a:t>CONTENT</a:t>
+            <a:off x="1005840" y="2697480"/>
+            <a:ext cx="3383280" cy="548640"/>
+          </a:xfrm>
+          <a:prstGeom prst="rect">
+            <a:avLst/>
+          </a:prstGeom>
+          <a:noFill/>
+        </p:spPr>
+        <p:txBody>
+          <a:bodyPr wrap="square" lIns="18288" rIns="18288" tIns="0" bIns="0">
+            <a:spAutoFit/>
+          </a:bodyPr>
+          <a:lstStyle/>
+          <a:p>
+            <a:pPr>
+              <a:spcAft>
+                <a:spcPts val="600"/>
+              </a:spcAft>
+              <a:defRPr sz="1700" b="1">
+                <a:solidFill>
+                  <a:srgbClr val="FFCC00"/>
+                </a:solidFill>
+                <a:latin typeface="Montserrat"/>
+              </a:defRPr>
+            </a:pPr>
+            <a:r>
+              <a:t>WHEN IT STARTS</a:t>
             </a:r>
           </a:p>
         </p:txBody>
@@ -21362,8 +21575,8 @@
         </p:nvSpPr>
         <p:spPr>
           <a:xfrm>
-            <a:off x="1005840" y="3767328"/>
-            <a:ext cx="5943600" cy="2926080"/>
+            <a:off x="1005840" y="3429000"/>
+            <a:ext cx="3383280" cy="2286000"/>
           </a:xfrm>
           <a:prstGeom prst="rect">
             <a:avLst/>
@@ -21382,126 +21595,99 @@
               </a:spcAft>
               <a:defRPr sz="1900" b="0">
                 <a:solidFill>
+                  <a:srgbClr val="FFFFFF"/>
+                </a:solidFill>
+                <a:latin typeface="Montserrat"/>
+              </a:defRPr>
+            </a:pPr>
+            <a:r>
+              <a:t>Each monthly employee review cycle; exact dates to be agreed.</a:t>
+            </a:r>
+          </a:p>
+        </p:txBody>
+      </p:sp>
+      <p:sp>
+        <p:nvSpPr>
+          <p:cNvPr id="11" name="TextBox 10"/>
+          <p:cNvSpPr txBox="1"/>
+          <p:nvPr/>
+        </p:nvSpPr>
+        <p:spPr>
+          <a:xfrm>
+            <a:off x="1005840" y="6355080"/>
+            <a:ext cx="3383280" cy="320040"/>
+          </a:xfrm>
+          <a:prstGeom prst="rect">
+            <a:avLst/>
+          </a:prstGeom>
+          <a:noFill/>
+        </p:spPr>
+        <p:txBody>
+          <a:bodyPr wrap="square" lIns="18288" rIns="18288" tIns="0" bIns="0">
+            <a:spAutoFit/>
+          </a:bodyPr>
+          <a:lstStyle/>
+          <a:p>
+            <a:pPr>
+              <a:spcAft>
+                <a:spcPts val="600"/>
+              </a:spcAft>
+              <a:defRPr sz="1000" b="1">
+                <a:solidFill>
+                  <a:srgbClr val="FFCC00"/>
+                </a:solidFill>
+                <a:latin typeface="Montserrat"/>
+              </a:defRPr>
+            </a:pPr>
+            <a:r>
+              <a:t>FULL STEPS IN RUNBOOK</a:t>
+            </a:r>
+          </a:p>
+        </p:txBody>
+      </p:sp>
+      <p:sp>
+        <p:nvSpPr>
+          <p:cNvPr id="12" name="TextBox 11"/>
+          <p:cNvSpPr txBox="1"/>
+          <p:nvPr/>
+        </p:nvSpPr>
+        <p:spPr>
+          <a:xfrm>
+            <a:off x="5029200" y="2560320"/>
+            <a:ext cx="8686800" cy="4526280"/>
+          </a:xfrm>
+          <a:prstGeom prst="rect">
+            <a:avLst/>
+          </a:prstGeom>
+          <a:noFill/>
+        </p:spPr>
+        <p:txBody>
+          <a:bodyPr wrap="square" lIns="18288" rIns="18288" tIns="0" bIns="0">
+            <a:spAutoFit/>
+          </a:bodyPr>
+          <a:lstStyle/>
+          <a:p>
+            <a:pPr>
+              <a:spcAft>
+                <a:spcPts val="600"/>
+              </a:spcAft>
+              <a:defRPr sz="1600" b="0">
+                <a:solidFill>
                   <a:srgbClr val="202020"/>
                 </a:solidFill>
                 <a:latin typeface="Montserrat"/>
               </a:defRPr>
             </a:pPr>
             <a:r>
-              <a:t>Brief/strategy match; accurate facts and terms; brand voice; complete caption/script/CTA; comments executed; HC then MM.</a:t>
-            </a:r>
-          </a:p>
-        </p:txBody>
-      </p:sp>
-      <p:sp>
-        <p:nvSpPr>
-          <p:cNvPr id="11" name="Rectangle 10"/>
-          <p:cNvSpPr/>
-          <p:nvPr/>
-        </p:nvSpPr>
-        <p:spPr>
-          <a:xfrm>
-            <a:off x="7543800" y="2468880"/>
-            <a:ext cx="6400800" cy="4480560"/>
-          </a:xfrm>
-          <a:prstGeom prst="rect">
-            <a:avLst/>
-          </a:prstGeom>
-          <a:solidFill>
-            <a:srgbClr val="FFFFFF"/>
-          </a:solidFill>
-          <a:ln>
-            <a:noFill/>
-          </a:ln>
-        </p:spPr>
-        <p:style>
-          <a:lnRef idx="1">
-            <a:schemeClr val="accent1"/>
-          </a:lnRef>
-          <a:fillRef idx="3">
-            <a:schemeClr val="accent1"/>
-          </a:fillRef>
-          <a:effectRef idx="2">
-            <a:schemeClr val="accent1"/>
-          </a:effectRef>
-          <a:fontRef idx="minor">
-            <a:schemeClr val="lt1"/>
-          </a:fontRef>
-        </p:style>
-        <p:txBody>
-          <a:bodyPr rtlCol="0" anchor="ctr"/>
-          <a:lstStyle/>
-          <a:p>
-            <a:pPr algn="ctr"/>
-          </a:p>
-        </p:txBody>
-      </p:sp>
-      <p:sp>
-        <p:nvSpPr>
-          <p:cNvPr id="12" name="TextBox 11"/>
-          <p:cNvSpPr txBox="1"/>
-          <p:nvPr/>
-        </p:nvSpPr>
-        <p:spPr>
-          <a:xfrm>
-            <a:off x="7772400" y="2743200"/>
-            <a:ext cx="5943600" cy="822960"/>
-          </a:xfrm>
-          <a:prstGeom prst="rect">
-            <a:avLst/>
-          </a:prstGeom>
-          <a:noFill/>
-        </p:spPr>
-        <p:txBody>
-          <a:bodyPr wrap="square" lIns="18288" rIns="18288" tIns="0" bIns="0">
-            <a:spAutoFit/>
-          </a:bodyPr>
-          <a:lstStyle/>
-          <a:p>
-            <a:pPr>
-              <a:spcAft>
-                <a:spcPts val="600"/>
-              </a:spcAft>
-              <a:defRPr sz="2200" b="1">
-                <a:solidFill>
-                  <a:srgbClr val="7D2B42"/>
-                </a:solidFill>
-                <a:latin typeface="Montserrat"/>
-              </a:defRPr>
-            </a:pPr>
-            <a:r>
-              <a:t>DESIGN</a:t>
-            </a:r>
-          </a:p>
-        </p:txBody>
-      </p:sp>
-      <p:sp>
-        <p:nvSpPr>
-          <p:cNvPr id="13" name="TextBox 12"/>
-          <p:cNvSpPr txBox="1"/>
-          <p:nvPr/>
-        </p:nvSpPr>
-        <p:spPr>
-          <a:xfrm>
-            <a:off x="7772400" y="3767328"/>
-            <a:ext cx="5943600" cy="2926080"/>
-          </a:xfrm>
-          <a:prstGeom prst="rect">
-            <a:avLst/>
-          </a:prstGeom>
-          <a:noFill/>
-        </p:spPr>
-        <p:txBody>
-          <a:bodyPr wrap="square" lIns="18288" rIns="18288" tIns="0" bIns="0">
-            <a:spAutoFit/>
-          </a:bodyPr>
-          <a:lstStyle/>
-          <a:p>
-            <a:pPr>
-              <a:spcAft>
-                <a:spcPts val="600"/>
-              </a:spcAft>
-              <a:defRPr sz="1900" b="0">
+              <a:t>1. Select the approved role-specific form and record employee, actual review month and confirmed direct reviewer privately. Do not infer a reviewer from coordination responsibilities.</a:t>
+            </a:r>
+          </a:p>
+          <a:p>
+            <a:pPr>
+              <a:spcAft>
+                <a:spcPts val="600"/>
+              </a:spcAft>
+              <a:defRPr sz="1600" b="0">
                 <a:solidFill>
                   <a:srgbClr val="202020"/>
                 </a:solidFill>
@@ -21509,7 +21695,103 @@
               </a:defRPr>
             </a:pPr>
             <a:r>
-              <a:t>Correct copy/offer; brand and legibility; agreed dimensions/exports; source inputs; HD then MM; no premature final archive.</a:t>
+              <a:t>2. Collect month-specific evidence from tasks, quality/revision records, outputs and role-appropriate results. Distinguish missing inputs or changed scope from individual execution.</a:t>
+            </a:r>
+          </a:p>
+          <a:p>
+            <a:pPr>
+              <a:spcAft>
+                <a:spcPts val="600"/>
+              </a:spcAft>
+              <a:defRPr sz="1600" b="0">
+                <a:solidFill>
+                  <a:srgbClr val="202020"/>
+                </a:solidFill>
+                <a:latin typeface="Montserrat"/>
+              </a:defRPr>
+            </a:pPr>
+            <a:r>
+              <a:t>3. Employee completes Self-Rating before the review meeting. Manager completes Manager Rating; compare the gap rather than assuming agreement.</a:t>
+            </a:r>
+          </a:p>
+          <a:p>
+            <a:pPr>
+              <a:spcAft>
+                <a:spcPts val="600"/>
+              </a:spcAft>
+              <a:defRPr sz="1600" b="0">
+                <a:solidFill>
+                  <a:srgbClr val="202020"/>
+                </a:solidFill>
+                <a:latin typeface="Montserrat"/>
+              </a:defRPr>
+            </a:pPr>
+            <a:r>
+              <a:t>4. Use the supplied 1–5 scale and behavioral anchors. Ratings 1, 2 and 5 require a brief evidence-based justification in the Notes field/section.</a:t>
+            </a:r>
+          </a:p>
+          <a:p>
+            <a:pPr>
+              <a:spcAft>
+                <a:spcPts val="600"/>
+              </a:spcAft>
+              <a:defRPr sz="1600" b="0">
+                <a:solidFill>
+                  <a:srgbClr val="202020"/>
+                </a:solidFill>
+                <a:latin typeface="Montserrat"/>
+              </a:defRPr>
+            </a:pPr>
+            <a:r>
+              <a:t>5. Check the role-specific weights and calculations. Supplied Excel uses Gap = Manager minus Self and weighted contribution = KPI weight × Manager Rating / 5. Confirm completion before interpreting totals: blank manager ratings are treated as zero in the supplied formulas.</a:t>
+            </a:r>
+          </a:p>
+          <a:p>
+            <a:pPr>
+              <a:spcAft>
+                <a:spcPts val="600"/>
+              </a:spcAft>
+              <a:defRPr sz="1600" b="0">
+                <a:solidFill>
+                  <a:srgbClr val="202020"/>
+                </a:solidFill>
+                <a:latin typeface="Montserrat"/>
+              </a:defRPr>
+            </a:pPr>
+            <a:r>
+              <a:t>6. Hold the monthly review conversation, record achievements, blockers, strengths, improvement areas and employee feedback. Track the template's quarterly OKRs within the monthly conversation; do not confuse the two cadences.</a:t>
+            </a:r>
+          </a:p>
+          <a:p>
+            <a:pPr>
+              <a:spcAft>
+                <a:spcPts val="600"/>
+              </a:spcAft>
+              <a:defRPr sz="1600" b="0">
+                <a:solidFill>
+                  <a:srgbClr val="202020"/>
+                </a:solidFill>
+                <a:latin typeface="Montserrat"/>
+              </a:defRPr>
+            </a:pPr>
+            <a:r>
+              <a:t>7. Agree SMART goals and development/training actions for the next period, with accountable action owners and agreed follow-up. Record the signatures/decisions required by the adopted process.</a:t>
+            </a:r>
+          </a:p>
+          <a:p>
+            <a:pPr>
+              <a:spcAft>
+                <a:spcPts val="600"/>
+              </a:spcAft>
+              <a:defRPr sz="1600" b="0">
+                <a:solidFill>
+                  <a:srgbClr val="202020"/>
+                </a:solidFill>
+                <a:latin typeface="Montserrat"/>
+              </a:defRPr>
+            </a:pPr>
+            <a:r>
+              <a:t>8. Keep completed appraisals and salary/career information in private authorized storage; carry goals into the following monthly review. Promotion, salary, succession and HR fields are not automatic decisions or approvals.</a:t>
             </a:r>
           </a:p>
         </p:txBody>
@@ -21695,7 +21977,7 @@
               </a:defRPr>
             </a:pPr>
             <a:r>
-              <a:t>QUALITY / VIDEO AND CLIENT PRESENTATION</a:t>
+              <a:t>SOP-14 / WHAT THE MANAGER CHECKS</a:t>
             </a:r>
           </a:p>
         </p:txBody>
@@ -21780,20 +22062,123 @@
       </p:sp>
       <p:sp>
         <p:nvSpPr>
-          <p:cNvPr id="8" name="Rectangle 7"/>
+          <p:cNvPr id="8" name="TextBox 7"/>
+          <p:cNvSpPr txBox="1"/>
+          <p:nvPr/>
+        </p:nvSpPr>
+        <p:spPr>
+          <a:xfrm>
+            <a:off x="868680" y="2468880"/>
+            <a:ext cx="12893040" cy="3337560"/>
+          </a:xfrm>
+          <a:prstGeom prst="rect">
+            <a:avLst/>
+          </a:prstGeom>
+          <a:noFill/>
+        </p:spPr>
+        <p:txBody>
+          <a:bodyPr wrap="square" lIns="18288" rIns="18288" tIns="0" bIns="0">
+            <a:spAutoFit/>
+          </a:bodyPr>
+          <a:lstStyle/>
+          <a:p>
+            <a:pPr>
+              <a:spcAft>
+                <a:spcPts val="600"/>
+              </a:spcAft>
+              <a:defRPr sz="2100" b="0">
+                <a:solidFill>
+                  <a:srgbClr val="202020"/>
+                </a:solidFill>
+                <a:latin typeface="Montserrat"/>
+              </a:defRPr>
+            </a:pPr>
+            <a:r>
+              <a:t>• Confirm the actual review month, correct approved role template and confirmed reviewer; do not force a combined-role or missing-role mapping.</a:t>
+            </a:r>
+          </a:p>
+          <a:p>
+            <a:pPr>
+              <a:spcAft>
+                <a:spcPts val="600"/>
+              </a:spcAft>
+              <a:defRPr sz="2100" b="0">
+                <a:solidFill>
+                  <a:srgbClr val="202020"/>
+                </a:solidFill>
+                <a:latin typeface="Montserrat"/>
+              </a:defRPr>
+            </a:pPr>
+            <a:r>
+              <a:t>• Review employee self-rating, manager rating and evidence. Ratings 1, 2 and 5 need justification; use behavioral anchors.</a:t>
+            </a:r>
+          </a:p>
+          <a:p>
+            <a:pPr>
+              <a:spcAft>
+                <a:spcPts val="600"/>
+              </a:spcAft>
+              <a:defRPr sz="2100" b="0">
+                <a:solidFill>
+                  <a:srgbClr val="202020"/>
+                </a:solidFill>
+                <a:latin typeface="Montserrat"/>
+              </a:defRPr>
+            </a:pPr>
+            <a:r>
+              <a:t>• Check weights and completeness before totals. Supplied formulas use blank manager ratings as zero; do not confuse an incomplete form with poor performance.</a:t>
+            </a:r>
+          </a:p>
+          <a:p>
+            <a:pPr>
+              <a:spcAft>
+                <a:spcPts val="600"/>
+              </a:spcAft>
+              <a:defRPr sz="2100" b="0">
+                <a:solidFill>
+                  <a:srgbClr val="202020"/>
+                </a:solidFill>
+                <a:latin typeface="Montserrat"/>
+              </a:defRPr>
+            </a:pPr>
+            <a:r>
+              <a:t>• Discuss gaps and blockers, record employee feedback and agree next SMART goals/training actions.</a:t>
+            </a:r>
+          </a:p>
+          <a:p>
+            <a:pPr>
+              <a:spcAft>
+                <a:spcPts val="600"/>
+              </a:spcAft>
+              <a:defRPr sz="2100" b="0">
+                <a:solidFill>
+                  <a:srgbClr val="202020"/>
+                </a:solidFill>
+                <a:latin typeface="Montserrat"/>
+              </a:defRPr>
+            </a:pPr>
+            <a:r>
+              <a:t>• Keep salary, career and completed review records private. Reviewer/HR authority and monthly deadlines still require confirmation.</a:t>
+            </a:r>
+          </a:p>
+        </p:txBody>
+      </p:sp>
+      <p:sp>
+        <p:nvSpPr>
+          <p:cNvPr id="9" name="Rectangle 8"/>
           <p:cNvSpPr/>
           <p:nvPr/>
         </p:nvSpPr>
         <p:spPr>
           <a:xfrm>
-            <a:off x="777240" y="2468880"/>
-            <a:ext cx="6400800" cy="4480560"/>
+            <a:off x="822960" y="6126480"/>
+            <a:ext cx="12984480" cy="1005840"/>
           </a:xfrm>
           <a:prstGeom prst="rect">
             <a:avLst/>
           </a:prstGeom>
           <a:solidFill>
-            <a:srgbClr val="FFFFFF"/>
+            <a:srgbClr val="FFCC00"/>
           </a:solidFill>
           <a:ln>
             <a:noFill/>
@@ -21823,31 +22208,31 @@
       </p:sp>
       <p:sp>
         <p:nvSpPr>
-          <p:cNvPr id="9" name="TextBox 8"/>
-          <p:cNvSpPr txBox="1"/>
-          <p:nvPr/>
-        </p:nvSpPr>
-        <p:spPr>
-          <a:xfrm>
-            <a:off x="1005840" y="2743200"/>
-            <a:ext cx="5943600" cy="822960"/>
-          </a:xfrm>
-          <a:prstGeom prst="rect">
-            <a:avLst/>
-          </a:prstGeom>
-          <a:noFill/>
-        </p:spPr>
-        <p:txBody>
-          <a:bodyPr wrap="square" lIns="18288" rIns="18288" tIns="0" bIns="0">
-            <a:spAutoFit/>
-          </a:bodyPr>
-          <a:lstStyle/>
-          <a:p>
-            <a:pPr>
-              <a:spcAft>
-                <a:spcPts val="600"/>
-              </a:spcAft>
-              <a:defRPr sz="2200" b="1">
+          <p:cNvPr id="10" name="TextBox 9"/>
+          <p:cNvSpPr txBox="1"/>
+          <p:nvPr/>
+        </p:nvSpPr>
+        <p:spPr>
+          <a:xfrm>
+            <a:off x="1024128" y="6309360"/>
+            <a:ext cx="12582144" cy="731520"/>
+          </a:xfrm>
+          <a:prstGeom prst="rect">
+            <a:avLst/>
+          </a:prstGeom>
+          <a:noFill/>
+        </p:spPr>
+        <p:txBody>
+          <a:bodyPr wrap="square" lIns="18288" rIns="18288" tIns="0" bIns="0">
+            <a:spAutoFit/>
+          </a:bodyPr>
+          <a:lstStyle/>
+          <a:p>
+            <a:pPr>
+              <a:spcAft>
+                <a:spcPts val="600"/>
+              </a:spcAft>
+              <a:defRPr sz="1600" b="1">
                 <a:solidFill>
                   <a:srgbClr val="7D2B42"/>
                 </a:solidFill>
@@ -21855,167 +22240,7 @@
               </a:defRPr>
             </a:pPr>
             <a:r>
-              <a:t>VIDEO: DIRECT MM REVIEW</a:t>
-            </a:r>
-          </a:p>
-        </p:txBody>
-      </p:sp>
-      <p:sp>
-        <p:nvSpPr>
-          <p:cNvPr id="10" name="TextBox 9"/>
-          <p:cNvSpPr txBox="1"/>
-          <p:nvPr/>
-        </p:nvSpPr>
-        <p:spPr>
-          <a:xfrm>
-            <a:off x="1005840" y="3767328"/>
-            <a:ext cx="5943600" cy="2926080"/>
-          </a:xfrm>
-          <a:prstGeom prst="rect">
-            <a:avLst/>
-          </a:prstGeom>
-          <a:noFill/>
-        </p:spPr>
-        <p:txBody>
-          <a:bodyPr wrap="square" lIns="18288" rIns="18288" tIns="0" bIns="0">
-            <a:spAutoFit/>
-          </a:bodyPr>
-          <a:lstStyle/>
-          <a:p>
-            <a:pPr>
-              <a:spcAft>
-                <a:spcPts val="600"/>
-              </a:spcAft>
-              <a:defRPr sz="1900" b="0">
-                <a:solidFill>
-                  <a:srgbClr val="202020"/>
-                </a:solidFill>
-                <a:latin typeface="Montserrat"/>
-              </a:defRPr>
-            </a:pPr>
-            <a:r>
-              <a:t>Check script, footage, timing, audio, subtitles, text/price accuracy and agreed export requirements. Record quality and internal approval separately.</a:t>
-            </a:r>
-          </a:p>
-        </p:txBody>
-      </p:sp>
-      <p:sp>
-        <p:nvSpPr>
-          <p:cNvPr id="11" name="Rectangle 10"/>
-          <p:cNvSpPr/>
-          <p:nvPr/>
-        </p:nvSpPr>
-        <p:spPr>
-          <a:xfrm>
-            <a:off x="7543800" y="2468880"/>
-            <a:ext cx="6400800" cy="4480560"/>
-          </a:xfrm>
-          <a:prstGeom prst="rect">
-            <a:avLst/>
-          </a:prstGeom>
-          <a:solidFill>
-            <a:srgbClr val="FFFFFF"/>
-          </a:solidFill>
-          <a:ln>
-            <a:noFill/>
-          </a:ln>
-        </p:spPr>
-        <p:style>
-          <a:lnRef idx="1">
-            <a:schemeClr val="accent1"/>
-          </a:lnRef>
-          <a:fillRef idx="3">
-            <a:schemeClr val="accent1"/>
-          </a:fillRef>
-          <a:effectRef idx="2">
-            <a:schemeClr val="accent1"/>
-          </a:effectRef>
-          <a:fontRef idx="minor">
-            <a:schemeClr val="lt1"/>
-          </a:fontRef>
-        </p:style>
-        <p:txBody>
-          <a:bodyPr rtlCol="0" anchor="ctr"/>
-          <a:lstStyle/>
-          <a:p>
-            <a:pPr algn="ctr"/>
-          </a:p>
-        </p:txBody>
-      </p:sp>
-      <p:sp>
-        <p:nvSpPr>
-          <p:cNvPr id="12" name="TextBox 11"/>
-          <p:cNvSpPr txBox="1"/>
-          <p:nvPr/>
-        </p:nvSpPr>
-        <p:spPr>
-          <a:xfrm>
-            <a:off x="7772400" y="2743200"/>
-            <a:ext cx="5943600" cy="822960"/>
-          </a:xfrm>
-          <a:prstGeom prst="rect">
-            <a:avLst/>
-          </a:prstGeom>
-          <a:noFill/>
-        </p:spPr>
-        <p:txBody>
-          <a:bodyPr wrap="square" lIns="18288" rIns="18288" tIns="0" bIns="0">
-            <a:spAutoFit/>
-          </a:bodyPr>
-          <a:lstStyle/>
-          <a:p>
-            <a:pPr>
-              <a:spcAft>
-                <a:spcPts val="600"/>
-              </a:spcAft>
-              <a:defRPr sz="2200" b="1">
-                <a:solidFill>
-                  <a:srgbClr val="7D2B42"/>
-                </a:solidFill>
-                <a:latin typeface="Montserrat"/>
-              </a:defRPr>
-            </a:pPr>
-            <a:r>
-              <a:t>CLIENT PACK: AM COORDINATION</a:t>
-            </a:r>
-          </a:p>
-        </p:txBody>
-      </p:sp>
-      <p:sp>
-        <p:nvSpPr>
-          <p:cNvPr id="13" name="TextBox 12"/>
-          <p:cNvSpPr txBox="1"/>
-          <p:nvPr/>
-        </p:nvSpPr>
-        <p:spPr>
-          <a:xfrm>
-            <a:off x="7772400" y="3767328"/>
-            <a:ext cx="5943600" cy="2926080"/>
-          </a:xfrm>
-          <a:prstGeom prst="rect">
-            <a:avLst/>
-          </a:prstGeom>
-          <a:noFill/>
-        </p:spPr>
-        <p:txBody>
-          <a:bodyPr wrap="square" lIns="18288" rIns="18288" tIns="0" bIns="0">
-            <a:spAutoFit/>
-          </a:bodyPr>
-          <a:lstStyle/>
-          <a:p>
-            <a:pPr>
-              <a:spcAft>
-                <a:spcPts val="600"/>
-              </a:spcAft>
-              <a:defRPr sz="1900" b="0">
-                <a:solidFill>
-                  <a:srgbClr val="202020"/>
-                </a:solidFill>
-                <a:latin typeface="Montserrat"/>
-              </a:defRPr>
-            </a:pPr>
-            <a:r>
-              <a:t>Manifest matches internally approved work. Client approval covers the presented version; revised content goes back through relevant reviews.</a:t>
+              <a:t>HOLD / RETURN: Missing ratings, unsupported extreme scores or unconfirmed reviewer/template: do not finalize a score. Resolve the gap; do not auto-trigger salary, promotion or employment decisions.</a:t>
             </a:r>
           </a:p>
         </p:txBody>
@@ -22201,7 +22426,7 @@
               </a:defRPr>
             </a:pPr>
             <a:r>
-              <a:t>REVISIONS / KEEP THE TASK OPEN</a:t>
+              <a:t>QUALITY / CONTENT AND DESIGN</a:t>
             </a:r>
           </a:p>
         </p:txBody>
@@ -22292,14 +22517,14 @@
         </p:nvSpPr>
         <p:spPr>
           <a:xfrm>
-            <a:off x="777240" y="2377440"/>
-            <a:ext cx="3063240" cy="896112"/>
+            <a:off x="777240" y="2468880"/>
+            <a:ext cx="6400800" cy="4480560"/>
           </a:xfrm>
           <a:prstGeom prst="rect">
             <a:avLst/>
           </a:prstGeom>
           <a:solidFill>
-            <a:srgbClr val="7D2B42"/>
+            <a:srgbClr val="FFFFFF"/>
           </a:solidFill>
           <a:ln>
             <a:noFill/>
@@ -22335,33 +22560,33 @@
         </p:nvSpPr>
         <p:spPr>
           <a:xfrm>
-            <a:off x="914400" y="2487168"/>
-            <a:ext cx="2788920" cy="822960"/>
-          </a:xfrm>
-          <a:prstGeom prst="rect">
-            <a:avLst/>
-          </a:prstGeom>
-          <a:noFill/>
-        </p:spPr>
-        <p:txBody>
-          <a:bodyPr wrap="square" lIns="18288" rIns="18288" tIns="0" bIns="0">
-            <a:spAutoFit/>
-          </a:bodyPr>
-          <a:lstStyle/>
-          <a:p>
-            <a:pPr>
-              <a:spcAft>
-                <a:spcPts val="600"/>
-              </a:spcAft>
-              <a:defRPr sz="1300" b="1">
-                <a:solidFill>
-                  <a:srgbClr val="FFFFFF"/>
-                </a:solidFill>
-                <a:latin typeface="Montserrat"/>
-              </a:defRPr>
-            </a:pPr>
-            <a:r>
-              <a:t>COMMENT</a:t>
+            <a:off x="1005840" y="2743200"/>
+            <a:ext cx="5943600" cy="822960"/>
+          </a:xfrm>
+          <a:prstGeom prst="rect">
+            <a:avLst/>
+          </a:prstGeom>
+          <a:noFill/>
+        </p:spPr>
+        <p:txBody>
+          <a:bodyPr wrap="square" lIns="18288" rIns="18288" tIns="0" bIns="0">
+            <a:spAutoFit/>
+          </a:bodyPr>
+          <a:lstStyle/>
+          <a:p>
+            <a:pPr>
+              <a:spcAft>
+                <a:spcPts val="600"/>
+              </a:spcAft>
+              <a:defRPr sz="2200" b="1">
+                <a:solidFill>
+                  <a:srgbClr val="7D2B42"/>
+                </a:solidFill>
+                <a:latin typeface="Montserrat"/>
+              </a:defRPr>
+            </a:pPr>
+            <a:r>
+              <a:t>CONTENT</a:t>
             </a:r>
           </a:p>
         </p:txBody>
@@ -22374,25 +22599,25 @@
         </p:nvSpPr>
         <p:spPr>
           <a:xfrm>
-            <a:off x="4114800" y="2450592"/>
-            <a:ext cx="9646920" cy="841248"/>
-          </a:xfrm>
-          <a:prstGeom prst="rect">
-            <a:avLst/>
-          </a:prstGeom>
-          <a:noFill/>
-        </p:spPr>
-        <p:txBody>
-          <a:bodyPr wrap="square" lIns="18288" rIns="18288" tIns="0" bIns="0">
-            <a:spAutoFit/>
-          </a:bodyPr>
-          <a:lstStyle/>
-          <a:p>
-            <a:pPr>
-              <a:spcAft>
-                <a:spcPts val="600"/>
-              </a:spcAft>
-              <a:defRPr sz="1600" b="0">
+            <a:off x="1005840" y="3767328"/>
+            <a:ext cx="5943600" cy="2926080"/>
+          </a:xfrm>
+          <a:prstGeom prst="rect">
+            <a:avLst/>
+          </a:prstGeom>
+          <a:noFill/>
+        </p:spPr>
+        <p:txBody>
+          <a:bodyPr wrap="square" lIns="18288" rIns="18288" tIns="0" bIns="0">
+            <a:spAutoFit/>
+          </a:bodyPr>
+          <a:lstStyle/>
+          <a:p>
+            <a:pPr>
+              <a:spcAft>
+                <a:spcPts val="600"/>
+              </a:spcAft>
+              <a:defRPr sz="1900" b="0">
                 <a:solidFill>
                   <a:srgbClr val="202020"/>
                 </a:solidFill>
@@ -22400,7 +22625,7 @@
               </a:defRPr>
             </a:pPr>
             <a:r>
-              <a:t>AM, MM or relevant head identifies item, issue, change and reason.</a:t>
+              <a:t>Brief/strategy match; accurate facts and terms; brand voice; complete caption/script/CTA; comments executed; HC then MM.</a:t>
             </a:r>
           </a:p>
         </p:txBody>
@@ -22413,14 +22638,14 @@
         </p:nvSpPr>
         <p:spPr>
           <a:xfrm>
-            <a:off x="777240" y="3383280"/>
-            <a:ext cx="3063240" cy="896112"/>
+            <a:off x="7543800" y="2468880"/>
+            <a:ext cx="6400800" cy="4480560"/>
           </a:xfrm>
           <a:prstGeom prst="rect">
             <a:avLst/>
           </a:prstGeom>
           <a:solidFill>
-            <a:srgbClr val="7D2B42"/>
+            <a:srgbClr val="FFFFFF"/>
           </a:solidFill>
           <a:ln>
             <a:noFill/>
@@ -22456,33 +22681,33 @@
         </p:nvSpPr>
         <p:spPr>
           <a:xfrm>
-            <a:off x="914400" y="3493008"/>
-            <a:ext cx="2788920" cy="822960"/>
-          </a:xfrm>
-          <a:prstGeom prst="rect">
-            <a:avLst/>
-          </a:prstGeom>
-          <a:noFill/>
-        </p:spPr>
-        <p:txBody>
-          <a:bodyPr wrap="square" lIns="18288" rIns="18288" tIns="0" bIns="0">
-            <a:spAutoFit/>
-          </a:bodyPr>
-          <a:lstStyle/>
-          <a:p>
-            <a:pPr>
-              <a:spcAft>
-                <a:spcPts val="600"/>
-              </a:spcAft>
-              <a:defRPr sz="1300" b="1">
-                <a:solidFill>
-                  <a:srgbClr val="FFFFFF"/>
-                </a:solidFill>
-                <a:latin typeface="Montserrat"/>
-              </a:defRPr>
-            </a:pPr>
-            <a:r>
-              <a:t>EXECUTE</a:t>
+            <a:off x="7772400" y="2743200"/>
+            <a:ext cx="5943600" cy="822960"/>
+          </a:xfrm>
+          <a:prstGeom prst="rect">
+            <a:avLst/>
+          </a:prstGeom>
+          <a:noFill/>
+        </p:spPr>
+        <p:txBody>
+          <a:bodyPr wrap="square" lIns="18288" rIns="18288" tIns="0" bIns="0">
+            <a:spAutoFit/>
+          </a:bodyPr>
+          <a:lstStyle/>
+          <a:p>
+            <a:pPr>
+              <a:spcAft>
+                <a:spcPts val="600"/>
+              </a:spcAft>
+              <a:defRPr sz="2200" b="1">
+                <a:solidFill>
+                  <a:srgbClr val="7D2B42"/>
+                </a:solidFill>
+                <a:latin typeface="Montserrat"/>
+              </a:defRPr>
+            </a:pPr>
+            <a:r>
+              <a:t>DESIGN</a:t>
             </a:r>
           </a:p>
         </p:txBody>
@@ -22495,25 +22720,25 @@
         </p:nvSpPr>
         <p:spPr>
           <a:xfrm>
-            <a:off x="4114800" y="3456432"/>
-            <a:ext cx="9646920" cy="841248"/>
-          </a:xfrm>
-          <a:prstGeom prst="rect">
-            <a:avLst/>
-          </a:prstGeom>
-          <a:noFill/>
-        </p:spPr>
-        <p:txBody>
-          <a:bodyPr wrap="square" lIns="18288" rIns="18288" tIns="0" bIns="0">
-            <a:spAutoFit/>
-          </a:bodyPr>
-          <a:lstStyle/>
-          <a:p>
-            <a:pPr>
-              <a:spcAft>
-                <a:spcPts val="600"/>
-              </a:spcAft>
-              <a:defRPr sz="1600" b="0">
+            <a:off x="7772400" y="3767328"/>
+            <a:ext cx="5943600" cy="2926080"/>
+          </a:xfrm>
+          <a:prstGeom prst="rect">
+            <a:avLst/>
+          </a:prstGeom>
+          <a:noFill/>
+        </p:spPr>
+        <p:txBody>
+          <a:bodyPr wrap="square" lIns="18288" rIns="18288" tIns="0" bIns="0">
+            <a:spAutoFit/>
+          </a:bodyPr>
+          <a:lstStyle/>
+          <a:p>
+            <a:pPr>
+              <a:spcAft>
+                <a:spcPts val="600"/>
+              </a:spcAft>
+              <a:defRPr sz="1900" b="0">
                 <a:solidFill>
                   <a:srgbClr val="202020"/>
                 </a:solidFill>
@@ -22521,370 +22746,7 @@
               </a:defRPr>
             </a:pPr>
             <a:r>
-              <a:t>Accountable holder implements every comment and records response.</a:t>
-            </a:r>
-          </a:p>
-        </p:txBody>
-      </p:sp>
-      <p:sp>
-        <p:nvSpPr>
-          <p:cNvPr id="14" name="Rectangle 13"/>
-          <p:cNvSpPr/>
-          <p:nvPr/>
-        </p:nvSpPr>
-        <p:spPr>
-          <a:xfrm>
-            <a:off x="777240" y="4389120"/>
-            <a:ext cx="3063240" cy="896112"/>
-          </a:xfrm>
-          <a:prstGeom prst="rect">
-            <a:avLst/>
-          </a:prstGeom>
-          <a:solidFill>
-            <a:srgbClr val="7D2B42"/>
-          </a:solidFill>
-          <a:ln>
-            <a:noFill/>
-          </a:ln>
-        </p:spPr>
-        <p:style>
-          <a:lnRef idx="1">
-            <a:schemeClr val="accent1"/>
-          </a:lnRef>
-          <a:fillRef idx="3">
-            <a:schemeClr val="accent1"/>
-          </a:fillRef>
-          <a:effectRef idx="2">
-            <a:schemeClr val="accent1"/>
-          </a:effectRef>
-          <a:fontRef idx="minor">
-            <a:schemeClr val="lt1"/>
-          </a:fontRef>
-        </p:style>
-        <p:txBody>
-          <a:bodyPr rtlCol="0" anchor="ctr"/>
-          <a:lstStyle/>
-          <a:p>
-            <a:pPr algn="ctr"/>
-          </a:p>
-        </p:txBody>
-      </p:sp>
-      <p:sp>
-        <p:nvSpPr>
-          <p:cNvPr id="15" name="TextBox 14"/>
-          <p:cNvSpPr txBox="1"/>
-          <p:nvPr/>
-        </p:nvSpPr>
-        <p:spPr>
-          <a:xfrm>
-            <a:off x="914400" y="4498848"/>
-            <a:ext cx="2788920" cy="822960"/>
-          </a:xfrm>
-          <a:prstGeom prst="rect">
-            <a:avLst/>
-          </a:prstGeom>
-          <a:noFill/>
-        </p:spPr>
-        <p:txBody>
-          <a:bodyPr wrap="square" lIns="18288" rIns="18288" tIns="0" bIns="0">
-            <a:spAutoFit/>
-          </a:bodyPr>
-          <a:lstStyle/>
-          <a:p>
-            <a:pPr>
-              <a:spcAft>
-                <a:spcPts val="600"/>
-              </a:spcAft>
-              <a:defRPr sz="1300" b="1">
-                <a:solidFill>
-                  <a:srgbClr val="FFFFFF"/>
-                </a:solidFill>
-                <a:latin typeface="Montserrat"/>
-              </a:defRPr>
-            </a:pPr>
-            <a:r>
-              <a:t>RE-REVIEW</a:t>
-            </a:r>
-          </a:p>
-        </p:txBody>
-      </p:sp>
-      <p:sp>
-        <p:nvSpPr>
-          <p:cNvPr id="16" name="TextBox 15"/>
-          <p:cNvSpPr txBox="1"/>
-          <p:nvPr/>
-        </p:nvSpPr>
-        <p:spPr>
-          <a:xfrm>
-            <a:off x="4114800" y="4462272"/>
-            <a:ext cx="9646920" cy="841248"/>
-          </a:xfrm>
-          <a:prstGeom prst="rect">
-            <a:avLst/>
-          </a:prstGeom>
-          <a:noFill/>
-        </p:spPr>
-        <p:txBody>
-          <a:bodyPr wrap="square" lIns="18288" rIns="18288" tIns="0" bIns="0">
-            <a:spAutoFit/>
-          </a:bodyPr>
-          <a:lstStyle/>
-          <a:p>
-            <a:pPr>
-              <a:spcAft>
-                <a:spcPts val="600"/>
-              </a:spcAft>
-              <a:defRPr sz="1600" b="0">
-                <a:solidFill>
-                  <a:srgbClr val="202020"/>
-                </a:solidFill>
-                <a:latin typeface="Montserrat"/>
-              </a:defRPr>
-            </a:pPr>
-            <a:r>
-              <a:t>Required quality/MM layers decide current version.</a:t>
-            </a:r>
-          </a:p>
-        </p:txBody>
-      </p:sp>
-      <p:sp>
-        <p:nvSpPr>
-          <p:cNvPr id="17" name="Rectangle 16"/>
-          <p:cNvSpPr/>
-          <p:nvPr/>
-        </p:nvSpPr>
-        <p:spPr>
-          <a:xfrm>
-            <a:off x="777240" y="5394960"/>
-            <a:ext cx="3063240" cy="896112"/>
-          </a:xfrm>
-          <a:prstGeom prst="rect">
-            <a:avLst/>
-          </a:prstGeom>
-          <a:solidFill>
-            <a:srgbClr val="7D2B42"/>
-          </a:solidFill>
-          <a:ln>
-            <a:noFill/>
-          </a:ln>
-        </p:spPr>
-        <p:style>
-          <a:lnRef idx="1">
-            <a:schemeClr val="accent1"/>
-          </a:lnRef>
-          <a:fillRef idx="3">
-            <a:schemeClr val="accent1"/>
-          </a:fillRef>
-          <a:effectRef idx="2">
-            <a:schemeClr val="accent1"/>
-          </a:effectRef>
-          <a:fontRef idx="minor">
-            <a:schemeClr val="lt1"/>
-          </a:fontRef>
-        </p:style>
-        <p:txBody>
-          <a:bodyPr rtlCol="0" anchor="ctr"/>
-          <a:lstStyle/>
-          <a:p>
-            <a:pPr algn="ctr"/>
-          </a:p>
-        </p:txBody>
-      </p:sp>
-      <p:sp>
-        <p:nvSpPr>
-          <p:cNvPr id="18" name="TextBox 17"/>
-          <p:cNvSpPr txBox="1"/>
-          <p:nvPr/>
-        </p:nvSpPr>
-        <p:spPr>
-          <a:xfrm>
-            <a:off x="914400" y="5504688"/>
-            <a:ext cx="2788920" cy="822960"/>
-          </a:xfrm>
-          <a:prstGeom prst="rect">
-            <a:avLst/>
-          </a:prstGeom>
-          <a:noFill/>
-        </p:spPr>
-        <p:txBody>
-          <a:bodyPr wrap="square" lIns="18288" rIns="18288" tIns="0" bIns="0">
-            <a:spAutoFit/>
-          </a:bodyPr>
-          <a:lstStyle/>
-          <a:p>
-            <a:pPr>
-              <a:spcAft>
-                <a:spcPts val="600"/>
-              </a:spcAft>
-              <a:defRPr sz="1300" b="1">
-                <a:solidFill>
-                  <a:srgbClr val="FFFFFF"/>
-                </a:solidFill>
-                <a:latin typeface="Montserrat"/>
-              </a:defRPr>
-            </a:pPr>
-            <a:r>
-              <a:t>CLIENT</a:t>
-            </a:r>
-          </a:p>
-        </p:txBody>
-      </p:sp>
-      <p:sp>
-        <p:nvSpPr>
-          <p:cNvPr id="19" name="TextBox 18"/>
-          <p:cNvSpPr txBox="1"/>
-          <p:nvPr/>
-        </p:nvSpPr>
-        <p:spPr>
-          <a:xfrm>
-            <a:off x="4114800" y="5468112"/>
-            <a:ext cx="9646920" cy="841248"/>
-          </a:xfrm>
-          <a:prstGeom prst="rect">
-            <a:avLst/>
-          </a:prstGeom>
-          <a:noFill/>
-        </p:spPr>
-        <p:txBody>
-          <a:bodyPr wrap="square" lIns="18288" rIns="18288" tIns="0" bIns="0">
-            <a:spAutoFit/>
-          </a:bodyPr>
-          <a:lstStyle/>
-          <a:p>
-            <a:pPr>
-              <a:spcAft>
-                <a:spcPts val="600"/>
-              </a:spcAft>
-              <a:defRPr sz="1600" b="0">
-                <a:solidFill>
-                  <a:srgbClr val="202020"/>
-                </a:solidFill>
-                <a:latin typeface="Montserrat"/>
-              </a:defRPr>
-            </a:pPr>
-            <a:r>
-              <a:t>Affected changed work returns to client through AM where approval is needed.</a:t>
-            </a:r>
-          </a:p>
-        </p:txBody>
-      </p:sp>
-      <p:sp>
-        <p:nvSpPr>
-          <p:cNvPr id="20" name="Rectangle 19"/>
-          <p:cNvSpPr/>
-          <p:nvPr/>
-        </p:nvSpPr>
-        <p:spPr>
-          <a:xfrm>
-            <a:off x="777240" y="6400800"/>
-            <a:ext cx="3063240" cy="896112"/>
-          </a:xfrm>
-          <a:prstGeom prst="rect">
-            <a:avLst/>
-          </a:prstGeom>
-          <a:solidFill>
-            <a:srgbClr val="7D2B42"/>
-          </a:solidFill>
-          <a:ln>
-            <a:noFill/>
-          </a:ln>
-        </p:spPr>
-        <p:style>
-          <a:lnRef idx="1">
-            <a:schemeClr val="accent1"/>
-          </a:lnRef>
-          <a:fillRef idx="3">
-            <a:schemeClr val="accent1"/>
-          </a:fillRef>
-          <a:effectRef idx="2">
-            <a:schemeClr val="accent1"/>
-          </a:effectRef>
-          <a:fontRef idx="minor">
-            <a:schemeClr val="lt1"/>
-          </a:fontRef>
-        </p:style>
-        <p:txBody>
-          <a:bodyPr rtlCol="0" anchor="ctr"/>
-          <a:lstStyle/>
-          <a:p>
-            <a:pPr algn="ctr"/>
-          </a:p>
-        </p:txBody>
-      </p:sp>
-      <p:sp>
-        <p:nvSpPr>
-          <p:cNvPr id="21" name="TextBox 20"/>
-          <p:cNvSpPr txBox="1"/>
-          <p:nvPr/>
-        </p:nvSpPr>
-        <p:spPr>
-          <a:xfrm>
-            <a:off x="914400" y="6510528"/>
-            <a:ext cx="2788920" cy="822960"/>
-          </a:xfrm>
-          <a:prstGeom prst="rect">
-            <a:avLst/>
-          </a:prstGeom>
-          <a:noFill/>
-        </p:spPr>
-        <p:txBody>
-          <a:bodyPr wrap="square" lIns="18288" rIns="18288" tIns="0" bIns="0">
-            <a:spAutoFit/>
-          </a:bodyPr>
-          <a:lstStyle/>
-          <a:p>
-            <a:pPr>
-              <a:spcAft>
-                <a:spcPts val="600"/>
-              </a:spcAft>
-              <a:defRPr sz="1300" b="1">
-                <a:solidFill>
-                  <a:srgbClr val="FFFFFF"/>
-                </a:solidFill>
-                <a:latin typeface="Montserrat"/>
-              </a:defRPr>
-            </a:pPr>
-            <a:r>
-              <a:t>DO NOT EQUATE</a:t>
-            </a:r>
-          </a:p>
-        </p:txBody>
-      </p:sp>
-      <p:sp>
-        <p:nvSpPr>
-          <p:cNvPr id="22" name="TextBox 21"/>
-          <p:cNvSpPr txBox="1"/>
-          <p:nvPr/>
-        </p:nvSpPr>
-        <p:spPr>
-          <a:xfrm>
-            <a:off x="4114800" y="6473952"/>
-            <a:ext cx="9646920" cy="841248"/>
-          </a:xfrm>
-          <a:prstGeom prst="rect">
-            <a:avLst/>
-          </a:prstGeom>
-          <a:noFill/>
-        </p:spPr>
-        <p:txBody>
-          <a:bodyPr wrap="square" lIns="18288" rIns="18288" tIns="0" bIns="0">
-            <a:spAutoFit/>
-          </a:bodyPr>
-          <a:lstStyle/>
-          <a:p>
-            <a:pPr>
-              <a:spcAft>
-                <a:spcPts val="600"/>
-              </a:spcAft>
-              <a:defRPr sz="1600" b="0">
-                <a:solidFill>
-                  <a:srgbClr val="202020"/>
-                </a:solidFill>
-                <a:latin typeface="Montserrat"/>
-              </a:defRPr>
-            </a:pPr>
-            <a:r>
-              <a:t>Edits done or a green cell with final client approval.</a:t>
+              <a:t>Correct copy/offer; brand and legibility; agreed dimensions/exports; source inputs; HD then MM; no premature final archive.</a:t>
             </a:r>
           </a:p>
         </p:txBody>
@@ -23070,7 +22932,7 @@
               </a:defRPr>
             </a:pPr>
             <a:r>
-              <a:t>EXCEPTIONS / YOUR DECISION QUESTIONS</a:t>
+              <a:t>QUALITY / VIDEO AND CLIENT PRESENTATION</a:t>
             </a:r>
           </a:p>
         </p:txBody>
@@ -23161,14 +23023,14 @@
         </p:nvSpPr>
         <p:spPr>
           <a:xfrm>
-            <a:off x="777240" y="2377440"/>
-            <a:ext cx="3063240" cy="896112"/>
+            <a:off x="777240" y="2468880"/>
+            <a:ext cx="6400800" cy="4480560"/>
           </a:xfrm>
           <a:prstGeom prst="rect">
             <a:avLst/>
           </a:prstGeom>
           <a:solidFill>
-            <a:srgbClr val="7D2B42"/>
+            <a:srgbClr val="FFFFFF"/>
           </a:solidFill>
           <a:ln>
             <a:noFill/>
@@ -23204,33 +23066,33 @@
         </p:nvSpPr>
         <p:spPr>
           <a:xfrm>
-            <a:off x="914400" y="2487168"/>
-            <a:ext cx="2788920" cy="822960"/>
-          </a:xfrm>
-          <a:prstGeom prst="rect">
-            <a:avLst/>
-          </a:prstGeom>
-          <a:noFill/>
-        </p:spPr>
-        <p:txBody>
-          <a:bodyPr wrap="square" lIns="18288" rIns="18288" tIns="0" bIns="0">
-            <a:spAutoFit/>
-          </a:bodyPr>
-          <a:lstStyle/>
-          <a:p>
-            <a:pPr>
-              <a:spcAft>
-                <a:spcPts val="600"/>
-              </a:spcAft>
-              <a:defRPr sz="1300" b="1">
-                <a:solidFill>
-                  <a:srgbClr val="FFFFFF"/>
-                </a:solidFill>
-                <a:latin typeface="Montserrat"/>
-              </a:defRPr>
-            </a:pPr>
-            <a:r>
-              <a:t>PRE-SALES</a:t>
+            <a:off x="1005840" y="2743200"/>
+            <a:ext cx="5943600" cy="822960"/>
+          </a:xfrm>
+          <a:prstGeom prst="rect">
+            <a:avLst/>
+          </a:prstGeom>
+          <a:noFill/>
+        </p:spPr>
+        <p:txBody>
+          <a:bodyPr wrap="square" lIns="18288" rIns="18288" tIns="0" bIns="0">
+            <a:spAutoFit/>
+          </a:bodyPr>
+          <a:lstStyle/>
+          <a:p>
+            <a:pPr>
+              <a:spcAft>
+                <a:spcPts val="600"/>
+              </a:spcAft>
+              <a:defRPr sz="2200" b="1">
+                <a:solidFill>
+                  <a:srgbClr val="7D2B42"/>
+                </a:solidFill>
+                <a:latin typeface="Montserrat"/>
+              </a:defRPr>
+            </a:pPr>
+            <a:r>
+              <a:t>VIDEO: DIRECT MM REVIEW</a:t>
             </a:r>
           </a:p>
         </p:txBody>
@@ -23243,25 +23105,25 @@
         </p:nvSpPr>
         <p:spPr>
           <a:xfrm>
-            <a:off x="4114800" y="2450592"/>
-            <a:ext cx="9646920" cy="841248"/>
-          </a:xfrm>
-          <a:prstGeom prst="rect">
-            <a:avLst/>
-          </a:prstGeom>
-          <a:noFill/>
-        </p:spPr>
-        <p:txBody>
-          <a:bodyPr wrap="square" lIns="18288" rIns="18288" tIns="0" bIns="0">
-            <a:spAutoFit/>
-          </a:bodyPr>
-          <a:lstStyle/>
-          <a:p>
-            <a:pPr>
-              <a:spcAft>
-                <a:spcPts val="600"/>
-              </a:spcAft>
-              <a:defRPr sz="1600" b="0">
+            <a:off x="1005840" y="3767328"/>
+            <a:ext cx="5943600" cy="2926080"/>
+          </a:xfrm>
+          <a:prstGeom prst="rect">
+            <a:avLst/>
+          </a:prstGeom>
+          <a:noFill/>
+        </p:spPr>
+        <p:txBody>
+          <a:bodyPr wrap="square" lIns="18288" rIns="18288" tIns="0" bIns="0">
+            <a:spAutoFit/>
+          </a:bodyPr>
+          <a:lstStyle/>
+          <a:p>
+            <a:pPr>
+              <a:spcAft>
+                <a:spcPts val="600"/>
+              </a:spcAft>
+              <a:defRPr sz="1900" b="0">
                 <a:solidFill>
                   <a:srgbClr val="202020"/>
                 </a:solidFill>
@@ -23269,7 +23131,7 @@
               </a:defRPr>
             </a:pPr>
             <a:r>
-              <a:t>Is readiness to sign actually confirmed? If not, actual strategy stays pending.</a:t>
+              <a:t>Check script, footage, timing, audio, subtitles, text/price accuracy and agreed export requirements. Record quality and internal approval separately.</a:t>
             </a:r>
           </a:p>
         </p:txBody>
@@ -23282,14 +23144,14 @@
         </p:nvSpPr>
         <p:spPr>
           <a:xfrm>
-            <a:off x="777240" y="3383280"/>
-            <a:ext cx="3063240" cy="896112"/>
+            <a:off x="7543800" y="2468880"/>
+            <a:ext cx="6400800" cy="4480560"/>
           </a:xfrm>
           <a:prstGeom prst="rect">
             <a:avLst/>
           </a:prstGeom>
           <a:solidFill>
-            <a:srgbClr val="7D2B42"/>
+            <a:srgbClr val="FFFFFF"/>
           </a:solidFill>
           <a:ln>
             <a:noFill/>
@@ -23325,33 +23187,33 @@
         </p:nvSpPr>
         <p:spPr>
           <a:xfrm>
-            <a:off x="914400" y="3493008"/>
-            <a:ext cx="2788920" cy="822960"/>
-          </a:xfrm>
-          <a:prstGeom prst="rect">
-            <a:avLst/>
-          </a:prstGeom>
-          <a:noFill/>
-        </p:spPr>
-        <p:txBody>
-          <a:bodyPr wrap="square" lIns="18288" rIns="18288" tIns="0" bIns="0">
-            <a:spAutoFit/>
-          </a:bodyPr>
-          <a:lstStyle/>
-          <a:p>
-            <a:pPr>
-              <a:spcAft>
-                <a:spcPts val="600"/>
-              </a:spcAft>
-              <a:defRPr sz="1300" b="1">
-                <a:solidFill>
-                  <a:srgbClr val="FFFFFF"/>
-                </a:solidFill>
-                <a:latin typeface="Montserrat"/>
-              </a:defRPr>
-            </a:pPr>
-            <a:r>
-              <a:t>DELIVERY</a:t>
+            <a:off x="7772400" y="2743200"/>
+            <a:ext cx="5943600" cy="822960"/>
+          </a:xfrm>
+          <a:prstGeom prst="rect">
+            <a:avLst/>
+          </a:prstGeom>
+          <a:noFill/>
+        </p:spPr>
+        <p:txBody>
+          <a:bodyPr wrap="square" lIns="18288" rIns="18288" tIns="0" bIns="0">
+            <a:spAutoFit/>
+          </a:bodyPr>
+          <a:lstStyle/>
+          <a:p>
+            <a:pPr>
+              <a:spcAft>
+                <a:spcPts val="600"/>
+              </a:spcAft>
+              <a:defRPr sz="2200" b="1">
+                <a:solidFill>
+                  <a:srgbClr val="7D2B42"/>
+                </a:solidFill>
+                <a:latin typeface="Montserrat"/>
+              </a:defRPr>
+            </a:pPr>
+            <a:r>
+              <a:t>CLIENT PACK: AM COORDINATION</a:t>
             </a:r>
           </a:p>
         </p:txBody>
@@ -23364,25 +23226,25 @@
         </p:nvSpPr>
         <p:spPr>
           <a:xfrm>
-            <a:off x="4114800" y="3456432"/>
-            <a:ext cx="9646920" cy="841248"/>
-          </a:xfrm>
-          <a:prstGeom prst="rect">
-            <a:avLst/>
-          </a:prstGeom>
-          <a:noFill/>
-        </p:spPr>
-        <p:txBody>
-          <a:bodyPr wrap="square" lIns="18288" rIns="18288" tIns="0" bIns="0">
-            <a:spAutoFit/>
-          </a:bodyPr>
-          <a:lstStyle/>
-          <a:p>
-            <a:pPr>
-              <a:spcAft>
-                <a:spcPts val="600"/>
-              </a:spcAft>
-              <a:defRPr sz="1600" b="0">
+            <a:off x="7772400" y="3767328"/>
+            <a:ext cx="5943600" cy="2926080"/>
+          </a:xfrm>
+          <a:prstGeom prst="rect">
+            <a:avLst/>
+          </a:prstGeom>
+          <a:noFill/>
+        </p:spPr>
+        <p:txBody>
+          <a:bodyPr wrap="square" lIns="18288" rIns="18288" tIns="0" bIns="0">
+            <a:spAutoFit/>
+          </a:bodyPr>
+          <a:lstStyle/>
+          <a:p>
+            <a:pPr>
+              <a:spcAft>
+                <a:spcPts val="600"/>
+              </a:spcAft>
+              <a:defRPr sz="1900" b="0">
                 <a:solidFill>
                   <a:srgbClr val="202020"/>
                 </a:solidFill>
@@ -23390,370 +23252,7 @@
               </a:defRPr>
             </a:pPr>
             <a:r>
-              <a:t>Are signed pack, verified payment and required inputs present?</a:t>
-            </a:r>
-          </a:p>
-        </p:txBody>
-      </p:sp>
-      <p:sp>
-        <p:nvSpPr>
-          <p:cNvPr id="14" name="Rectangle 13"/>
-          <p:cNvSpPr/>
-          <p:nvPr/>
-        </p:nvSpPr>
-        <p:spPr>
-          <a:xfrm>
-            <a:off x="777240" y="4389120"/>
-            <a:ext cx="3063240" cy="896112"/>
-          </a:xfrm>
-          <a:prstGeom prst="rect">
-            <a:avLst/>
-          </a:prstGeom>
-          <a:solidFill>
-            <a:srgbClr val="7D2B42"/>
-          </a:solidFill>
-          <a:ln>
-            <a:noFill/>
-          </a:ln>
-        </p:spPr>
-        <p:style>
-          <a:lnRef idx="1">
-            <a:schemeClr val="accent1"/>
-          </a:lnRef>
-          <a:fillRef idx="3">
-            <a:schemeClr val="accent1"/>
-          </a:fillRef>
-          <a:effectRef idx="2">
-            <a:schemeClr val="accent1"/>
-          </a:effectRef>
-          <a:fontRef idx="minor">
-            <a:schemeClr val="lt1"/>
-          </a:fontRef>
-        </p:style>
-        <p:txBody>
-          <a:bodyPr rtlCol="0" anchor="ctr"/>
-          <a:lstStyle/>
-          <a:p>
-            <a:pPr algn="ctr"/>
-          </a:p>
-        </p:txBody>
-      </p:sp>
-      <p:sp>
-        <p:nvSpPr>
-          <p:cNvPr id="15" name="TextBox 14"/>
-          <p:cNvSpPr txBox="1"/>
-          <p:nvPr/>
-        </p:nvSpPr>
-        <p:spPr>
-          <a:xfrm>
-            <a:off x="914400" y="4498848"/>
-            <a:ext cx="2788920" cy="822960"/>
-          </a:xfrm>
-          <a:prstGeom prst="rect">
-            <a:avLst/>
-          </a:prstGeom>
-          <a:noFill/>
-        </p:spPr>
-        <p:txBody>
-          <a:bodyPr wrap="square" lIns="18288" rIns="18288" tIns="0" bIns="0">
-            <a:spAutoFit/>
-          </a:bodyPr>
-          <a:lstStyle/>
-          <a:p>
-            <a:pPr>
-              <a:spcAft>
-                <a:spcPts val="600"/>
-              </a:spcAft>
-              <a:defRPr sz="1300" b="1">
-                <a:solidFill>
-                  <a:srgbClr val="FFFFFF"/>
-                </a:solidFill>
-                <a:latin typeface="Montserrat"/>
-              </a:defRPr>
-            </a:pPr>
-            <a:r>
-              <a:t>RELEASE</a:t>
-            </a:r>
-          </a:p>
-        </p:txBody>
-      </p:sp>
-      <p:sp>
-        <p:nvSpPr>
-          <p:cNvPr id="16" name="TextBox 15"/>
-          <p:cNvSpPr txBox="1"/>
-          <p:nvPr/>
-        </p:nvSpPr>
-        <p:spPr>
-          <a:xfrm>
-            <a:off x="4114800" y="4462272"/>
-            <a:ext cx="9646920" cy="841248"/>
-          </a:xfrm>
-          <a:prstGeom prst="rect">
-            <a:avLst/>
-          </a:prstGeom>
-          <a:noFill/>
-        </p:spPr>
-        <p:txBody>
-          <a:bodyPr wrap="square" lIns="18288" rIns="18288" tIns="0" bIns="0">
-            <a:spAutoFit/>
-          </a:bodyPr>
-          <a:lstStyle/>
-          <a:p>
-            <a:pPr>
-              <a:spcAft>
-                <a:spcPts val="600"/>
-              </a:spcAft>
-              <a:defRPr sz="1600" b="0">
-                <a:solidFill>
-                  <a:srgbClr val="202020"/>
-                </a:solidFill>
-                <a:latin typeface="Montserrat"/>
-              </a:defRPr>
-            </a:pPr>
-            <a:r>
-              <a:t>Is this exact version client-approved? If not, hold.</a:t>
-            </a:r>
-          </a:p>
-        </p:txBody>
-      </p:sp>
-      <p:sp>
-        <p:nvSpPr>
-          <p:cNvPr id="17" name="Rectangle 16"/>
-          <p:cNvSpPr/>
-          <p:nvPr/>
-        </p:nvSpPr>
-        <p:spPr>
-          <a:xfrm>
-            <a:off x="777240" y="5394960"/>
-            <a:ext cx="3063240" cy="896112"/>
-          </a:xfrm>
-          <a:prstGeom prst="rect">
-            <a:avLst/>
-          </a:prstGeom>
-          <a:solidFill>
-            <a:srgbClr val="7D2B42"/>
-          </a:solidFill>
-          <a:ln>
-            <a:noFill/>
-          </a:ln>
-        </p:spPr>
-        <p:style>
-          <a:lnRef idx="1">
-            <a:schemeClr val="accent1"/>
-          </a:lnRef>
-          <a:fillRef idx="3">
-            <a:schemeClr val="accent1"/>
-          </a:fillRef>
-          <a:effectRef idx="2">
-            <a:schemeClr val="accent1"/>
-          </a:effectRef>
-          <a:fontRef idx="minor">
-            <a:schemeClr val="lt1"/>
-          </a:fontRef>
-        </p:style>
-        <p:txBody>
-          <a:bodyPr rtlCol="0" anchor="ctr"/>
-          <a:lstStyle/>
-          <a:p>
-            <a:pPr algn="ctr"/>
-          </a:p>
-        </p:txBody>
-      </p:sp>
-      <p:sp>
-        <p:nvSpPr>
-          <p:cNvPr id="18" name="TextBox 17"/>
-          <p:cNvSpPr txBox="1"/>
-          <p:nvPr/>
-        </p:nvSpPr>
-        <p:spPr>
-          <a:xfrm>
-            <a:off x="914400" y="5504688"/>
-            <a:ext cx="2788920" cy="822960"/>
-          </a:xfrm>
-          <a:prstGeom prst="rect">
-            <a:avLst/>
-          </a:prstGeom>
-          <a:noFill/>
-        </p:spPr>
-        <p:txBody>
-          <a:bodyPr wrap="square" lIns="18288" rIns="18288" tIns="0" bIns="0">
-            <a:spAutoFit/>
-          </a:bodyPr>
-          <a:lstStyle/>
-          <a:p>
-            <a:pPr>
-              <a:spcAft>
-                <a:spcPts val="600"/>
-              </a:spcAft>
-              <a:defRPr sz="1300" b="1">
-                <a:solidFill>
-                  <a:srgbClr val="FFFFFF"/>
-                </a:solidFill>
-                <a:latin typeface="Montserrat"/>
-              </a:defRPr>
-            </a:pPr>
-            <a:r>
-              <a:t>AUTHORITY</a:t>
-            </a:r>
-          </a:p>
-        </p:txBody>
-      </p:sp>
-      <p:sp>
-        <p:nvSpPr>
-          <p:cNvPr id="19" name="TextBox 18"/>
-          <p:cNvSpPr txBox="1"/>
-          <p:nvPr/>
-        </p:nvSpPr>
-        <p:spPr>
-          <a:xfrm>
-            <a:off x="4114800" y="5468112"/>
-            <a:ext cx="9646920" cy="841248"/>
-          </a:xfrm>
-          <a:prstGeom prst="rect">
-            <a:avLst/>
-          </a:prstGeom>
-          <a:noFill/>
-        </p:spPr>
-        <p:txBody>
-          <a:bodyPr wrap="square" lIns="18288" rIns="18288" tIns="0" bIns="0">
-            <a:spAutoFit/>
-          </a:bodyPr>
-          <a:lstStyle/>
-          <a:p>
-            <a:pPr>
-              <a:spcAft>
-                <a:spcPts val="600"/>
-              </a:spcAft>
-              <a:defRPr sz="1600" b="0">
-                <a:solidFill>
-                  <a:srgbClr val="202020"/>
-                </a:solidFill>
-                <a:latin typeface="Montserrat"/>
-              </a:defRPr>
-            </a:pPr>
-            <a:r>
-              <a:t>Is a delegate and scope confirmed? If not, ask owner rather than bypass.</a:t>
-            </a:r>
-          </a:p>
-        </p:txBody>
-      </p:sp>
-      <p:sp>
-        <p:nvSpPr>
-          <p:cNvPr id="20" name="Rectangle 19"/>
-          <p:cNvSpPr/>
-          <p:nvPr/>
-        </p:nvSpPr>
-        <p:spPr>
-          <a:xfrm>
-            <a:off x="777240" y="6400800"/>
-            <a:ext cx="3063240" cy="896112"/>
-          </a:xfrm>
-          <a:prstGeom prst="rect">
-            <a:avLst/>
-          </a:prstGeom>
-          <a:solidFill>
-            <a:srgbClr val="7D2B42"/>
-          </a:solidFill>
-          <a:ln>
-            <a:noFill/>
-          </a:ln>
-        </p:spPr>
-        <p:style>
-          <a:lnRef idx="1">
-            <a:schemeClr val="accent1"/>
-          </a:lnRef>
-          <a:fillRef idx="3">
-            <a:schemeClr val="accent1"/>
-          </a:fillRef>
-          <a:effectRef idx="2">
-            <a:schemeClr val="accent1"/>
-          </a:effectRef>
-          <a:fontRef idx="minor">
-            <a:schemeClr val="lt1"/>
-          </a:fontRef>
-        </p:style>
-        <p:txBody>
-          <a:bodyPr rtlCol="0" anchor="ctr"/>
-          <a:lstStyle/>
-          <a:p>
-            <a:pPr algn="ctr"/>
-          </a:p>
-        </p:txBody>
-      </p:sp>
-      <p:sp>
-        <p:nvSpPr>
-          <p:cNvPr id="21" name="TextBox 20"/>
-          <p:cNvSpPr txBox="1"/>
-          <p:nvPr/>
-        </p:nvSpPr>
-        <p:spPr>
-          <a:xfrm>
-            <a:off x="914400" y="6510528"/>
-            <a:ext cx="2788920" cy="822960"/>
-          </a:xfrm>
-          <a:prstGeom prst="rect">
-            <a:avLst/>
-          </a:prstGeom>
-          <a:noFill/>
-        </p:spPr>
-        <p:txBody>
-          <a:bodyPr wrap="square" lIns="18288" rIns="18288" tIns="0" bIns="0">
-            <a:spAutoFit/>
-          </a:bodyPr>
-          <a:lstStyle/>
-          <a:p>
-            <a:pPr>
-              <a:spcAft>
-                <a:spcPts val="600"/>
-              </a:spcAft>
-              <a:defRPr sz="1300" b="1">
-                <a:solidFill>
-                  <a:srgbClr val="FFFFFF"/>
-                </a:solidFill>
-                <a:latin typeface="Montserrat"/>
-              </a:defRPr>
-            </a:pPr>
-            <a:r>
-              <a:t>EVIDENCE</a:t>
-            </a:r>
-          </a:p>
-        </p:txBody>
-      </p:sp>
-      <p:sp>
-        <p:nvSpPr>
-          <p:cNvPr id="22" name="TextBox 21"/>
-          <p:cNvSpPr txBox="1"/>
-          <p:nvPr/>
-        </p:nvSpPr>
-        <p:spPr>
-          <a:xfrm>
-            <a:off x="4114800" y="6473952"/>
-            <a:ext cx="9646920" cy="841248"/>
-          </a:xfrm>
-          <a:prstGeom prst="rect">
-            <a:avLst/>
-          </a:prstGeom>
-          <a:noFill/>
-        </p:spPr>
-        <p:txBody>
-          <a:bodyPr wrap="square" lIns="18288" rIns="18288" tIns="0" bIns="0">
-            <a:spAutoFit/>
-          </a:bodyPr>
-          <a:lstStyle/>
-          <a:p>
-            <a:pPr>
-              <a:spcAft>
-                <a:spcPts val="600"/>
-              </a:spcAft>
-              <a:defRPr sz="1600" b="0">
-                <a:solidFill>
-                  <a:srgbClr val="202020"/>
-                </a:solidFill>
-                <a:latin typeface="Montserrat"/>
-              </a:defRPr>
-            </a:pPr>
-            <a:r>
-              <a:t>Can the result/spend be verified? If not, label the gap and obtain sources.</a:t>
+              <a:t>Manifest matches internally approved work. Client approval covers the presented version; revised content goes back through relevant reviews.</a:t>
             </a:r>
           </a:p>
         </p:txBody>
@@ -24808,7 +24307,7 @@
               </a:defRPr>
             </a:pPr>
             <a:r>
-              <a:t>REPORTING / MORE THAN POSTS AND VIEWS</a:t>
+              <a:t>REVISIONS / KEEP THE TASK OPEN</a:t>
             </a:r>
           </a:p>
         </p:txBody>
@@ -24899,14 +24398,14 @@
         </p:nvSpPr>
         <p:spPr>
           <a:xfrm>
-            <a:off x="777240" y="2468880"/>
-            <a:ext cx="6400800" cy="4480560"/>
+            <a:off x="777240" y="2377440"/>
+            <a:ext cx="3063240" cy="896112"/>
           </a:xfrm>
           <a:prstGeom prst="rect">
             <a:avLst/>
           </a:prstGeom>
           <a:solidFill>
-            <a:srgbClr val="FFFFFF"/>
+            <a:srgbClr val="7D2B42"/>
           </a:solidFill>
           <a:ln>
             <a:noFill/>
@@ -24942,33 +24441,33 @@
         </p:nvSpPr>
         <p:spPr>
           <a:xfrm>
-            <a:off x="1005840" y="2743200"/>
-            <a:ext cx="5943600" cy="822960"/>
-          </a:xfrm>
-          <a:prstGeom prst="rect">
-            <a:avLst/>
-          </a:prstGeom>
-          <a:noFill/>
-        </p:spPr>
-        <p:txBody>
-          <a:bodyPr wrap="square" lIns="18288" rIns="18288" tIns="0" bIns="0">
-            <a:spAutoFit/>
-          </a:bodyPr>
-          <a:lstStyle/>
-          <a:p>
-            <a:pPr>
-              <a:spcAft>
-                <a:spcPts val="600"/>
-              </a:spcAft>
-              <a:defRPr sz="2200" b="1">
-                <a:solidFill>
-                  <a:srgbClr val="7D2B42"/>
-                </a:solidFill>
-                <a:latin typeface="Montserrat"/>
-              </a:defRPr>
-            </a:pPr>
-            <a:r>
-              <a:t>SOCIAL MEDIA SPECIALIST</a:t>
+            <a:off x="914400" y="2487168"/>
+            <a:ext cx="2788920" cy="822960"/>
+          </a:xfrm>
+          <a:prstGeom prst="rect">
+            <a:avLst/>
+          </a:prstGeom>
+          <a:noFill/>
+        </p:spPr>
+        <p:txBody>
+          <a:bodyPr wrap="square" lIns="18288" rIns="18288" tIns="0" bIns="0">
+            <a:spAutoFit/>
+          </a:bodyPr>
+          <a:lstStyle/>
+          <a:p>
+            <a:pPr>
+              <a:spcAft>
+                <a:spcPts val="600"/>
+              </a:spcAft>
+              <a:defRPr sz="1300" b="1">
+                <a:solidFill>
+                  <a:srgbClr val="FFFFFF"/>
+                </a:solidFill>
+                <a:latin typeface="Montserrat"/>
+              </a:defRPr>
+            </a:pPr>
+            <a:r>
+              <a:t>COMMENT</a:t>
             </a:r>
           </a:p>
         </p:txBody>
@@ -24981,25 +24480,25 @@
         </p:nvSpPr>
         <p:spPr>
           <a:xfrm>
-            <a:off x="1005840" y="3767328"/>
-            <a:ext cx="5943600" cy="2926080"/>
-          </a:xfrm>
-          <a:prstGeom prst="rect">
-            <a:avLst/>
-          </a:prstGeom>
-          <a:noFill/>
-        </p:spPr>
-        <p:txBody>
-          <a:bodyPr wrap="square" lIns="18288" rIns="18288" tIns="0" bIns="0">
-            <a:spAutoFit/>
-          </a:bodyPr>
-          <a:lstStyle/>
-          <a:p>
-            <a:pPr>
-              <a:spcAft>
-                <a:spcPts val="600"/>
-              </a:spcAft>
-              <a:defRPr sz="1900" b="0">
+            <a:off x="4114800" y="2450592"/>
+            <a:ext cx="9646920" cy="841248"/>
+          </a:xfrm>
+          <a:prstGeom prst="rect">
+            <a:avLst/>
+          </a:prstGeom>
+          <a:noFill/>
+        </p:spPr>
+        <p:txBody>
+          <a:bodyPr wrap="square" lIns="18288" rIns="18288" tIns="0" bIns="0">
+            <a:spAutoFit/>
+          </a:bodyPr>
+          <a:lstStyle/>
+          <a:p>
+            <a:pPr>
+              <a:spcAft>
+                <a:spcPts val="600"/>
+              </a:spcAft>
+              <a:defRPr sz="1600" b="0">
                 <a:solidFill>
                   <a:srgbClr val="202020"/>
                 </a:solidFill>
@@ -25007,7 +24506,7 @@
               </a:defRPr>
             </a:pPr>
             <a:r>
-              <a:t>Calendars, strategies, performance reports, listening reports, scheduling/publication and private-label page replies.</a:t>
+              <a:t>AM, MM or relevant head identifies item, issue, change and reason.</a:t>
             </a:r>
           </a:p>
         </p:txBody>
@@ -25020,14 +24519,14 @@
         </p:nvSpPr>
         <p:spPr>
           <a:xfrm>
-            <a:off x="7543800" y="2468880"/>
-            <a:ext cx="6400800" cy="4480560"/>
+            <a:off x="777240" y="3383280"/>
+            <a:ext cx="3063240" cy="896112"/>
           </a:xfrm>
           <a:prstGeom prst="rect">
             <a:avLst/>
           </a:prstGeom>
           <a:solidFill>
-            <a:srgbClr val="FFFFFF"/>
+            <a:srgbClr val="7D2B42"/>
           </a:solidFill>
           <a:ln>
             <a:noFill/>
@@ -25063,33 +24562,33 @@
         </p:nvSpPr>
         <p:spPr>
           <a:xfrm>
-            <a:off x="7772400" y="2743200"/>
-            <a:ext cx="5943600" cy="822960"/>
-          </a:xfrm>
-          <a:prstGeom prst="rect">
-            <a:avLst/>
-          </a:prstGeom>
-          <a:noFill/>
-        </p:spPr>
-        <p:txBody>
-          <a:bodyPr wrap="square" lIns="18288" rIns="18288" tIns="0" bIns="0">
-            <a:spAutoFit/>
-          </a:bodyPr>
-          <a:lstStyle/>
-          <a:p>
-            <a:pPr>
-              <a:spcAft>
-                <a:spcPts val="600"/>
-              </a:spcAft>
-              <a:defRPr sz="2200" b="1">
-                <a:solidFill>
-                  <a:srgbClr val="7D2B42"/>
-                </a:solidFill>
-                <a:latin typeface="Montserrat"/>
-              </a:defRPr>
-            </a:pPr>
-            <a:r>
-              <a:t>MEDIA BUYER + AM/MM</a:t>
+            <a:off x="914400" y="3493008"/>
+            <a:ext cx="2788920" cy="822960"/>
+          </a:xfrm>
+          <a:prstGeom prst="rect">
+            <a:avLst/>
+          </a:prstGeom>
+          <a:noFill/>
+        </p:spPr>
+        <p:txBody>
+          <a:bodyPr wrap="square" lIns="18288" rIns="18288" tIns="0" bIns="0">
+            <a:spAutoFit/>
+          </a:bodyPr>
+          <a:lstStyle/>
+          <a:p>
+            <a:pPr>
+              <a:spcAft>
+                <a:spcPts val="600"/>
+              </a:spcAft>
+              <a:defRPr sz="1300" b="1">
+                <a:solidFill>
+                  <a:srgbClr val="FFFFFF"/>
+                </a:solidFill>
+                <a:latin typeface="Montserrat"/>
+              </a:defRPr>
+            </a:pPr>
+            <a:r>
+              <a:t>EXECUTE</a:t>
             </a:r>
           </a:p>
         </p:txBody>
@@ -25102,25 +24601,25 @@
         </p:nvSpPr>
         <p:spPr>
           <a:xfrm>
-            <a:off x="7772400" y="3767328"/>
-            <a:ext cx="5943600" cy="2926080"/>
-          </a:xfrm>
-          <a:prstGeom prst="rect">
-            <a:avLst/>
-          </a:prstGeom>
-          <a:noFill/>
-        </p:spPr>
-        <p:txBody>
-          <a:bodyPr wrap="square" lIns="18288" rIns="18288" tIns="0" bIns="0">
-            <a:spAutoFit/>
-          </a:bodyPr>
-          <a:lstStyle/>
-          <a:p>
-            <a:pPr>
-              <a:spcAft>
-                <a:spcPts val="600"/>
-              </a:spcAft>
-              <a:defRPr sz="1900" b="0">
+            <a:off x="4114800" y="3456432"/>
+            <a:ext cx="9646920" cy="841248"/>
+          </a:xfrm>
+          <a:prstGeom prst="rect">
+            <a:avLst/>
+          </a:prstGeom>
+          <a:noFill/>
+        </p:spPr>
+        <p:txBody>
+          <a:bodyPr wrap="square" lIns="18288" rIns="18288" tIns="0" bIns="0">
+            <a:spAutoFit/>
+          </a:bodyPr>
+          <a:lstStyle/>
+          <a:p>
+            <a:pPr>
+              <a:spcAft>
+                <a:spcPts val="600"/>
+              </a:spcAft>
+              <a:defRPr sz="1600" b="0">
                 <a:solidFill>
                   <a:srgbClr val="202020"/>
                 </a:solidFill>
@@ -25128,7 +24627,370 @@
               </a:defRPr>
             </a:pPr>
             <a:r>
-              <a:t>Paid performance and actual expenses; AM/MM coordinate evidence-led recommendations. No invented baselines, spend or guaranteed outcomes.</a:t>
+              <a:t>Accountable holder implements every comment and records response.</a:t>
+            </a:r>
+          </a:p>
+        </p:txBody>
+      </p:sp>
+      <p:sp>
+        <p:nvSpPr>
+          <p:cNvPr id="14" name="Rectangle 13"/>
+          <p:cNvSpPr/>
+          <p:nvPr/>
+        </p:nvSpPr>
+        <p:spPr>
+          <a:xfrm>
+            <a:off x="777240" y="4389120"/>
+            <a:ext cx="3063240" cy="896112"/>
+          </a:xfrm>
+          <a:prstGeom prst="rect">
+            <a:avLst/>
+          </a:prstGeom>
+          <a:solidFill>
+            <a:srgbClr val="7D2B42"/>
+          </a:solidFill>
+          <a:ln>
+            <a:noFill/>
+          </a:ln>
+        </p:spPr>
+        <p:style>
+          <a:lnRef idx="1">
+            <a:schemeClr val="accent1"/>
+          </a:lnRef>
+          <a:fillRef idx="3">
+            <a:schemeClr val="accent1"/>
+          </a:fillRef>
+          <a:effectRef idx="2">
+            <a:schemeClr val="accent1"/>
+          </a:effectRef>
+          <a:fontRef idx="minor">
+            <a:schemeClr val="lt1"/>
+          </a:fontRef>
+        </p:style>
+        <p:txBody>
+          <a:bodyPr rtlCol="0" anchor="ctr"/>
+          <a:lstStyle/>
+          <a:p>
+            <a:pPr algn="ctr"/>
+          </a:p>
+        </p:txBody>
+      </p:sp>
+      <p:sp>
+        <p:nvSpPr>
+          <p:cNvPr id="15" name="TextBox 14"/>
+          <p:cNvSpPr txBox="1"/>
+          <p:nvPr/>
+        </p:nvSpPr>
+        <p:spPr>
+          <a:xfrm>
+            <a:off x="914400" y="4498848"/>
+            <a:ext cx="2788920" cy="822960"/>
+          </a:xfrm>
+          <a:prstGeom prst="rect">
+            <a:avLst/>
+          </a:prstGeom>
+          <a:noFill/>
+        </p:spPr>
+        <p:txBody>
+          <a:bodyPr wrap="square" lIns="18288" rIns="18288" tIns="0" bIns="0">
+            <a:spAutoFit/>
+          </a:bodyPr>
+          <a:lstStyle/>
+          <a:p>
+            <a:pPr>
+              <a:spcAft>
+                <a:spcPts val="600"/>
+              </a:spcAft>
+              <a:defRPr sz="1300" b="1">
+                <a:solidFill>
+                  <a:srgbClr val="FFFFFF"/>
+                </a:solidFill>
+                <a:latin typeface="Montserrat"/>
+              </a:defRPr>
+            </a:pPr>
+            <a:r>
+              <a:t>RE-REVIEW</a:t>
+            </a:r>
+          </a:p>
+        </p:txBody>
+      </p:sp>
+      <p:sp>
+        <p:nvSpPr>
+          <p:cNvPr id="16" name="TextBox 15"/>
+          <p:cNvSpPr txBox="1"/>
+          <p:nvPr/>
+        </p:nvSpPr>
+        <p:spPr>
+          <a:xfrm>
+            <a:off x="4114800" y="4462272"/>
+            <a:ext cx="9646920" cy="841248"/>
+          </a:xfrm>
+          <a:prstGeom prst="rect">
+            <a:avLst/>
+          </a:prstGeom>
+          <a:noFill/>
+        </p:spPr>
+        <p:txBody>
+          <a:bodyPr wrap="square" lIns="18288" rIns="18288" tIns="0" bIns="0">
+            <a:spAutoFit/>
+          </a:bodyPr>
+          <a:lstStyle/>
+          <a:p>
+            <a:pPr>
+              <a:spcAft>
+                <a:spcPts val="600"/>
+              </a:spcAft>
+              <a:defRPr sz="1600" b="0">
+                <a:solidFill>
+                  <a:srgbClr val="202020"/>
+                </a:solidFill>
+                <a:latin typeface="Montserrat"/>
+              </a:defRPr>
+            </a:pPr>
+            <a:r>
+              <a:t>Required quality/MM layers decide current version.</a:t>
+            </a:r>
+          </a:p>
+        </p:txBody>
+      </p:sp>
+      <p:sp>
+        <p:nvSpPr>
+          <p:cNvPr id="17" name="Rectangle 16"/>
+          <p:cNvSpPr/>
+          <p:nvPr/>
+        </p:nvSpPr>
+        <p:spPr>
+          <a:xfrm>
+            <a:off x="777240" y="5394960"/>
+            <a:ext cx="3063240" cy="896112"/>
+          </a:xfrm>
+          <a:prstGeom prst="rect">
+            <a:avLst/>
+          </a:prstGeom>
+          <a:solidFill>
+            <a:srgbClr val="7D2B42"/>
+          </a:solidFill>
+          <a:ln>
+            <a:noFill/>
+          </a:ln>
+        </p:spPr>
+        <p:style>
+          <a:lnRef idx="1">
+            <a:schemeClr val="accent1"/>
+          </a:lnRef>
+          <a:fillRef idx="3">
+            <a:schemeClr val="accent1"/>
+          </a:fillRef>
+          <a:effectRef idx="2">
+            <a:schemeClr val="accent1"/>
+          </a:effectRef>
+          <a:fontRef idx="minor">
+            <a:schemeClr val="lt1"/>
+          </a:fontRef>
+        </p:style>
+        <p:txBody>
+          <a:bodyPr rtlCol="0" anchor="ctr"/>
+          <a:lstStyle/>
+          <a:p>
+            <a:pPr algn="ctr"/>
+          </a:p>
+        </p:txBody>
+      </p:sp>
+      <p:sp>
+        <p:nvSpPr>
+          <p:cNvPr id="18" name="TextBox 17"/>
+          <p:cNvSpPr txBox="1"/>
+          <p:nvPr/>
+        </p:nvSpPr>
+        <p:spPr>
+          <a:xfrm>
+            <a:off x="914400" y="5504688"/>
+            <a:ext cx="2788920" cy="822960"/>
+          </a:xfrm>
+          <a:prstGeom prst="rect">
+            <a:avLst/>
+          </a:prstGeom>
+          <a:noFill/>
+        </p:spPr>
+        <p:txBody>
+          <a:bodyPr wrap="square" lIns="18288" rIns="18288" tIns="0" bIns="0">
+            <a:spAutoFit/>
+          </a:bodyPr>
+          <a:lstStyle/>
+          <a:p>
+            <a:pPr>
+              <a:spcAft>
+                <a:spcPts val="600"/>
+              </a:spcAft>
+              <a:defRPr sz="1300" b="1">
+                <a:solidFill>
+                  <a:srgbClr val="FFFFFF"/>
+                </a:solidFill>
+                <a:latin typeface="Montserrat"/>
+              </a:defRPr>
+            </a:pPr>
+            <a:r>
+              <a:t>CLIENT</a:t>
+            </a:r>
+          </a:p>
+        </p:txBody>
+      </p:sp>
+      <p:sp>
+        <p:nvSpPr>
+          <p:cNvPr id="19" name="TextBox 18"/>
+          <p:cNvSpPr txBox="1"/>
+          <p:nvPr/>
+        </p:nvSpPr>
+        <p:spPr>
+          <a:xfrm>
+            <a:off x="4114800" y="5468112"/>
+            <a:ext cx="9646920" cy="841248"/>
+          </a:xfrm>
+          <a:prstGeom prst="rect">
+            <a:avLst/>
+          </a:prstGeom>
+          <a:noFill/>
+        </p:spPr>
+        <p:txBody>
+          <a:bodyPr wrap="square" lIns="18288" rIns="18288" tIns="0" bIns="0">
+            <a:spAutoFit/>
+          </a:bodyPr>
+          <a:lstStyle/>
+          <a:p>
+            <a:pPr>
+              <a:spcAft>
+                <a:spcPts val="600"/>
+              </a:spcAft>
+              <a:defRPr sz="1600" b="0">
+                <a:solidFill>
+                  <a:srgbClr val="202020"/>
+                </a:solidFill>
+                <a:latin typeface="Montserrat"/>
+              </a:defRPr>
+            </a:pPr>
+            <a:r>
+              <a:t>Affected changed work returns to client through AM where approval is needed.</a:t>
+            </a:r>
+          </a:p>
+        </p:txBody>
+      </p:sp>
+      <p:sp>
+        <p:nvSpPr>
+          <p:cNvPr id="20" name="Rectangle 19"/>
+          <p:cNvSpPr/>
+          <p:nvPr/>
+        </p:nvSpPr>
+        <p:spPr>
+          <a:xfrm>
+            <a:off x="777240" y="6400800"/>
+            <a:ext cx="3063240" cy="896112"/>
+          </a:xfrm>
+          <a:prstGeom prst="rect">
+            <a:avLst/>
+          </a:prstGeom>
+          <a:solidFill>
+            <a:srgbClr val="7D2B42"/>
+          </a:solidFill>
+          <a:ln>
+            <a:noFill/>
+          </a:ln>
+        </p:spPr>
+        <p:style>
+          <a:lnRef idx="1">
+            <a:schemeClr val="accent1"/>
+          </a:lnRef>
+          <a:fillRef idx="3">
+            <a:schemeClr val="accent1"/>
+          </a:fillRef>
+          <a:effectRef idx="2">
+            <a:schemeClr val="accent1"/>
+          </a:effectRef>
+          <a:fontRef idx="minor">
+            <a:schemeClr val="lt1"/>
+          </a:fontRef>
+        </p:style>
+        <p:txBody>
+          <a:bodyPr rtlCol="0" anchor="ctr"/>
+          <a:lstStyle/>
+          <a:p>
+            <a:pPr algn="ctr"/>
+          </a:p>
+        </p:txBody>
+      </p:sp>
+      <p:sp>
+        <p:nvSpPr>
+          <p:cNvPr id="21" name="TextBox 20"/>
+          <p:cNvSpPr txBox="1"/>
+          <p:nvPr/>
+        </p:nvSpPr>
+        <p:spPr>
+          <a:xfrm>
+            <a:off x="914400" y="6510528"/>
+            <a:ext cx="2788920" cy="822960"/>
+          </a:xfrm>
+          <a:prstGeom prst="rect">
+            <a:avLst/>
+          </a:prstGeom>
+          <a:noFill/>
+        </p:spPr>
+        <p:txBody>
+          <a:bodyPr wrap="square" lIns="18288" rIns="18288" tIns="0" bIns="0">
+            <a:spAutoFit/>
+          </a:bodyPr>
+          <a:lstStyle/>
+          <a:p>
+            <a:pPr>
+              <a:spcAft>
+                <a:spcPts val="600"/>
+              </a:spcAft>
+              <a:defRPr sz="1300" b="1">
+                <a:solidFill>
+                  <a:srgbClr val="FFFFFF"/>
+                </a:solidFill>
+                <a:latin typeface="Montserrat"/>
+              </a:defRPr>
+            </a:pPr>
+            <a:r>
+              <a:t>DO NOT EQUATE</a:t>
+            </a:r>
+          </a:p>
+        </p:txBody>
+      </p:sp>
+      <p:sp>
+        <p:nvSpPr>
+          <p:cNvPr id="22" name="TextBox 21"/>
+          <p:cNvSpPr txBox="1"/>
+          <p:nvPr/>
+        </p:nvSpPr>
+        <p:spPr>
+          <a:xfrm>
+            <a:off x="4114800" y="6473952"/>
+            <a:ext cx="9646920" cy="841248"/>
+          </a:xfrm>
+          <a:prstGeom prst="rect">
+            <a:avLst/>
+          </a:prstGeom>
+          <a:noFill/>
+        </p:spPr>
+        <p:txBody>
+          <a:bodyPr wrap="square" lIns="18288" rIns="18288" tIns="0" bIns="0">
+            <a:spAutoFit/>
+          </a:bodyPr>
+          <a:lstStyle/>
+          <a:p>
+            <a:pPr>
+              <a:spcAft>
+                <a:spcPts val="600"/>
+              </a:spcAft>
+              <a:defRPr sz="1600" b="0">
+                <a:solidFill>
+                  <a:srgbClr val="202020"/>
+                </a:solidFill>
+                <a:latin typeface="Montserrat"/>
+              </a:defRPr>
+            </a:pPr>
+            <a:r>
+              <a:t>Edits done or a green cell with final client approval.</a:t>
             </a:r>
           </a:p>
         </p:txBody>
@@ -25314,7 +25176,7 @@
               </a:defRPr>
             </a:pPr>
             <a:r>
-              <a:t>COMMERCIAL ARITHMETIC / TRAINING ONLY</a:t>
+              <a:t>EXCEPTIONS / YOUR DECISION QUESTIONS</a:t>
             </a:r>
           </a:p>
         </p:txBody>
@@ -25405,14 +25267,14 @@
         </p:nvSpPr>
         <p:spPr>
           <a:xfrm>
-            <a:off x="777240" y="2468880"/>
-            <a:ext cx="6400800" cy="4480560"/>
+            <a:off x="777240" y="2377440"/>
+            <a:ext cx="3063240" cy="896112"/>
           </a:xfrm>
           <a:prstGeom prst="rect">
             <a:avLst/>
           </a:prstGeom>
           <a:solidFill>
-            <a:srgbClr val="FFFFFF"/>
+            <a:srgbClr val="7D2B42"/>
           </a:solidFill>
           <a:ln>
             <a:noFill/>
@@ -25448,33 +25310,33 @@
         </p:nvSpPr>
         <p:spPr>
           <a:xfrm>
-            <a:off x="1005840" y="2743200"/>
-            <a:ext cx="5943600" cy="822960"/>
-          </a:xfrm>
-          <a:prstGeom prst="rect">
-            <a:avLst/>
-          </a:prstGeom>
-          <a:noFill/>
-        </p:spPr>
-        <p:txBody>
-          <a:bodyPr wrap="square" lIns="18288" rIns="18288" tIns="0" bIns="0">
-            <a:spAutoFit/>
-          </a:bodyPr>
-          <a:lstStyle/>
-          <a:p>
-            <a:pPr>
-              <a:spcAft>
-                <a:spcPts val="600"/>
-              </a:spcAft>
-              <a:defRPr sz="2200" b="1">
-                <a:solidFill>
-                  <a:srgbClr val="7D2B42"/>
-                </a:solidFill>
-                <a:latin typeface="Montserrat"/>
-              </a:defRPr>
-            </a:pPr>
-            <a:r>
-              <a:t>CONTRACT EXAMPLE</a:t>
+            <a:off x="914400" y="2487168"/>
+            <a:ext cx="2788920" cy="822960"/>
+          </a:xfrm>
+          <a:prstGeom prst="rect">
+            <a:avLst/>
+          </a:prstGeom>
+          <a:noFill/>
+        </p:spPr>
+        <p:txBody>
+          <a:bodyPr wrap="square" lIns="18288" rIns="18288" tIns="0" bIns="0">
+            <a:spAutoFit/>
+          </a:bodyPr>
+          <a:lstStyle/>
+          <a:p>
+            <a:pPr>
+              <a:spcAft>
+                <a:spcPts val="600"/>
+              </a:spcAft>
+              <a:defRPr sz="1300" b="1">
+                <a:solidFill>
+                  <a:srgbClr val="FFFFFF"/>
+                </a:solidFill>
+                <a:latin typeface="Montserrat"/>
+              </a:defRPr>
+            </a:pPr>
+            <a:r>
+              <a:t>PRE-SALES</a:t>
             </a:r>
           </a:p>
         </p:txBody>
@@ -25487,25 +25349,25 @@
         </p:nvSpPr>
         <p:spPr>
           <a:xfrm>
-            <a:off x="1005840" y="3767328"/>
-            <a:ext cx="5943600" cy="2926080"/>
-          </a:xfrm>
-          <a:prstGeom prst="rect">
-            <a:avLst/>
-          </a:prstGeom>
-          <a:noFill/>
-        </p:spPr>
-        <p:txBody>
-          <a:bodyPr wrap="square" lIns="18288" rIns="18288" tIns="0" bIns="0">
-            <a:spAutoFit/>
-          </a:bodyPr>
-          <a:lstStyle/>
-          <a:p>
-            <a:pPr>
-              <a:spcAft>
-                <a:spcPts val="600"/>
-              </a:spcAft>
-              <a:defRPr sz="1900" b="0">
+            <a:off x="4114800" y="2450592"/>
+            <a:ext cx="9646920" cy="841248"/>
+          </a:xfrm>
+          <a:prstGeom prst="rect">
+            <a:avLst/>
+          </a:prstGeom>
+          <a:noFill/>
+        </p:spPr>
+        <p:txBody>
+          <a:bodyPr wrap="square" lIns="18288" rIns="18288" tIns="0" bIns="0">
+            <a:spAutoFit/>
+          </a:bodyPr>
+          <a:lstStyle/>
+          <a:p>
+            <a:pPr>
+              <a:spcAft>
+                <a:spcPts val="600"/>
+              </a:spcAft>
+              <a:defRPr sz="1600" b="0">
                 <a:solidFill>
                   <a:srgbClr val="202020"/>
                 </a:solidFill>
@@ -25513,7 +25375,7 @@
               </a:defRPr>
             </a:pPr>
             <a:r>
-              <a:t>10,000 units: social-only needs 10,000; other-services-included needs at least 5,000. Signed pack and authorized verification still required.</a:t>
+              <a:t>Is readiness to sign actually confirmed? If not, actual strategy stays pending.</a:t>
             </a:r>
           </a:p>
         </p:txBody>
@@ -25526,14 +25388,14 @@
         </p:nvSpPr>
         <p:spPr>
           <a:xfrm>
-            <a:off x="7543800" y="2468880"/>
-            <a:ext cx="6400800" cy="4480560"/>
+            <a:off x="777240" y="3383280"/>
+            <a:ext cx="3063240" cy="896112"/>
           </a:xfrm>
           <a:prstGeom prst="rect">
             <a:avLst/>
           </a:prstGeom>
           <a:solidFill>
-            <a:srgbClr val="FFFFFF"/>
+            <a:srgbClr val="7D2B42"/>
           </a:solidFill>
           <a:ln>
             <a:noFill/>
@@ -25569,33 +25431,33 @@
         </p:nvSpPr>
         <p:spPr>
           <a:xfrm>
-            <a:off x="7772400" y="2743200"/>
-            <a:ext cx="5943600" cy="822960"/>
-          </a:xfrm>
-          <a:prstGeom prst="rect">
-            <a:avLst/>
-          </a:prstGeom>
-          <a:noFill/>
-        </p:spPr>
-        <p:txBody>
-          <a:bodyPr wrap="square" lIns="18288" rIns="18288" tIns="0" bIns="0">
-            <a:spAutoFit/>
-          </a:bodyPr>
-          <a:lstStyle/>
-          <a:p>
-            <a:pPr>
-              <a:spcAft>
-                <a:spcPts val="600"/>
-              </a:spcAft>
-              <a:defRPr sz="2200" b="1">
-                <a:solidFill>
-                  <a:srgbClr val="7D2B42"/>
-                </a:solidFill>
-                <a:latin typeface="Montserrat"/>
-              </a:defRPr>
-            </a:pPr>
-            <a:r>
-              <a:t>MEDIA EXAMPLE</a:t>
+            <a:off x="914400" y="3493008"/>
+            <a:ext cx="2788920" cy="822960"/>
+          </a:xfrm>
+          <a:prstGeom prst="rect">
+            <a:avLst/>
+          </a:prstGeom>
+          <a:noFill/>
+        </p:spPr>
+        <p:txBody>
+          <a:bodyPr wrap="square" lIns="18288" rIns="18288" tIns="0" bIns="0">
+            <a:spAutoFit/>
+          </a:bodyPr>
+          <a:lstStyle/>
+          <a:p>
+            <a:pPr>
+              <a:spcAft>
+                <a:spcPts val="600"/>
+              </a:spcAft>
+              <a:defRPr sz="1300" b="1">
+                <a:solidFill>
+                  <a:srgbClr val="FFFFFF"/>
+                </a:solidFill>
+                <a:latin typeface="Montserrat"/>
+              </a:defRPr>
+            </a:pPr>
+            <a:r>
+              <a:t>DELIVERY</a:t>
             </a:r>
           </a:p>
         </p:txBody>
@@ -25608,25 +25470,25 @@
         </p:nvSpPr>
         <p:spPr>
           <a:xfrm>
-            <a:off x="7772400" y="3767328"/>
-            <a:ext cx="5943600" cy="2926080"/>
-          </a:xfrm>
-          <a:prstGeom prst="rect">
-            <a:avLst/>
-          </a:prstGeom>
-          <a:noFill/>
-        </p:spPr>
-        <p:txBody>
-          <a:bodyPr wrap="square" lIns="18288" rIns="18288" tIns="0" bIns="0">
-            <a:spAutoFit/>
-          </a:bodyPr>
-          <a:lstStyle/>
-          <a:p>
-            <a:pPr>
-              <a:spcAft>
-                <a:spcPts val="600"/>
-              </a:spcAft>
-              <a:defRPr sz="1900" b="0">
+            <a:off x="4114800" y="3456432"/>
+            <a:ext cx="9646920" cy="841248"/>
+          </a:xfrm>
+          <a:prstGeom prst="rect">
+            <a:avLst/>
+          </a:prstGeom>
+          <a:noFill/>
+        </p:spPr>
+        <p:txBody>
+          <a:bodyPr wrap="square" lIns="18288" rIns="18288" tIns="0" bIns="0">
+            <a:spAutoFit/>
+          </a:bodyPr>
+          <a:lstStyle/>
+          <a:p>
+            <a:pPr>
+              <a:spcAft>
+                <a:spcPts val="600"/>
+              </a:spcAft>
+              <a:defRPr sz="1600" b="0">
                 <a:solidFill>
                   <a:srgbClr val="202020"/>
                 </a:solidFill>
@@ -25634,7 +25496,370 @@
               </a:defRPr>
             </a:pPr>
             <a:r>
-              <a:t>After execution, 8,000 verified actual-expense units × 25% = 2,000 fee. These are examples, not prices or market ranges.</a:t>
+              <a:t>Are signed pack, verified payment and required inputs present?</a:t>
+            </a:r>
+          </a:p>
+        </p:txBody>
+      </p:sp>
+      <p:sp>
+        <p:nvSpPr>
+          <p:cNvPr id="14" name="Rectangle 13"/>
+          <p:cNvSpPr/>
+          <p:nvPr/>
+        </p:nvSpPr>
+        <p:spPr>
+          <a:xfrm>
+            <a:off x="777240" y="4389120"/>
+            <a:ext cx="3063240" cy="896112"/>
+          </a:xfrm>
+          <a:prstGeom prst="rect">
+            <a:avLst/>
+          </a:prstGeom>
+          <a:solidFill>
+            <a:srgbClr val="7D2B42"/>
+          </a:solidFill>
+          <a:ln>
+            <a:noFill/>
+          </a:ln>
+        </p:spPr>
+        <p:style>
+          <a:lnRef idx="1">
+            <a:schemeClr val="accent1"/>
+          </a:lnRef>
+          <a:fillRef idx="3">
+            <a:schemeClr val="accent1"/>
+          </a:fillRef>
+          <a:effectRef idx="2">
+            <a:schemeClr val="accent1"/>
+          </a:effectRef>
+          <a:fontRef idx="minor">
+            <a:schemeClr val="lt1"/>
+          </a:fontRef>
+        </p:style>
+        <p:txBody>
+          <a:bodyPr rtlCol="0" anchor="ctr"/>
+          <a:lstStyle/>
+          <a:p>
+            <a:pPr algn="ctr"/>
+          </a:p>
+        </p:txBody>
+      </p:sp>
+      <p:sp>
+        <p:nvSpPr>
+          <p:cNvPr id="15" name="TextBox 14"/>
+          <p:cNvSpPr txBox="1"/>
+          <p:nvPr/>
+        </p:nvSpPr>
+        <p:spPr>
+          <a:xfrm>
+            <a:off x="914400" y="4498848"/>
+            <a:ext cx="2788920" cy="822960"/>
+          </a:xfrm>
+          <a:prstGeom prst="rect">
+            <a:avLst/>
+          </a:prstGeom>
+          <a:noFill/>
+        </p:spPr>
+        <p:txBody>
+          <a:bodyPr wrap="square" lIns="18288" rIns="18288" tIns="0" bIns="0">
+            <a:spAutoFit/>
+          </a:bodyPr>
+          <a:lstStyle/>
+          <a:p>
+            <a:pPr>
+              <a:spcAft>
+                <a:spcPts val="600"/>
+              </a:spcAft>
+              <a:defRPr sz="1300" b="1">
+                <a:solidFill>
+                  <a:srgbClr val="FFFFFF"/>
+                </a:solidFill>
+                <a:latin typeface="Montserrat"/>
+              </a:defRPr>
+            </a:pPr>
+            <a:r>
+              <a:t>RELEASE</a:t>
+            </a:r>
+          </a:p>
+        </p:txBody>
+      </p:sp>
+      <p:sp>
+        <p:nvSpPr>
+          <p:cNvPr id="16" name="TextBox 15"/>
+          <p:cNvSpPr txBox="1"/>
+          <p:nvPr/>
+        </p:nvSpPr>
+        <p:spPr>
+          <a:xfrm>
+            <a:off x="4114800" y="4462272"/>
+            <a:ext cx="9646920" cy="841248"/>
+          </a:xfrm>
+          <a:prstGeom prst="rect">
+            <a:avLst/>
+          </a:prstGeom>
+          <a:noFill/>
+        </p:spPr>
+        <p:txBody>
+          <a:bodyPr wrap="square" lIns="18288" rIns="18288" tIns="0" bIns="0">
+            <a:spAutoFit/>
+          </a:bodyPr>
+          <a:lstStyle/>
+          <a:p>
+            <a:pPr>
+              <a:spcAft>
+                <a:spcPts val="600"/>
+              </a:spcAft>
+              <a:defRPr sz="1600" b="0">
+                <a:solidFill>
+                  <a:srgbClr val="202020"/>
+                </a:solidFill>
+                <a:latin typeface="Montserrat"/>
+              </a:defRPr>
+            </a:pPr>
+            <a:r>
+              <a:t>Is this exact version client-approved? If not, hold.</a:t>
+            </a:r>
+          </a:p>
+        </p:txBody>
+      </p:sp>
+      <p:sp>
+        <p:nvSpPr>
+          <p:cNvPr id="17" name="Rectangle 16"/>
+          <p:cNvSpPr/>
+          <p:nvPr/>
+        </p:nvSpPr>
+        <p:spPr>
+          <a:xfrm>
+            <a:off x="777240" y="5394960"/>
+            <a:ext cx="3063240" cy="896112"/>
+          </a:xfrm>
+          <a:prstGeom prst="rect">
+            <a:avLst/>
+          </a:prstGeom>
+          <a:solidFill>
+            <a:srgbClr val="7D2B42"/>
+          </a:solidFill>
+          <a:ln>
+            <a:noFill/>
+          </a:ln>
+        </p:spPr>
+        <p:style>
+          <a:lnRef idx="1">
+            <a:schemeClr val="accent1"/>
+          </a:lnRef>
+          <a:fillRef idx="3">
+            <a:schemeClr val="accent1"/>
+          </a:fillRef>
+          <a:effectRef idx="2">
+            <a:schemeClr val="accent1"/>
+          </a:effectRef>
+          <a:fontRef idx="minor">
+            <a:schemeClr val="lt1"/>
+          </a:fontRef>
+        </p:style>
+        <p:txBody>
+          <a:bodyPr rtlCol="0" anchor="ctr"/>
+          <a:lstStyle/>
+          <a:p>
+            <a:pPr algn="ctr"/>
+          </a:p>
+        </p:txBody>
+      </p:sp>
+      <p:sp>
+        <p:nvSpPr>
+          <p:cNvPr id="18" name="TextBox 17"/>
+          <p:cNvSpPr txBox="1"/>
+          <p:nvPr/>
+        </p:nvSpPr>
+        <p:spPr>
+          <a:xfrm>
+            <a:off x="914400" y="5504688"/>
+            <a:ext cx="2788920" cy="822960"/>
+          </a:xfrm>
+          <a:prstGeom prst="rect">
+            <a:avLst/>
+          </a:prstGeom>
+          <a:noFill/>
+        </p:spPr>
+        <p:txBody>
+          <a:bodyPr wrap="square" lIns="18288" rIns="18288" tIns="0" bIns="0">
+            <a:spAutoFit/>
+          </a:bodyPr>
+          <a:lstStyle/>
+          <a:p>
+            <a:pPr>
+              <a:spcAft>
+                <a:spcPts val="600"/>
+              </a:spcAft>
+              <a:defRPr sz="1300" b="1">
+                <a:solidFill>
+                  <a:srgbClr val="FFFFFF"/>
+                </a:solidFill>
+                <a:latin typeface="Montserrat"/>
+              </a:defRPr>
+            </a:pPr>
+            <a:r>
+              <a:t>AUTHORITY</a:t>
+            </a:r>
+          </a:p>
+        </p:txBody>
+      </p:sp>
+      <p:sp>
+        <p:nvSpPr>
+          <p:cNvPr id="19" name="TextBox 18"/>
+          <p:cNvSpPr txBox="1"/>
+          <p:nvPr/>
+        </p:nvSpPr>
+        <p:spPr>
+          <a:xfrm>
+            <a:off x="4114800" y="5468112"/>
+            <a:ext cx="9646920" cy="841248"/>
+          </a:xfrm>
+          <a:prstGeom prst="rect">
+            <a:avLst/>
+          </a:prstGeom>
+          <a:noFill/>
+        </p:spPr>
+        <p:txBody>
+          <a:bodyPr wrap="square" lIns="18288" rIns="18288" tIns="0" bIns="0">
+            <a:spAutoFit/>
+          </a:bodyPr>
+          <a:lstStyle/>
+          <a:p>
+            <a:pPr>
+              <a:spcAft>
+                <a:spcPts val="600"/>
+              </a:spcAft>
+              <a:defRPr sz="1600" b="0">
+                <a:solidFill>
+                  <a:srgbClr val="202020"/>
+                </a:solidFill>
+                <a:latin typeface="Montserrat"/>
+              </a:defRPr>
+            </a:pPr>
+            <a:r>
+              <a:t>Is a delegate and scope confirmed? If not, ask owner rather than bypass.</a:t>
+            </a:r>
+          </a:p>
+        </p:txBody>
+      </p:sp>
+      <p:sp>
+        <p:nvSpPr>
+          <p:cNvPr id="20" name="Rectangle 19"/>
+          <p:cNvSpPr/>
+          <p:nvPr/>
+        </p:nvSpPr>
+        <p:spPr>
+          <a:xfrm>
+            <a:off x="777240" y="6400800"/>
+            <a:ext cx="3063240" cy="896112"/>
+          </a:xfrm>
+          <a:prstGeom prst="rect">
+            <a:avLst/>
+          </a:prstGeom>
+          <a:solidFill>
+            <a:srgbClr val="7D2B42"/>
+          </a:solidFill>
+          <a:ln>
+            <a:noFill/>
+          </a:ln>
+        </p:spPr>
+        <p:style>
+          <a:lnRef idx="1">
+            <a:schemeClr val="accent1"/>
+          </a:lnRef>
+          <a:fillRef idx="3">
+            <a:schemeClr val="accent1"/>
+          </a:fillRef>
+          <a:effectRef idx="2">
+            <a:schemeClr val="accent1"/>
+          </a:effectRef>
+          <a:fontRef idx="minor">
+            <a:schemeClr val="lt1"/>
+          </a:fontRef>
+        </p:style>
+        <p:txBody>
+          <a:bodyPr rtlCol="0" anchor="ctr"/>
+          <a:lstStyle/>
+          <a:p>
+            <a:pPr algn="ctr"/>
+          </a:p>
+        </p:txBody>
+      </p:sp>
+      <p:sp>
+        <p:nvSpPr>
+          <p:cNvPr id="21" name="TextBox 20"/>
+          <p:cNvSpPr txBox="1"/>
+          <p:nvPr/>
+        </p:nvSpPr>
+        <p:spPr>
+          <a:xfrm>
+            <a:off x="914400" y="6510528"/>
+            <a:ext cx="2788920" cy="822960"/>
+          </a:xfrm>
+          <a:prstGeom prst="rect">
+            <a:avLst/>
+          </a:prstGeom>
+          <a:noFill/>
+        </p:spPr>
+        <p:txBody>
+          <a:bodyPr wrap="square" lIns="18288" rIns="18288" tIns="0" bIns="0">
+            <a:spAutoFit/>
+          </a:bodyPr>
+          <a:lstStyle/>
+          <a:p>
+            <a:pPr>
+              <a:spcAft>
+                <a:spcPts val="600"/>
+              </a:spcAft>
+              <a:defRPr sz="1300" b="1">
+                <a:solidFill>
+                  <a:srgbClr val="FFFFFF"/>
+                </a:solidFill>
+                <a:latin typeface="Montserrat"/>
+              </a:defRPr>
+            </a:pPr>
+            <a:r>
+              <a:t>EVIDENCE</a:t>
+            </a:r>
+          </a:p>
+        </p:txBody>
+      </p:sp>
+      <p:sp>
+        <p:nvSpPr>
+          <p:cNvPr id="22" name="TextBox 21"/>
+          <p:cNvSpPr txBox="1"/>
+          <p:nvPr/>
+        </p:nvSpPr>
+        <p:spPr>
+          <a:xfrm>
+            <a:off x="4114800" y="6473952"/>
+            <a:ext cx="9646920" cy="841248"/>
+          </a:xfrm>
+          <a:prstGeom prst="rect">
+            <a:avLst/>
+          </a:prstGeom>
+          <a:noFill/>
+        </p:spPr>
+        <p:txBody>
+          <a:bodyPr wrap="square" lIns="18288" rIns="18288" tIns="0" bIns="0">
+            <a:spAutoFit/>
+          </a:bodyPr>
+          <a:lstStyle/>
+          <a:p>
+            <a:pPr>
+              <a:spcAft>
+                <a:spcPts val="600"/>
+              </a:spcAft>
+              <a:defRPr sz="1600" b="0">
+                <a:solidFill>
+                  <a:srgbClr val="202020"/>
+                </a:solidFill>
+                <a:latin typeface="Montserrat"/>
+              </a:defRPr>
+            </a:pPr>
+            <a:r>
+              <a:t>Can the result/spend be verified? If not, label the gap and obtain sources.</a:t>
             </a:r>
           </a:p>
         </p:txBody>
@@ -25820,7 +26045,7 @@
               </a:defRPr>
             </a:pPr>
             <a:r>
-              <a:t>WORKED CASE / ORBIT STUDIO IS FICTIONAL</a:t>
+              <a:t>REPORTING / MORE THAN POSTS AND VIEWS</a:t>
             </a:r>
           </a:p>
         </p:txBody>
@@ -25911,14 +26136,14 @@
         </p:nvSpPr>
         <p:spPr>
           <a:xfrm>
-            <a:off x="777240" y="2377440"/>
-            <a:ext cx="3063240" cy="896112"/>
+            <a:off x="777240" y="2468880"/>
+            <a:ext cx="6400800" cy="4480560"/>
           </a:xfrm>
           <a:prstGeom prst="rect">
             <a:avLst/>
           </a:prstGeom>
           <a:solidFill>
-            <a:srgbClr val="7D2B42"/>
+            <a:srgbClr val="FFFFFF"/>
           </a:solidFill>
           <a:ln>
             <a:noFill/>
@@ -25954,33 +26179,33 @@
         </p:nvSpPr>
         <p:spPr>
           <a:xfrm>
-            <a:off x="914400" y="2487168"/>
-            <a:ext cx="2788920" cy="822960"/>
-          </a:xfrm>
-          <a:prstGeom prst="rect">
-            <a:avLst/>
-          </a:prstGeom>
-          <a:noFill/>
-        </p:spPr>
-        <p:txBody>
-          <a:bodyPr wrap="square" lIns="18288" rIns="18288" tIns="0" bIns="0">
-            <a:spAutoFit/>
-          </a:bodyPr>
-          <a:lstStyle/>
-          <a:p>
-            <a:pPr>
-              <a:spcAft>
-                <a:spcPts val="600"/>
-              </a:spcAft>
-              <a:defRPr sz="1300" b="1">
-                <a:solidFill>
-                  <a:srgbClr val="FFFFFF"/>
-                </a:solidFill>
-                <a:latin typeface="Montserrat"/>
-              </a:defRPr>
-            </a:pPr>
-            <a:r>
-              <a:t>MEETING ONE</a:t>
+            <a:off x="1005840" y="2743200"/>
+            <a:ext cx="5943600" cy="822960"/>
+          </a:xfrm>
+          <a:prstGeom prst="rect">
+            <a:avLst/>
+          </a:prstGeom>
+          <a:noFill/>
+        </p:spPr>
+        <p:txBody>
+          <a:bodyPr wrap="square" lIns="18288" rIns="18288" tIns="0" bIns="0">
+            <a:spAutoFit/>
+          </a:bodyPr>
+          <a:lstStyle/>
+          <a:p>
+            <a:pPr>
+              <a:spcAft>
+                <a:spcPts val="600"/>
+              </a:spcAft>
+              <a:defRPr sz="2200" b="1">
+                <a:solidFill>
+                  <a:srgbClr val="7D2B42"/>
+                </a:solidFill>
+                <a:latin typeface="Montserrat"/>
+              </a:defRPr>
+            </a:pPr>
+            <a:r>
+              <a:t>SOCIAL MEDIA SPECIALIST</a:t>
             </a:r>
           </a:p>
         </p:txBody>
@@ -25993,25 +26218,25 @@
         </p:nvSpPr>
         <p:spPr>
           <a:xfrm>
-            <a:off x="4114800" y="2450592"/>
-            <a:ext cx="9646920" cy="841248"/>
-          </a:xfrm>
-          <a:prstGeom prst="rect">
-            <a:avLst/>
-          </a:prstGeom>
-          <a:noFill/>
-        </p:spPr>
-        <p:txBody>
-          <a:bodyPr wrap="square" lIns="18288" rIns="18288" tIns="0" bIns="0">
-            <a:spAutoFit/>
-          </a:bodyPr>
-          <a:lstStyle/>
-          <a:p>
-            <a:pPr>
-              <a:spcAft>
-                <a:spcPts val="600"/>
-              </a:spcAft>
-              <a:defRPr sz="1600" b="0">
+            <a:off x="1005840" y="3767328"/>
+            <a:ext cx="5943600" cy="2926080"/>
+          </a:xfrm>
+          <a:prstGeom prst="rect">
+            <a:avLst/>
+          </a:prstGeom>
+          <a:noFill/>
+        </p:spPr>
+        <p:txBody>
+          <a:bodyPr wrap="square" lIns="18288" rIns="18288" tIns="0" bIns="0">
+            <a:spAutoFit/>
+          </a:bodyPr>
+          <a:lstStyle/>
+          <a:p>
+            <a:pPr>
+              <a:spcAft>
+                <a:spcPts val="600"/>
+              </a:spcAft>
+              <a:defRPr sz="1900" b="0">
                 <a:solidFill>
                   <a:srgbClr val="202020"/>
                 </a:solidFill>
@@ -26019,7 +26244,7 @@
               </a:defRPr>
             </a:pPr>
             <a:r>
-              <a:t>Actual audience/assets differ from Sales/BD proposal; capture real brief.</a:t>
+              <a:t>Calendars, strategies, performance reports, listening reports, scheduling/publication and private-label page replies.</a:t>
             </a:r>
           </a:p>
         </p:txBody>
@@ -26032,14 +26257,14 @@
         </p:nvSpPr>
         <p:spPr>
           <a:xfrm>
-            <a:off x="777240" y="3383280"/>
-            <a:ext cx="3063240" cy="896112"/>
+            <a:off x="7543800" y="2468880"/>
+            <a:ext cx="6400800" cy="4480560"/>
           </a:xfrm>
           <a:prstGeom prst="rect">
             <a:avLst/>
           </a:prstGeom>
           <a:solidFill>
-            <a:srgbClr val="7D2B42"/>
+            <a:srgbClr val="FFFFFF"/>
           </a:solidFill>
           <a:ln>
             <a:noFill/>
@@ -26075,33 +26300,33 @@
         </p:nvSpPr>
         <p:spPr>
           <a:xfrm>
-            <a:off x="914400" y="3493008"/>
-            <a:ext cx="2788920" cy="822960"/>
-          </a:xfrm>
-          <a:prstGeom prst="rect">
-            <a:avLst/>
-          </a:prstGeom>
-          <a:noFill/>
-        </p:spPr>
-        <p:txBody>
-          <a:bodyPr wrap="square" lIns="18288" rIns="18288" tIns="0" bIns="0">
-            <a:spAutoFit/>
-          </a:bodyPr>
-          <a:lstStyle/>
-          <a:p>
-            <a:pPr>
-              <a:spcAft>
-                <a:spcPts val="600"/>
-              </a:spcAft>
-              <a:defRPr sz="1300" b="1">
-                <a:solidFill>
-                  <a:srgbClr val="FFFFFF"/>
-                </a:solidFill>
-                <a:latin typeface="Montserrat"/>
-              </a:defRPr>
-            </a:pPr>
-            <a:r>
-              <a:t>NOT READY</a:t>
+            <a:off x="7772400" y="2743200"/>
+            <a:ext cx="5943600" cy="822960"/>
+          </a:xfrm>
+          <a:prstGeom prst="rect">
+            <a:avLst/>
+          </a:prstGeom>
+          <a:noFill/>
+        </p:spPr>
+        <p:txBody>
+          <a:bodyPr wrap="square" lIns="18288" rIns="18288" tIns="0" bIns="0">
+            <a:spAutoFit/>
+          </a:bodyPr>
+          <a:lstStyle/>
+          <a:p>
+            <a:pPr>
+              <a:spcAft>
+                <a:spcPts val="600"/>
+              </a:spcAft>
+              <a:defRPr sz="2200" b="1">
+                <a:solidFill>
+                  <a:srgbClr val="7D2B42"/>
+                </a:solidFill>
+                <a:latin typeface="Montserrat"/>
+              </a:defRPr>
+            </a:pPr>
+            <a:r>
+              <a:t>MEDIA BUYER + AM/MM</a:t>
             </a:r>
           </a:p>
         </p:txBody>
@@ -26114,25 +26339,25 @@
         </p:nvSpPr>
         <p:spPr>
           <a:xfrm>
-            <a:off x="4114800" y="3456432"/>
-            <a:ext cx="9646920" cy="841248"/>
-          </a:xfrm>
-          <a:prstGeom prst="rect">
-            <a:avLst/>
-          </a:prstGeom>
-          <a:noFill/>
-        </p:spPr>
-        <p:txBody>
-          <a:bodyPr wrap="square" lIns="18288" rIns="18288" tIns="0" bIns="0">
-            <a:spAutoFit/>
-          </a:bodyPr>
-          <a:lstStyle/>
-          <a:p>
-            <a:pPr>
-              <a:spcAft>
-                <a:spcPts val="600"/>
-              </a:spcAft>
-              <a:defRPr sz="1600" b="0">
+            <a:off x="7772400" y="3767328"/>
+            <a:ext cx="5943600" cy="2926080"/>
+          </a:xfrm>
+          <a:prstGeom prst="rect">
+            <a:avLst/>
+          </a:prstGeom>
+          <a:noFill/>
+        </p:spPr>
+        <p:txBody>
+          <a:bodyPr wrap="square" lIns="18288" rIns="18288" tIns="0" bIns="0">
+            <a:spAutoFit/>
+          </a:bodyPr>
+          <a:lstStyle/>
+          <a:p>
+            <a:pPr>
+              <a:spcAft>
+                <a:spcPts val="600"/>
+              </a:spcAft>
+              <a:defRPr sz="1900" b="0">
                 <a:solidFill>
                   <a:srgbClr val="202020"/>
                 </a:solidFill>
@@ -26140,370 +26365,7 @@
               </a:defRPr>
             </a:pPr>
             <a:r>
-              <a:t>Actual-strategy group stays pending until client readiness is confirmed.</a:t>
-            </a:r>
-          </a:p>
-        </p:txBody>
-      </p:sp>
-      <p:sp>
-        <p:nvSpPr>
-          <p:cNvPr id="14" name="Rectangle 13"/>
-          <p:cNvSpPr/>
-          <p:nvPr/>
-        </p:nvSpPr>
-        <p:spPr>
-          <a:xfrm>
-            <a:off x="777240" y="4389120"/>
-            <a:ext cx="3063240" cy="896112"/>
-          </a:xfrm>
-          <a:prstGeom prst="rect">
-            <a:avLst/>
-          </a:prstGeom>
-          <a:solidFill>
-            <a:srgbClr val="7D2B42"/>
-          </a:solidFill>
-          <a:ln>
-            <a:noFill/>
-          </a:ln>
-        </p:spPr>
-        <p:style>
-          <a:lnRef idx="1">
-            <a:schemeClr val="accent1"/>
-          </a:lnRef>
-          <a:fillRef idx="3">
-            <a:schemeClr val="accent1"/>
-          </a:fillRef>
-          <a:effectRef idx="2">
-            <a:schemeClr val="accent1"/>
-          </a:effectRef>
-          <a:fontRef idx="minor">
-            <a:schemeClr val="lt1"/>
-          </a:fontRef>
-        </p:style>
-        <p:txBody>
-          <a:bodyPr rtlCol="0" anchor="ctr"/>
-          <a:lstStyle/>
-          <a:p>
-            <a:pPr algn="ctr"/>
-          </a:p>
-        </p:txBody>
-      </p:sp>
-      <p:sp>
-        <p:nvSpPr>
-          <p:cNvPr id="15" name="TextBox 14"/>
-          <p:cNvSpPr txBox="1"/>
-          <p:nvPr/>
-        </p:nvSpPr>
-        <p:spPr>
-          <a:xfrm>
-            <a:off x="914400" y="4498848"/>
-            <a:ext cx="2788920" cy="822960"/>
-          </a:xfrm>
-          <a:prstGeom prst="rect">
-            <a:avLst/>
-          </a:prstGeom>
-          <a:noFill/>
-        </p:spPr>
-        <p:txBody>
-          <a:bodyPr wrap="square" lIns="18288" rIns="18288" tIns="0" bIns="0">
-            <a:spAutoFit/>
-          </a:bodyPr>
-          <a:lstStyle/>
-          <a:p>
-            <a:pPr>
-              <a:spcAft>
-                <a:spcPts val="600"/>
-              </a:spcAft>
-              <a:defRPr sz="1300" b="1">
-                <a:solidFill>
-                  <a:srgbClr val="FFFFFF"/>
-                </a:solidFill>
-                <a:latin typeface="Montserrat"/>
-              </a:defRPr>
-            </a:pPr>
-            <a:r>
-              <a:t>READY → SIGN</a:t>
-            </a:r>
-          </a:p>
-        </p:txBody>
-      </p:sp>
-      <p:sp>
-        <p:nvSpPr>
-          <p:cNvPr id="16" name="TextBox 15"/>
-          <p:cNvSpPr txBox="1"/>
-          <p:nvPr/>
-        </p:nvSpPr>
-        <p:spPr>
-          <a:xfrm>
-            <a:off x="4114800" y="4462272"/>
-            <a:ext cx="9646920" cy="841248"/>
-          </a:xfrm>
-          <a:prstGeom prst="rect">
-            <a:avLst/>
-          </a:prstGeom>
-          <a:noFill/>
-        </p:spPr>
-        <p:txBody>
-          <a:bodyPr wrap="square" lIns="18288" rIns="18288" tIns="0" bIns="0">
-            <a:spAutoFit/>
-          </a:bodyPr>
-          <a:lstStyle/>
-          <a:p>
-            <a:pPr>
-              <a:spcAft>
-                <a:spcPts val="600"/>
-              </a:spcAft>
-              <a:defRPr sz="1600" b="0">
-                <a:solidFill>
-                  <a:srgbClr val="202020"/>
-                </a:solidFill>
-                <a:latin typeface="Montserrat"/>
-              </a:defRPr>
-            </a:pPr>
-            <a:r>
-              <a:t>AM/SM/MM/MB develop actual strategy; align scope; sign four materials.</a:t>
-            </a:r>
-          </a:p>
-        </p:txBody>
-      </p:sp>
-      <p:sp>
-        <p:nvSpPr>
-          <p:cNvPr id="17" name="Rectangle 16"/>
-          <p:cNvSpPr/>
-          <p:nvPr/>
-        </p:nvSpPr>
-        <p:spPr>
-          <a:xfrm>
-            <a:off x="777240" y="5394960"/>
-            <a:ext cx="3063240" cy="896112"/>
-          </a:xfrm>
-          <a:prstGeom prst="rect">
-            <a:avLst/>
-          </a:prstGeom>
-          <a:solidFill>
-            <a:srgbClr val="7D2B42"/>
-          </a:solidFill>
-          <a:ln>
-            <a:noFill/>
-          </a:ln>
-        </p:spPr>
-        <p:style>
-          <a:lnRef idx="1">
-            <a:schemeClr val="accent1"/>
-          </a:lnRef>
-          <a:fillRef idx="3">
-            <a:schemeClr val="accent1"/>
-          </a:fillRef>
-          <a:effectRef idx="2">
-            <a:schemeClr val="accent1"/>
-          </a:effectRef>
-          <a:fontRef idx="minor">
-            <a:schemeClr val="lt1"/>
-          </a:fontRef>
-        </p:style>
-        <p:txBody>
-          <a:bodyPr rtlCol="0" anchor="ctr"/>
-          <a:lstStyle/>
-          <a:p>
-            <a:pPr algn="ctr"/>
-          </a:p>
-        </p:txBody>
-      </p:sp>
-      <p:sp>
-        <p:nvSpPr>
-          <p:cNvPr id="18" name="TextBox 17"/>
-          <p:cNvSpPr txBox="1"/>
-          <p:nvPr/>
-        </p:nvSpPr>
-        <p:spPr>
-          <a:xfrm>
-            <a:off x="914400" y="5504688"/>
-            <a:ext cx="2788920" cy="822960"/>
-          </a:xfrm>
-          <a:prstGeom prst="rect">
-            <a:avLst/>
-          </a:prstGeom>
-          <a:noFill/>
-        </p:spPr>
-        <p:txBody>
-          <a:bodyPr wrap="square" lIns="18288" rIns="18288" tIns="0" bIns="0">
-            <a:spAutoFit/>
-          </a:bodyPr>
-          <a:lstStyle/>
-          <a:p>
-            <a:pPr>
-              <a:spcAft>
-                <a:spcPts val="600"/>
-              </a:spcAft>
-              <a:defRPr sz="1300" b="1">
-                <a:solidFill>
-                  <a:srgbClr val="FFFFFF"/>
-                </a:solidFill>
-                <a:latin typeface="Montserrat"/>
-              </a:defRPr>
-            </a:pPr>
-            <a:r>
-              <a:t>PAY → PRODUCE</a:t>
-            </a:r>
-          </a:p>
-        </p:txBody>
-      </p:sp>
-      <p:sp>
-        <p:nvSpPr>
-          <p:cNvPr id="19" name="TextBox 18"/>
-          <p:cNvSpPr txBox="1"/>
-          <p:nvPr/>
-        </p:nvSpPr>
-        <p:spPr>
-          <a:xfrm>
-            <a:off x="4114800" y="5468112"/>
-            <a:ext cx="9646920" cy="841248"/>
-          </a:xfrm>
-          <a:prstGeom prst="rect">
-            <a:avLst/>
-          </a:prstGeom>
-          <a:noFill/>
-        </p:spPr>
-        <p:txBody>
-          <a:bodyPr wrap="square" lIns="18288" rIns="18288" tIns="0" bIns="0">
-            <a:spAutoFit/>
-          </a:bodyPr>
-          <a:lstStyle/>
-          <a:p>
-            <a:pPr>
-              <a:spcAft>
-                <a:spcPts val="600"/>
-              </a:spcAft>
-              <a:defRPr sz="1600" b="0">
-                <a:solidFill>
-                  <a:srgbClr val="202020"/>
-                </a:solidFill>
-                <a:latin typeface="Montserrat"/>
-              </a:defRPr>
-            </a:pPr>
-            <a:r>
-              <a:t>Verify required upfront amount; AM assigns; missing footage blocks reel.</a:t>
-            </a:r>
-          </a:p>
-        </p:txBody>
-      </p:sp>
-      <p:sp>
-        <p:nvSpPr>
-          <p:cNvPr id="20" name="Rectangle 19"/>
-          <p:cNvSpPr/>
-          <p:nvPr/>
-        </p:nvSpPr>
-        <p:spPr>
-          <a:xfrm>
-            <a:off x="777240" y="6400800"/>
-            <a:ext cx="3063240" cy="896112"/>
-          </a:xfrm>
-          <a:prstGeom prst="rect">
-            <a:avLst/>
-          </a:prstGeom>
-          <a:solidFill>
-            <a:srgbClr val="7D2B42"/>
-          </a:solidFill>
-          <a:ln>
-            <a:noFill/>
-          </a:ln>
-        </p:spPr>
-        <p:style>
-          <a:lnRef idx="1">
-            <a:schemeClr val="accent1"/>
-          </a:lnRef>
-          <a:fillRef idx="3">
-            <a:schemeClr val="accent1"/>
-          </a:fillRef>
-          <a:effectRef idx="2">
-            <a:schemeClr val="accent1"/>
-          </a:effectRef>
-          <a:fontRef idx="minor">
-            <a:schemeClr val="lt1"/>
-          </a:fontRef>
-        </p:style>
-        <p:txBody>
-          <a:bodyPr rtlCol="0" anchor="ctr"/>
-          <a:lstStyle/>
-          <a:p>
-            <a:pPr algn="ctr"/>
-          </a:p>
-        </p:txBody>
-      </p:sp>
-      <p:sp>
-        <p:nvSpPr>
-          <p:cNvPr id="21" name="TextBox 20"/>
-          <p:cNvSpPr txBox="1"/>
-          <p:nvPr/>
-        </p:nvSpPr>
-        <p:spPr>
-          <a:xfrm>
-            <a:off x="914400" y="6510528"/>
-            <a:ext cx="2788920" cy="822960"/>
-          </a:xfrm>
-          <a:prstGeom prst="rect">
-            <a:avLst/>
-          </a:prstGeom>
-          <a:noFill/>
-        </p:spPr>
-        <p:txBody>
-          <a:bodyPr wrap="square" lIns="18288" rIns="18288" tIns="0" bIns="0">
-            <a:spAutoFit/>
-          </a:bodyPr>
-          <a:lstStyle/>
-          <a:p>
-            <a:pPr>
-              <a:spcAft>
-                <a:spcPts val="600"/>
-              </a:spcAft>
-              <a:defRPr sz="1300" b="1">
-                <a:solidFill>
-                  <a:srgbClr val="FFFFFF"/>
-                </a:solidFill>
-                <a:latin typeface="Montserrat"/>
-              </a:defRPr>
-            </a:pPr>
-            <a:r>
-              <a:t>REVIEW → RELEASE</a:t>
-            </a:r>
-          </a:p>
-        </p:txBody>
-      </p:sp>
-      <p:sp>
-        <p:nvSpPr>
-          <p:cNvPr id="22" name="TextBox 21"/>
-          <p:cNvSpPr txBox="1"/>
-          <p:nvPr/>
-        </p:nvSpPr>
-        <p:spPr>
-          <a:xfrm>
-            <a:off x="4114800" y="6473952"/>
-            <a:ext cx="9646920" cy="841248"/>
-          </a:xfrm>
-          <a:prstGeom prst="rect">
-            <a:avLst/>
-          </a:prstGeom>
-          <a:noFill/>
-        </p:spPr>
-        <p:txBody>
-          <a:bodyPr wrap="square" lIns="18288" rIns="18288" tIns="0" bIns="0">
-            <a:spAutoFit/>
-          </a:bodyPr>
-          <a:lstStyle/>
-          <a:p>
-            <a:pPr>
-              <a:spcAft>
-                <a:spcPts val="600"/>
-              </a:spcAft>
-              <a:defRPr sz="1600" b="0">
-                <a:solidFill>
-                  <a:srgbClr val="202020"/>
-                </a:solidFill>
-                <a:latin typeface="Montserrat"/>
-              </a:defRPr>
-            </a:pPr>
-            <a:r>
-              <a:t>Comments executed → quality/MM → AM pack → client approval → archive/publish.</a:t>
+              <a:t>Paid performance and actual expenses; AM/MM coordinate evidence-led recommendations. No invented baselines, spend or guaranteed outcomes.</a:t>
             </a:r>
           </a:p>
         </p:txBody>
@@ -26689,7 +26551,7 @@
               </a:defRPr>
             </a:pPr>
             <a:r>
-              <a:t>TEMPLATES YOU CAN REUSE</a:t>
+              <a:t>COMMERCIAL ARITHMETIC / TRAINING ONLY</a:t>
             </a:r>
           </a:p>
         </p:txBody>
@@ -26780,14 +26642,14 @@
         </p:nvSpPr>
         <p:spPr>
           <a:xfrm>
-            <a:off x="777240" y="2377440"/>
-            <a:ext cx="3063240" cy="896112"/>
+            <a:off x="777240" y="2468880"/>
+            <a:ext cx="6400800" cy="4480560"/>
           </a:xfrm>
           <a:prstGeom prst="rect">
             <a:avLst/>
           </a:prstGeom>
           <a:solidFill>
-            <a:srgbClr val="7D2B42"/>
+            <a:srgbClr val="FFFFFF"/>
           </a:solidFill>
           <a:ln>
             <a:noFill/>
@@ -26823,33 +26685,33 @@
         </p:nvSpPr>
         <p:spPr>
           <a:xfrm>
-            <a:off x="914400" y="2487168"/>
-            <a:ext cx="2788920" cy="822960"/>
-          </a:xfrm>
-          <a:prstGeom prst="rect">
-            <a:avLst/>
-          </a:prstGeom>
-          <a:noFill/>
-        </p:spPr>
-        <p:txBody>
-          <a:bodyPr wrap="square" lIns="18288" rIns="18288" tIns="0" bIns="0">
-            <a:spAutoFit/>
-          </a:bodyPr>
-          <a:lstStyle/>
-          <a:p>
-            <a:pPr>
-              <a:spcAft>
-                <a:spcPts val="600"/>
-              </a:spcAft>
-              <a:defRPr sz="1300" b="1">
-                <a:solidFill>
-                  <a:srgbClr val="FFFFFF"/>
-                </a:solidFill>
-                <a:latin typeface="Montserrat"/>
-              </a:defRPr>
-            </a:pPr>
-            <a:r>
-              <a:t>CONTROL</a:t>
+            <a:off x="1005840" y="2743200"/>
+            <a:ext cx="5943600" cy="822960"/>
+          </a:xfrm>
+          <a:prstGeom prst="rect">
+            <a:avLst/>
+          </a:prstGeom>
+          <a:noFill/>
+        </p:spPr>
+        <p:txBody>
+          <a:bodyPr wrap="square" lIns="18288" rIns="18288" tIns="0" bIns="0">
+            <a:spAutoFit/>
+          </a:bodyPr>
+          <a:lstStyle/>
+          <a:p>
+            <a:pPr>
+              <a:spcAft>
+                <a:spcPts val="600"/>
+              </a:spcAft>
+              <a:defRPr sz="2200" b="1">
+                <a:solidFill>
+                  <a:srgbClr val="7D2B42"/>
+                </a:solidFill>
+                <a:latin typeface="Montserrat"/>
+              </a:defRPr>
+            </a:pPr>
+            <a:r>
+              <a:t>CONTRACT EXAMPLE</a:t>
             </a:r>
           </a:p>
         </p:txBody>
@@ -26862,25 +26724,25 @@
         </p:nvSpPr>
         <p:spPr>
           <a:xfrm>
-            <a:off x="4114800" y="2450592"/>
-            <a:ext cx="9646920" cy="841248"/>
-          </a:xfrm>
-          <a:prstGeom prst="rect">
-            <a:avLst/>
-          </a:prstGeom>
-          <a:noFill/>
-        </p:spPr>
-        <p:txBody>
-          <a:bodyPr wrap="square" lIns="18288" rIns="18288" tIns="0" bIns="0">
-            <a:spAutoFit/>
-          </a:bodyPr>
-          <a:lstStyle/>
-          <a:p>
-            <a:pPr>
-              <a:spcAft>
-                <a:spcPts val="600"/>
-              </a:spcAft>
-              <a:defRPr sz="1600" b="0">
+            <a:off x="1005840" y="3767328"/>
+            <a:ext cx="5943600" cy="2926080"/>
+          </a:xfrm>
+          <a:prstGeom prst="rect">
+            <a:avLst/>
+          </a:prstGeom>
+          <a:noFill/>
+        </p:spPr>
+        <p:txBody>
+          <a:bodyPr wrap="square" lIns="18288" rIns="18288" tIns="0" bIns="0">
+            <a:spAutoFit/>
+          </a:bodyPr>
+          <a:lstStyle/>
+          <a:p>
+            <a:pPr>
+              <a:spcAft>
+                <a:spcPts val="600"/>
+              </a:spcAft>
+              <a:defRPr sz="1900" b="0">
                 <a:solidFill>
                   <a:srgbClr val="202020"/>
                 </a:solidFill>
@@ -26888,7 +26750,7 @@
               </a:defRPr>
             </a:pPr>
             <a:r>
-              <a:t>Access/authority inventory; client snapshot; proposal-vs-brief comparison.</a:t>
+              <a:t>10,000 units: social-only needs 10,000; other-services-included needs at least 5,000. Signed pack and authorized verification still required.</a:t>
             </a:r>
           </a:p>
         </p:txBody>
@@ -26901,14 +26763,14 @@
         </p:nvSpPr>
         <p:spPr>
           <a:xfrm>
-            <a:off x="777240" y="3383280"/>
-            <a:ext cx="3063240" cy="896112"/>
+            <a:off x="7543800" y="2468880"/>
+            <a:ext cx="6400800" cy="4480560"/>
           </a:xfrm>
           <a:prstGeom prst="rect">
             <a:avLst/>
           </a:prstGeom>
           <a:solidFill>
-            <a:srgbClr val="7D2B42"/>
+            <a:srgbClr val="FFFFFF"/>
           </a:solidFill>
           <a:ln>
             <a:noFill/>
@@ -26944,33 +26806,33 @@
         </p:nvSpPr>
         <p:spPr>
           <a:xfrm>
-            <a:off x="914400" y="3493008"/>
-            <a:ext cx="2788920" cy="822960"/>
-          </a:xfrm>
-          <a:prstGeom prst="rect">
-            <a:avLst/>
-          </a:prstGeom>
-          <a:noFill/>
-        </p:spPr>
-        <p:txBody>
-          <a:bodyPr wrap="square" lIns="18288" rIns="18288" tIns="0" bIns="0">
-            <a:spAutoFit/>
-          </a:bodyPr>
-          <a:lstStyle/>
-          <a:p>
-            <a:pPr>
-              <a:spcAft>
-                <a:spcPts val="600"/>
-              </a:spcAft>
-              <a:defRPr sz="1300" b="1">
-                <a:solidFill>
-                  <a:srgbClr val="FFFFFF"/>
-                </a:solidFill>
-                <a:latin typeface="Montserrat"/>
-              </a:defRPr>
-            </a:pPr>
-            <a:r>
-              <a:t>EXECUTION</a:t>
+            <a:off x="7772400" y="2743200"/>
+            <a:ext cx="5943600" cy="822960"/>
+          </a:xfrm>
+          <a:prstGeom prst="rect">
+            <a:avLst/>
+          </a:prstGeom>
+          <a:noFill/>
+        </p:spPr>
+        <p:txBody>
+          <a:bodyPr wrap="square" lIns="18288" rIns="18288" tIns="0" bIns="0">
+            <a:spAutoFit/>
+          </a:bodyPr>
+          <a:lstStyle/>
+          <a:p>
+            <a:pPr>
+              <a:spcAft>
+                <a:spcPts val="600"/>
+              </a:spcAft>
+              <a:defRPr sz="2200" b="1">
+                <a:solidFill>
+                  <a:srgbClr val="7D2B42"/>
+                </a:solidFill>
+                <a:latin typeface="Montserrat"/>
+              </a:defRPr>
+            </a:pPr>
+            <a:r>
+              <a:t>MEDIA EXAMPLE</a:t>
             </a:r>
           </a:p>
         </p:txBody>
@@ -26983,25 +26845,25 @@
         </p:nvSpPr>
         <p:spPr>
           <a:xfrm>
-            <a:off x="4114800" y="3456432"/>
-            <a:ext cx="9646920" cy="841248"/>
-          </a:xfrm>
-          <a:prstGeom prst="rect">
-            <a:avLst/>
-          </a:prstGeom>
-          <a:noFill/>
-        </p:spPr>
-        <p:txBody>
-          <a:bodyPr wrap="square" lIns="18288" rIns="18288" tIns="0" bIns="0">
-            <a:spAutoFit/>
-          </a:bodyPr>
-          <a:lstStyle/>
-          <a:p>
-            <a:pPr>
-              <a:spcAft>
-                <a:spcPts val="600"/>
-              </a:spcAft>
-              <a:defRPr sz="1600" b="0">
+            <a:off x="7772400" y="3767328"/>
+            <a:ext cx="5943600" cy="2926080"/>
+          </a:xfrm>
+          <a:prstGeom prst="rect">
+            <a:avLst/>
+          </a:prstGeom>
+          <a:noFill/>
+        </p:spPr>
+        <p:txBody>
+          <a:bodyPr wrap="square" lIns="18288" rIns="18288" tIns="0" bIns="0">
+            <a:spAutoFit/>
+          </a:bodyPr>
+          <a:lstStyle/>
+          <a:p>
+            <a:pPr>
+              <a:spcAft>
+                <a:spcPts val="600"/>
+              </a:spcAft>
+              <a:defRPr sz="1900" b="0">
                 <a:solidFill>
                   <a:srgbClr val="202020"/>
                 </a:solidFill>
@@ -27009,370 +26871,7 @@
               </a:defRPr>
             </a:pPr>
             <a:r>
-              <a:t>Task/handoff card; comment and execution response; daily control note.</a:t>
-            </a:r>
-          </a:p>
-        </p:txBody>
-      </p:sp>
-      <p:sp>
-        <p:nvSpPr>
-          <p:cNvPr id="14" name="Rectangle 13"/>
-          <p:cNvSpPr/>
-          <p:nvPr/>
-        </p:nvSpPr>
-        <p:spPr>
-          <a:xfrm>
-            <a:off x="777240" y="4389120"/>
-            <a:ext cx="3063240" cy="896112"/>
-          </a:xfrm>
-          <a:prstGeom prst="rect">
-            <a:avLst/>
-          </a:prstGeom>
-          <a:solidFill>
-            <a:srgbClr val="7D2B42"/>
-          </a:solidFill>
-          <a:ln>
-            <a:noFill/>
-          </a:ln>
-        </p:spPr>
-        <p:style>
-          <a:lnRef idx="1">
-            <a:schemeClr val="accent1"/>
-          </a:lnRef>
-          <a:fillRef idx="3">
-            <a:schemeClr val="accent1"/>
-          </a:fillRef>
-          <a:effectRef idx="2">
-            <a:schemeClr val="accent1"/>
-          </a:effectRef>
-          <a:fontRef idx="minor">
-            <a:schemeClr val="lt1"/>
-          </a:fontRef>
-        </p:style>
-        <p:txBody>
-          <a:bodyPr rtlCol="0" anchor="ctr"/>
-          <a:lstStyle/>
-          <a:p>
-            <a:pPr algn="ctr"/>
-          </a:p>
-        </p:txBody>
-      </p:sp>
-      <p:sp>
-        <p:nvSpPr>
-          <p:cNvPr id="15" name="TextBox 14"/>
-          <p:cNvSpPr txBox="1"/>
-          <p:nvPr/>
-        </p:nvSpPr>
-        <p:spPr>
-          <a:xfrm>
-            <a:off x="914400" y="4498848"/>
-            <a:ext cx="2788920" cy="822960"/>
-          </a:xfrm>
-          <a:prstGeom prst="rect">
-            <a:avLst/>
-          </a:prstGeom>
-          <a:noFill/>
-        </p:spPr>
-        <p:txBody>
-          <a:bodyPr wrap="square" lIns="18288" rIns="18288" tIns="0" bIns="0">
-            <a:spAutoFit/>
-          </a:bodyPr>
-          <a:lstStyle/>
-          <a:p>
-            <a:pPr>
-              <a:spcAft>
-                <a:spcPts val="600"/>
-              </a:spcAft>
-              <a:defRPr sz="1300" b="1">
-                <a:solidFill>
-                  <a:srgbClr val="FFFFFF"/>
-                </a:solidFill>
-                <a:latin typeface="Montserrat"/>
-              </a:defRPr>
-            </a:pPr>
-            <a:r>
-              <a:t>APPROVAL</a:t>
-            </a:r>
-          </a:p>
-        </p:txBody>
-      </p:sp>
-      <p:sp>
-        <p:nvSpPr>
-          <p:cNvPr id="16" name="TextBox 15"/>
-          <p:cNvSpPr txBox="1"/>
-          <p:nvPr/>
-        </p:nvSpPr>
-        <p:spPr>
-          <a:xfrm>
-            <a:off x="4114800" y="4462272"/>
-            <a:ext cx="9646920" cy="841248"/>
-          </a:xfrm>
-          <a:prstGeom prst="rect">
-            <a:avLst/>
-          </a:prstGeom>
-          <a:noFill/>
-        </p:spPr>
-        <p:txBody>
-          <a:bodyPr wrap="square" lIns="18288" rIns="18288" tIns="0" bIns="0">
-            <a:spAutoFit/>
-          </a:bodyPr>
-          <a:lstStyle/>
-          <a:p>
-            <a:pPr>
-              <a:spcAft>
-                <a:spcPts val="600"/>
-              </a:spcAft>
-              <a:defRPr sz="1600" b="0">
-                <a:solidFill>
-                  <a:srgbClr val="202020"/>
-                </a:solidFill>
-                <a:latin typeface="Montserrat"/>
-              </a:defRPr>
-            </a:pPr>
-            <a:r>
-              <a:t>Client pack manifest; quality/MM/client decision record.</a:t>
-            </a:r>
-          </a:p>
-        </p:txBody>
-      </p:sp>
-      <p:sp>
-        <p:nvSpPr>
-          <p:cNvPr id="17" name="Rectangle 16"/>
-          <p:cNvSpPr/>
-          <p:nvPr/>
-        </p:nvSpPr>
-        <p:spPr>
-          <a:xfrm>
-            <a:off x="777240" y="5394960"/>
-            <a:ext cx="3063240" cy="896112"/>
-          </a:xfrm>
-          <a:prstGeom prst="rect">
-            <a:avLst/>
-          </a:prstGeom>
-          <a:solidFill>
-            <a:srgbClr val="7D2B42"/>
-          </a:solidFill>
-          <a:ln>
-            <a:noFill/>
-          </a:ln>
-        </p:spPr>
-        <p:style>
-          <a:lnRef idx="1">
-            <a:schemeClr val="accent1"/>
-          </a:lnRef>
-          <a:fillRef idx="3">
-            <a:schemeClr val="accent1"/>
-          </a:fillRef>
-          <a:effectRef idx="2">
-            <a:schemeClr val="accent1"/>
-          </a:effectRef>
-          <a:fontRef idx="minor">
-            <a:schemeClr val="lt1"/>
-          </a:fontRef>
-        </p:style>
-        <p:txBody>
-          <a:bodyPr rtlCol="0" anchor="ctr"/>
-          <a:lstStyle/>
-          <a:p>
-            <a:pPr algn="ctr"/>
-          </a:p>
-        </p:txBody>
-      </p:sp>
-      <p:sp>
-        <p:nvSpPr>
-          <p:cNvPr id="18" name="TextBox 17"/>
-          <p:cNvSpPr txBox="1"/>
-          <p:nvPr/>
-        </p:nvSpPr>
-        <p:spPr>
-          <a:xfrm>
-            <a:off x="914400" y="5504688"/>
-            <a:ext cx="2788920" cy="822960"/>
-          </a:xfrm>
-          <a:prstGeom prst="rect">
-            <a:avLst/>
-          </a:prstGeom>
-          <a:noFill/>
-        </p:spPr>
-        <p:txBody>
-          <a:bodyPr wrap="square" lIns="18288" rIns="18288" tIns="0" bIns="0">
-            <a:spAutoFit/>
-          </a:bodyPr>
-          <a:lstStyle/>
-          <a:p>
-            <a:pPr>
-              <a:spcAft>
-                <a:spcPts val="600"/>
-              </a:spcAft>
-              <a:defRPr sz="1300" b="1">
-                <a:solidFill>
-                  <a:srgbClr val="FFFFFF"/>
-                </a:solidFill>
-                <a:latin typeface="Montserrat"/>
-              </a:defRPr>
-            </a:pPr>
-            <a:r>
-              <a:t>EXCEPTIONS</a:t>
-            </a:r>
-          </a:p>
-        </p:txBody>
-      </p:sp>
-      <p:sp>
-        <p:nvSpPr>
-          <p:cNvPr id="19" name="TextBox 18"/>
-          <p:cNvSpPr txBox="1"/>
-          <p:nvPr/>
-        </p:nvSpPr>
-        <p:spPr>
-          <a:xfrm>
-            <a:off x="4114800" y="5468112"/>
-            <a:ext cx="9646920" cy="841248"/>
-          </a:xfrm>
-          <a:prstGeom prst="rect">
-            <a:avLst/>
-          </a:prstGeom>
-          <a:noFill/>
-        </p:spPr>
-        <p:txBody>
-          <a:bodyPr wrap="square" lIns="18288" rIns="18288" tIns="0" bIns="0">
-            <a:spAutoFit/>
-          </a:bodyPr>
-          <a:lstStyle/>
-          <a:p>
-            <a:pPr>
-              <a:spcAft>
-                <a:spcPts val="600"/>
-              </a:spcAft>
-              <a:defRPr sz="1600" b="0">
-                <a:solidFill>
-                  <a:srgbClr val="202020"/>
-                </a:solidFill>
-                <a:latin typeface="Montserrat"/>
-              </a:defRPr>
-            </a:pPr>
-            <a:r>
-              <a:t>Payment/spend evidence; incident/escalation note; performance/listening review.</a:t>
-            </a:r>
-          </a:p>
-        </p:txBody>
-      </p:sp>
-      <p:sp>
-        <p:nvSpPr>
-          <p:cNvPr id="20" name="Rectangle 19"/>
-          <p:cNvSpPr/>
-          <p:nvPr/>
-        </p:nvSpPr>
-        <p:spPr>
-          <a:xfrm>
-            <a:off x="777240" y="6400800"/>
-            <a:ext cx="3063240" cy="896112"/>
-          </a:xfrm>
-          <a:prstGeom prst="rect">
-            <a:avLst/>
-          </a:prstGeom>
-          <a:solidFill>
-            <a:srgbClr val="7D2B42"/>
-          </a:solidFill>
-          <a:ln>
-            <a:noFill/>
-          </a:ln>
-        </p:spPr>
-        <p:style>
-          <a:lnRef idx="1">
-            <a:schemeClr val="accent1"/>
-          </a:lnRef>
-          <a:fillRef idx="3">
-            <a:schemeClr val="accent1"/>
-          </a:fillRef>
-          <a:effectRef idx="2">
-            <a:schemeClr val="accent1"/>
-          </a:effectRef>
-          <a:fontRef idx="minor">
-            <a:schemeClr val="lt1"/>
-          </a:fontRef>
-        </p:style>
-        <p:txBody>
-          <a:bodyPr rtlCol="0" anchor="ctr"/>
-          <a:lstStyle/>
-          <a:p>
-            <a:pPr algn="ctr"/>
-          </a:p>
-        </p:txBody>
-      </p:sp>
-      <p:sp>
-        <p:nvSpPr>
-          <p:cNvPr id="21" name="TextBox 20"/>
-          <p:cNvSpPr txBox="1"/>
-          <p:nvPr/>
-        </p:nvSpPr>
-        <p:spPr>
-          <a:xfrm>
-            <a:off x="914400" y="6510528"/>
-            <a:ext cx="2788920" cy="822960"/>
-          </a:xfrm>
-          <a:prstGeom prst="rect">
-            <a:avLst/>
-          </a:prstGeom>
-          <a:noFill/>
-        </p:spPr>
-        <p:txBody>
-          <a:bodyPr wrap="square" lIns="18288" rIns="18288" tIns="0" bIns="0">
-            <a:spAutoFit/>
-          </a:bodyPr>
-          <a:lstStyle/>
-          <a:p>
-            <a:pPr>
-              <a:spcAft>
-                <a:spcPts val="600"/>
-              </a:spcAft>
-              <a:defRPr sz="1300" b="1">
-                <a:solidFill>
-                  <a:srgbClr val="FFFFFF"/>
-                </a:solidFill>
-                <a:latin typeface="Montserrat"/>
-              </a:defRPr>
-            </a:pPr>
-            <a:r>
-              <a:t>ONBOARDING</a:t>
-            </a:r>
-          </a:p>
-        </p:txBody>
-      </p:sp>
-      <p:sp>
-        <p:nvSpPr>
-          <p:cNvPr id="22" name="TextBox 21"/>
-          <p:cNvSpPr txBox="1"/>
-          <p:nvPr/>
-        </p:nvSpPr>
-        <p:spPr>
-          <a:xfrm>
-            <a:off x="4114800" y="6473952"/>
-            <a:ext cx="9646920" cy="841248"/>
-          </a:xfrm>
-          <a:prstGeom prst="rect">
-            <a:avLst/>
-          </a:prstGeom>
-          <a:noFill/>
-        </p:spPr>
-        <p:txBody>
-          <a:bodyPr wrap="square" lIns="18288" rIns="18288" tIns="0" bIns="0">
-            <a:spAutoFit/>
-          </a:bodyPr>
-          <a:lstStyle/>
-          <a:p>
-            <a:pPr>
-              <a:spcAft>
-                <a:spcPts val="600"/>
-              </a:spcAft>
-              <a:defRPr sz="1600" b="0">
-                <a:solidFill>
-                  <a:srgbClr val="202020"/>
-                </a:solidFill>
-                <a:latin typeface="Montserrat"/>
-              </a:defRPr>
-            </a:pPr>
-            <a:r>
-              <a:t>Competency demonstration and explicit authority/constraints sign-off.</a:t>
+              <a:t>After execution, 8,000 verified actual-expense units × 25% = 2,000 fee. These are examples, not prices or market ranges.</a:t>
             </a:r>
           </a:p>
         </p:txBody>
@@ -27558,7 +27057,7 @@
               </a:defRPr>
             </a:pPr>
             <a:r>
-              <a:t>DEMONSTRATE BEFORE UNSUPERVISED OPERATION</a:t>
+              <a:t>WORKED CASE / ORBIT STUDIO IS FICTIONAL</a:t>
             </a:r>
           </a:p>
         </p:txBody>
@@ -27718,7 +27217,7 @@
               </a:defRPr>
             </a:pPr>
             <a:r>
-              <a:t>TRACE</a:t>
+              <a:t>MEETING ONE</a:t>
             </a:r>
           </a:p>
         </p:txBody>
@@ -27757,7 +27256,7 @@
               </a:defRPr>
             </a:pPr>
             <a:r>
-              <a:t>Locate actual brief, strategy, task, review chain and client approval privately.</a:t>
+              <a:t>Actual audience/assets differ from Sales/BD proposal; capture real brief.</a:t>
             </a:r>
           </a:p>
         </p:txBody>
@@ -27839,7 +27338,7 @@
               </a:defRPr>
             </a:pPr>
             <a:r>
-              <a:t>DECIDE</a:t>
+              <a:t>NOT READY</a:t>
             </a:r>
           </a:p>
         </p:txBody>
@@ -27878,7 +27377,7 @@
               </a:defRPr>
             </a:pPr>
             <a:r>
-              <a:t>Explain next permitted action and hold condition for each milestone.</a:t>
+              <a:t>Actual-strategy group stays pending until client readiness is confirmed.</a:t>
             </a:r>
           </a:p>
         </p:txBody>
@@ -27960,7 +27459,7 @@
               </a:defRPr>
             </a:pPr>
             <a:r>
-              <a:t>REVIEW</a:t>
+              <a:t>READY → SIGN</a:t>
             </a:r>
           </a:p>
         </p:txBody>
@@ -27999,7 +27498,7 @@
               </a:defRPr>
             </a:pPr>
             <a:r>
-              <a:t>Give executable feedback and keep unresolved comments visible.</a:t>
+              <a:t>AM/SM/MM/MB develop actual strategy; align scope; sign four materials.</a:t>
             </a:r>
           </a:p>
         </p:txBody>
@@ -28081,7 +27580,7 @@
               </a:defRPr>
             </a:pPr>
             <a:r>
-              <a:t>REPORT</a:t>
+              <a:t>PAY → PRODUCE</a:t>
             </a:r>
           </a:p>
         </p:txBody>
@@ -28120,7 +27619,7 @@
               </a:defRPr>
             </a:pPr>
             <a:r>
-              <a:t>Separate observed evidence, interpretation and proposed action.</a:t>
+              <a:t>Verify required upfront amount; AM assigns; missing footage blocks reel.</a:t>
             </a:r>
           </a:p>
         </p:txBody>
@@ -28202,7 +27701,7 @@
               </a:defRPr>
             </a:pPr>
             <a:r>
-              <a:t>SIGN OFF</a:t>
+              <a:t>REVIEW → RELEASE</a:t>
             </a:r>
           </a:p>
         </p:txBody>
@@ -28241,7 +27740,7 @@
               </a:defRPr>
             </a:pPr>
             <a:r>
-              <a:t>Assessor records competence, gaps and delegated authority—not just quiz completion.</a:t>
+              <a:t>Comments executed → quality/MM → AM pack → client approval → archive/publish.</a:t>
             </a:r>
           </a:p>
         </p:txBody>
@@ -28427,7 +27926,7 @@
               </a:defRPr>
             </a:pPr>
             <a:r>
-              <a:t>OWNER DECISIONS STILL REQUIRED</a:t>
+              <a:t>TEMPLATES YOU CAN REUSE</a:t>
             </a:r>
           </a:p>
         </p:txBody>
@@ -28518,14 +28017,14 @@
         </p:nvSpPr>
         <p:spPr>
           <a:xfrm>
-            <a:off x="777240" y="2468880"/>
-            <a:ext cx="6400800" cy="4480560"/>
+            <a:off x="777240" y="2377440"/>
+            <a:ext cx="3063240" cy="896112"/>
           </a:xfrm>
           <a:prstGeom prst="rect">
             <a:avLst/>
           </a:prstGeom>
           <a:solidFill>
-            <a:srgbClr val="FFFFFF"/>
+            <a:srgbClr val="7D2B42"/>
           </a:solidFill>
           <a:ln>
             <a:noFill/>
@@ -28561,33 +28060,33 @@
         </p:nvSpPr>
         <p:spPr>
           <a:xfrm>
-            <a:off x="1005840" y="2743200"/>
-            <a:ext cx="5943600" cy="822960"/>
-          </a:xfrm>
-          <a:prstGeom prst="rect">
-            <a:avLst/>
-          </a:prstGeom>
-          <a:noFill/>
-        </p:spPr>
-        <p:txBody>
-          <a:bodyPr wrap="square" lIns="18288" rIns="18288" tIns="0" bIns="0">
-            <a:spAutoFit/>
-          </a:bodyPr>
-          <a:lstStyle/>
-          <a:p>
-            <a:pPr>
-              <a:spcAft>
-                <a:spcPts val="600"/>
-              </a:spcAft>
-              <a:defRPr sz="2200" b="1">
-                <a:solidFill>
-                  <a:srgbClr val="7D2B42"/>
-                </a:solidFill>
-                <a:latin typeface="Montserrat"/>
-              </a:defRPr>
-            </a:pPr>
-            <a:r>
-              <a:t>PEOPLE AND OPERATING LIMITS</a:t>
+            <a:off x="914400" y="2487168"/>
+            <a:ext cx="2788920" cy="822960"/>
+          </a:xfrm>
+          <a:prstGeom prst="rect">
+            <a:avLst/>
+          </a:prstGeom>
+          <a:noFill/>
+        </p:spPr>
+        <p:txBody>
+          <a:bodyPr wrap="square" lIns="18288" rIns="18288" tIns="0" bIns="0">
+            <a:spAutoFit/>
+          </a:bodyPr>
+          <a:lstStyle/>
+          <a:p>
+            <a:pPr>
+              <a:spcAft>
+                <a:spcPts val="600"/>
+              </a:spcAft>
+              <a:defRPr sz="1300" b="1">
+                <a:solidFill>
+                  <a:srgbClr val="FFFFFF"/>
+                </a:solidFill>
+                <a:latin typeface="Montserrat"/>
+              </a:defRPr>
+            </a:pPr>
+            <a:r>
+              <a:t>CONTROL</a:t>
             </a:r>
           </a:p>
         </p:txBody>
@@ -28600,25 +28099,25 @@
         </p:nvSpPr>
         <p:spPr>
           <a:xfrm>
-            <a:off x="1005840" y="3767328"/>
-            <a:ext cx="5943600" cy="2926080"/>
-          </a:xfrm>
-          <a:prstGeom prst="rect">
-            <a:avLst/>
-          </a:prstGeom>
-          <a:noFill/>
-        </p:spPr>
-        <p:txBody>
-          <a:bodyPr wrap="square" lIns="18288" rIns="18288" tIns="0" bIns="0">
-            <a:spAutoFit/>
-          </a:bodyPr>
-          <a:lstStyle/>
-          <a:p>
-            <a:pPr>
-              <a:spcAft>
-                <a:spcPts val="600"/>
-              </a:spcAft>
-              <a:defRPr sz="1900" b="0">
+            <a:off x="4114800" y="2450592"/>
+            <a:ext cx="9646920" cy="841248"/>
+          </a:xfrm>
+          <a:prstGeom prst="rect">
+            <a:avLst/>
+          </a:prstGeom>
+          <a:noFill/>
+        </p:spPr>
+        <p:txBody>
+          <a:bodyPr wrap="square" lIns="18288" rIns="18288" tIns="0" bIns="0">
+            <a:spAutoFit/>
+          </a:bodyPr>
+          <a:lstStyle/>
+          <a:p>
+            <a:pPr>
+              <a:spcAft>
+                <a:spcPts val="600"/>
+              </a:spcAft>
+              <a:defRPr sz="1600" b="0">
                 <a:solidFill>
                   <a:srgbClr val="202020"/>
                 </a:solidFill>
@@ -28626,7 +28125,7 @@
               </a:defRPr>
             </a:pPr>
             <a:r>
-              <a:t>MM authority, payment verifier, platform/financial limits, backup reviewers, reporting lines, draft-review location, SLAs and escalation route.</a:t>
+              <a:t>Access/authority inventory; client snapshot; proposal-vs-brief comparison.</a:t>
             </a:r>
           </a:p>
         </p:txBody>
@@ -28639,14 +28138,14 @@
         </p:nvSpPr>
         <p:spPr>
           <a:xfrm>
-            <a:off x="7543800" y="2468880"/>
-            <a:ext cx="6400800" cy="4480560"/>
+            <a:off x="777240" y="3383280"/>
+            <a:ext cx="3063240" cy="896112"/>
           </a:xfrm>
           <a:prstGeom prst="rect">
             <a:avLst/>
           </a:prstGeom>
           <a:solidFill>
-            <a:srgbClr val="FFFFFF"/>
+            <a:srgbClr val="7D2B42"/>
           </a:solidFill>
           <a:ln>
             <a:noFill/>
@@ -28682,33 +28181,33 @@
         </p:nvSpPr>
         <p:spPr>
           <a:xfrm>
-            <a:off x="7772400" y="2743200"/>
-            <a:ext cx="5943600" cy="822960"/>
-          </a:xfrm>
-          <a:prstGeom prst="rect">
-            <a:avLst/>
-          </a:prstGeom>
-          <a:noFill/>
-        </p:spPr>
-        <p:txBody>
-          <a:bodyPr wrap="square" lIns="18288" rIns="18288" tIns="0" bIns="0">
-            <a:spAutoFit/>
-          </a:bodyPr>
-          <a:lstStyle/>
-          <a:p>
-            <a:pPr>
-              <a:spcAft>
-                <a:spcPts val="600"/>
-              </a:spcAft>
-              <a:defRPr sz="2200" b="1">
-                <a:solidFill>
-                  <a:srgbClr val="7D2B42"/>
-                </a:solidFill>
-                <a:latin typeface="Montserrat"/>
-              </a:defRPr>
-            </a:pPr>
-            <a:r>
-              <a:t>COMMERCIAL AND TRAINING</a:t>
+            <a:off x="914400" y="3493008"/>
+            <a:ext cx="2788920" cy="822960"/>
+          </a:xfrm>
+          <a:prstGeom prst="rect">
+            <a:avLst/>
+          </a:prstGeom>
+          <a:noFill/>
+        </p:spPr>
+        <p:txBody>
+          <a:bodyPr wrap="square" lIns="18288" rIns="18288" tIns="0" bIns="0">
+            <a:spAutoFit/>
+          </a:bodyPr>
+          <a:lstStyle/>
+          <a:p>
+            <a:pPr>
+              <a:spcAft>
+                <a:spcPts val="600"/>
+              </a:spcAft>
+              <a:defRPr sz="1300" b="1">
+                <a:solidFill>
+                  <a:srgbClr val="FFFFFF"/>
+                </a:solidFill>
+                <a:latin typeface="Montserrat"/>
+              </a:defRPr>
+            </a:pPr>
+            <a:r>
+              <a:t>EXECUTION</a:t>
             </a:r>
           </a:p>
         </p:txBody>
@@ -28721,25 +28220,25 @@
         </p:nvSpPr>
         <p:spPr>
           <a:xfrm>
-            <a:off x="7772400" y="3767328"/>
-            <a:ext cx="5943600" cy="2926080"/>
-          </a:xfrm>
-          <a:prstGeom prst="rect">
-            <a:avLst/>
-          </a:prstGeom>
-          <a:noFill/>
-        </p:spPr>
-        <p:txBody>
-          <a:bodyPr wrap="square" lIns="18288" rIns="18288" tIns="0" bIns="0">
-            <a:spAutoFit/>
-          </a:bodyPr>
-          <a:lstStyle/>
-          <a:p>
-            <a:pPr>
-              <a:spcAft>
-                <a:spcPts val="600"/>
-              </a:spcAft>
-              <a:defRPr sz="1900" b="0">
+            <a:off x="4114800" y="3456432"/>
+            <a:ext cx="9646920" cy="841248"/>
+          </a:xfrm>
+          <a:prstGeom prst="rect">
+            <a:avLst/>
+          </a:prstGeom>
+          <a:noFill/>
+        </p:spPr>
+        <p:txBody>
+          <a:bodyPr wrap="square" lIns="18288" rIns="18288" tIns="0" bIns="0">
+            <a:spAutoFit/>
+          </a:bodyPr>
+          <a:lstStyle/>
+          <a:p>
+            <a:pPr>
+              <a:spcAft>
+                <a:spcPts val="600"/>
+              </a:spcAft>
+              <a:defRPr sz="1600" b="0">
                 <a:solidFill>
                   <a:srgbClr val="202020"/>
                 </a:solidFill>
@@ -28747,7 +28246,370 @@
               </a:defRPr>
             </a:pPr>
             <a:r>
-              <a:t>Remaining balance terms, media funding/taxes/expense basis; assessor and competence sign-off. No policy is invented to fill the gaps.</a:t>
+              <a:t>Task/handoff card; comment and execution response; daily control note.</a:t>
+            </a:r>
+          </a:p>
+        </p:txBody>
+      </p:sp>
+      <p:sp>
+        <p:nvSpPr>
+          <p:cNvPr id="14" name="Rectangle 13"/>
+          <p:cNvSpPr/>
+          <p:nvPr/>
+        </p:nvSpPr>
+        <p:spPr>
+          <a:xfrm>
+            <a:off x="777240" y="4389120"/>
+            <a:ext cx="3063240" cy="896112"/>
+          </a:xfrm>
+          <a:prstGeom prst="rect">
+            <a:avLst/>
+          </a:prstGeom>
+          <a:solidFill>
+            <a:srgbClr val="7D2B42"/>
+          </a:solidFill>
+          <a:ln>
+            <a:noFill/>
+          </a:ln>
+        </p:spPr>
+        <p:style>
+          <a:lnRef idx="1">
+            <a:schemeClr val="accent1"/>
+          </a:lnRef>
+          <a:fillRef idx="3">
+            <a:schemeClr val="accent1"/>
+          </a:fillRef>
+          <a:effectRef idx="2">
+            <a:schemeClr val="accent1"/>
+          </a:effectRef>
+          <a:fontRef idx="minor">
+            <a:schemeClr val="lt1"/>
+          </a:fontRef>
+        </p:style>
+        <p:txBody>
+          <a:bodyPr rtlCol="0" anchor="ctr"/>
+          <a:lstStyle/>
+          <a:p>
+            <a:pPr algn="ctr"/>
+          </a:p>
+        </p:txBody>
+      </p:sp>
+      <p:sp>
+        <p:nvSpPr>
+          <p:cNvPr id="15" name="TextBox 14"/>
+          <p:cNvSpPr txBox="1"/>
+          <p:nvPr/>
+        </p:nvSpPr>
+        <p:spPr>
+          <a:xfrm>
+            <a:off x="914400" y="4498848"/>
+            <a:ext cx="2788920" cy="822960"/>
+          </a:xfrm>
+          <a:prstGeom prst="rect">
+            <a:avLst/>
+          </a:prstGeom>
+          <a:noFill/>
+        </p:spPr>
+        <p:txBody>
+          <a:bodyPr wrap="square" lIns="18288" rIns="18288" tIns="0" bIns="0">
+            <a:spAutoFit/>
+          </a:bodyPr>
+          <a:lstStyle/>
+          <a:p>
+            <a:pPr>
+              <a:spcAft>
+                <a:spcPts val="600"/>
+              </a:spcAft>
+              <a:defRPr sz="1300" b="1">
+                <a:solidFill>
+                  <a:srgbClr val="FFFFFF"/>
+                </a:solidFill>
+                <a:latin typeface="Montserrat"/>
+              </a:defRPr>
+            </a:pPr>
+            <a:r>
+              <a:t>APPROVAL</a:t>
+            </a:r>
+          </a:p>
+        </p:txBody>
+      </p:sp>
+      <p:sp>
+        <p:nvSpPr>
+          <p:cNvPr id="16" name="TextBox 15"/>
+          <p:cNvSpPr txBox="1"/>
+          <p:nvPr/>
+        </p:nvSpPr>
+        <p:spPr>
+          <a:xfrm>
+            <a:off x="4114800" y="4462272"/>
+            <a:ext cx="9646920" cy="841248"/>
+          </a:xfrm>
+          <a:prstGeom prst="rect">
+            <a:avLst/>
+          </a:prstGeom>
+          <a:noFill/>
+        </p:spPr>
+        <p:txBody>
+          <a:bodyPr wrap="square" lIns="18288" rIns="18288" tIns="0" bIns="0">
+            <a:spAutoFit/>
+          </a:bodyPr>
+          <a:lstStyle/>
+          <a:p>
+            <a:pPr>
+              <a:spcAft>
+                <a:spcPts val="600"/>
+              </a:spcAft>
+              <a:defRPr sz="1600" b="0">
+                <a:solidFill>
+                  <a:srgbClr val="202020"/>
+                </a:solidFill>
+                <a:latin typeface="Montserrat"/>
+              </a:defRPr>
+            </a:pPr>
+            <a:r>
+              <a:t>Client pack manifest; quality/MM/client decision record.</a:t>
+            </a:r>
+          </a:p>
+        </p:txBody>
+      </p:sp>
+      <p:sp>
+        <p:nvSpPr>
+          <p:cNvPr id="17" name="Rectangle 16"/>
+          <p:cNvSpPr/>
+          <p:nvPr/>
+        </p:nvSpPr>
+        <p:spPr>
+          <a:xfrm>
+            <a:off x="777240" y="5394960"/>
+            <a:ext cx="3063240" cy="896112"/>
+          </a:xfrm>
+          <a:prstGeom prst="rect">
+            <a:avLst/>
+          </a:prstGeom>
+          <a:solidFill>
+            <a:srgbClr val="7D2B42"/>
+          </a:solidFill>
+          <a:ln>
+            <a:noFill/>
+          </a:ln>
+        </p:spPr>
+        <p:style>
+          <a:lnRef idx="1">
+            <a:schemeClr val="accent1"/>
+          </a:lnRef>
+          <a:fillRef idx="3">
+            <a:schemeClr val="accent1"/>
+          </a:fillRef>
+          <a:effectRef idx="2">
+            <a:schemeClr val="accent1"/>
+          </a:effectRef>
+          <a:fontRef idx="minor">
+            <a:schemeClr val="lt1"/>
+          </a:fontRef>
+        </p:style>
+        <p:txBody>
+          <a:bodyPr rtlCol="0" anchor="ctr"/>
+          <a:lstStyle/>
+          <a:p>
+            <a:pPr algn="ctr"/>
+          </a:p>
+        </p:txBody>
+      </p:sp>
+      <p:sp>
+        <p:nvSpPr>
+          <p:cNvPr id="18" name="TextBox 17"/>
+          <p:cNvSpPr txBox="1"/>
+          <p:nvPr/>
+        </p:nvSpPr>
+        <p:spPr>
+          <a:xfrm>
+            <a:off x="914400" y="5504688"/>
+            <a:ext cx="2788920" cy="822960"/>
+          </a:xfrm>
+          <a:prstGeom prst="rect">
+            <a:avLst/>
+          </a:prstGeom>
+          <a:noFill/>
+        </p:spPr>
+        <p:txBody>
+          <a:bodyPr wrap="square" lIns="18288" rIns="18288" tIns="0" bIns="0">
+            <a:spAutoFit/>
+          </a:bodyPr>
+          <a:lstStyle/>
+          <a:p>
+            <a:pPr>
+              <a:spcAft>
+                <a:spcPts val="600"/>
+              </a:spcAft>
+              <a:defRPr sz="1300" b="1">
+                <a:solidFill>
+                  <a:srgbClr val="FFFFFF"/>
+                </a:solidFill>
+                <a:latin typeface="Montserrat"/>
+              </a:defRPr>
+            </a:pPr>
+            <a:r>
+              <a:t>EXCEPTIONS</a:t>
+            </a:r>
+          </a:p>
+        </p:txBody>
+      </p:sp>
+      <p:sp>
+        <p:nvSpPr>
+          <p:cNvPr id="19" name="TextBox 18"/>
+          <p:cNvSpPr txBox="1"/>
+          <p:nvPr/>
+        </p:nvSpPr>
+        <p:spPr>
+          <a:xfrm>
+            <a:off x="4114800" y="5468112"/>
+            <a:ext cx="9646920" cy="841248"/>
+          </a:xfrm>
+          <a:prstGeom prst="rect">
+            <a:avLst/>
+          </a:prstGeom>
+          <a:noFill/>
+        </p:spPr>
+        <p:txBody>
+          <a:bodyPr wrap="square" lIns="18288" rIns="18288" tIns="0" bIns="0">
+            <a:spAutoFit/>
+          </a:bodyPr>
+          <a:lstStyle/>
+          <a:p>
+            <a:pPr>
+              <a:spcAft>
+                <a:spcPts val="600"/>
+              </a:spcAft>
+              <a:defRPr sz="1600" b="0">
+                <a:solidFill>
+                  <a:srgbClr val="202020"/>
+                </a:solidFill>
+                <a:latin typeface="Montserrat"/>
+              </a:defRPr>
+            </a:pPr>
+            <a:r>
+              <a:t>Payment/spend evidence; incident/escalation note; performance/listening review.</a:t>
+            </a:r>
+          </a:p>
+        </p:txBody>
+      </p:sp>
+      <p:sp>
+        <p:nvSpPr>
+          <p:cNvPr id="20" name="Rectangle 19"/>
+          <p:cNvSpPr/>
+          <p:nvPr/>
+        </p:nvSpPr>
+        <p:spPr>
+          <a:xfrm>
+            <a:off x="777240" y="6400800"/>
+            <a:ext cx="3063240" cy="896112"/>
+          </a:xfrm>
+          <a:prstGeom prst="rect">
+            <a:avLst/>
+          </a:prstGeom>
+          <a:solidFill>
+            <a:srgbClr val="7D2B42"/>
+          </a:solidFill>
+          <a:ln>
+            <a:noFill/>
+          </a:ln>
+        </p:spPr>
+        <p:style>
+          <a:lnRef idx="1">
+            <a:schemeClr val="accent1"/>
+          </a:lnRef>
+          <a:fillRef idx="3">
+            <a:schemeClr val="accent1"/>
+          </a:fillRef>
+          <a:effectRef idx="2">
+            <a:schemeClr val="accent1"/>
+          </a:effectRef>
+          <a:fontRef idx="minor">
+            <a:schemeClr val="lt1"/>
+          </a:fontRef>
+        </p:style>
+        <p:txBody>
+          <a:bodyPr rtlCol="0" anchor="ctr"/>
+          <a:lstStyle/>
+          <a:p>
+            <a:pPr algn="ctr"/>
+          </a:p>
+        </p:txBody>
+      </p:sp>
+      <p:sp>
+        <p:nvSpPr>
+          <p:cNvPr id="21" name="TextBox 20"/>
+          <p:cNvSpPr txBox="1"/>
+          <p:nvPr/>
+        </p:nvSpPr>
+        <p:spPr>
+          <a:xfrm>
+            <a:off x="914400" y="6510528"/>
+            <a:ext cx="2788920" cy="822960"/>
+          </a:xfrm>
+          <a:prstGeom prst="rect">
+            <a:avLst/>
+          </a:prstGeom>
+          <a:noFill/>
+        </p:spPr>
+        <p:txBody>
+          <a:bodyPr wrap="square" lIns="18288" rIns="18288" tIns="0" bIns="0">
+            <a:spAutoFit/>
+          </a:bodyPr>
+          <a:lstStyle/>
+          <a:p>
+            <a:pPr>
+              <a:spcAft>
+                <a:spcPts val="600"/>
+              </a:spcAft>
+              <a:defRPr sz="1300" b="1">
+                <a:solidFill>
+                  <a:srgbClr val="FFFFFF"/>
+                </a:solidFill>
+                <a:latin typeface="Montserrat"/>
+              </a:defRPr>
+            </a:pPr>
+            <a:r>
+              <a:t>ONBOARDING</a:t>
+            </a:r>
+          </a:p>
+        </p:txBody>
+      </p:sp>
+      <p:sp>
+        <p:nvSpPr>
+          <p:cNvPr id="22" name="TextBox 21"/>
+          <p:cNvSpPr txBox="1"/>
+          <p:nvPr/>
+        </p:nvSpPr>
+        <p:spPr>
+          <a:xfrm>
+            <a:off x="4114800" y="6473952"/>
+            <a:ext cx="9646920" cy="841248"/>
+          </a:xfrm>
+          <a:prstGeom prst="rect">
+            <a:avLst/>
+          </a:prstGeom>
+          <a:noFill/>
+        </p:spPr>
+        <p:txBody>
+          <a:bodyPr wrap="square" lIns="18288" rIns="18288" tIns="0" bIns="0">
+            <a:spAutoFit/>
+          </a:bodyPr>
+          <a:lstStyle/>
+          <a:p>
+            <a:pPr>
+              <a:spcAft>
+                <a:spcPts val="600"/>
+              </a:spcAft>
+              <a:defRPr sz="1600" b="0">
+                <a:solidFill>
+                  <a:srgbClr val="202020"/>
+                </a:solidFill>
+                <a:latin typeface="Montserrat"/>
+              </a:defRPr>
+            </a:pPr>
+            <a:r>
+              <a:t>Competency demonstration and explicit authority/constraints sign-off.</a:t>
             </a:r>
           </a:p>
         </p:txBody>
@@ -28933,7 +28795,7 @@
               </a:defRPr>
             </a:pPr>
             <a:r>
-              <a:t>COMPANY SOFTWARE / KNOW THE ACCESS BOUNDARY</a:t>
+              <a:t>DEMONSTRATE BEFORE UNSUPERVISED OPERATION</a:t>
             </a:r>
           </a:p>
         </p:txBody>
@@ -29093,7 +28955,7 @@
               </a:defRPr>
             </a:pPr>
             <a:r>
-              <a:t>HIGGSFIELD</a:t>
+              <a:t>TRACE</a:t>
             </a:r>
           </a:p>
         </p:txBody>
@@ -29132,7 +28994,7 @@
               </a:defRPr>
             </a:pPr>
             <a:r>
-              <a:t>VE-01/VE-02 ONLY. Forbidden for every other team member; MM is not an exception.</a:t>
+              <a:t>Locate actual brief, strategy, task, review chain and client approval privately.</a:t>
             </a:r>
           </a:p>
         </p:txBody>
@@ -29214,7 +29076,7 @@
               </a:defRPr>
             </a:pPr>
             <a:r>
-              <a:t>CLAUDE + CHATGPT</a:t>
+              <a:t>DECIDE</a:t>
             </a:r>
           </a:p>
         </p:txBody>
@@ -29253,7 +29115,7 @@
               </a:defRPr>
             </a:pPr>
             <a:r>
-              <a:t>Company subscriptions. Verify assigned seat, administrator and approved data use.</a:t>
+              <a:t>Explain next permitted action and hold condition for each milestone.</a:t>
             </a:r>
           </a:p>
         </p:txBody>
@@ -29335,7 +29197,7 @@
               </a:defRPr>
             </a:pPr>
             <a:r>
-              <a:t>CANVA + ADOBE</a:t>
+              <a:t>REVIEW</a:t>
             </a:r>
           </a:p>
         </p:txBody>
@@ -29374,7 +29236,7 @@
               </a:defRPr>
             </a:pPr>
             <a:r>
-              <a:t>Company-provided programs. Confirm exact licences/applications and seat assignments.</a:t>
+              <a:t>Give executable feedback and keep unresolved comments visible.</a:t>
             </a:r>
           </a:p>
         </p:txBody>
@@ -29456,7 +29318,7 @@
               </a:defRPr>
             </a:pPr>
             <a:r>
-              <a:t>NO PASSWORDS HERE</a:t>
+              <a:t>REPORT</a:t>
             </a:r>
           </a:p>
         </p:txBody>
@@ -29495,7 +29357,128 @@
               </a:defRPr>
             </a:pPr>
             <a:r>
-              <a:t>Keep credentials in the approved secure route, not this manual or task sheet.</a:t>
+              <a:t>Separate observed evidence, interpretation and proposed action.</a:t>
+            </a:r>
+          </a:p>
+        </p:txBody>
+      </p:sp>
+      <p:sp>
+        <p:nvSpPr>
+          <p:cNvPr id="20" name="Rectangle 19"/>
+          <p:cNvSpPr/>
+          <p:nvPr/>
+        </p:nvSpPr>
+        <p:spPr>
+          <a:xfrm>
+            <a:off x="777240" y="6400800"/>
+            <a:ext cx="3063240" cy="896112"/>
+          </a:xfrm>
+          <a:prstGeom prst="rect">
+            <a:avLst/>
+          </a:prstGeom>
+          <a:solidFill>
+            <a:srgbClr val="7D2B42"/>
+          </a:solidFill>
+          <a:ln>
+            <a:noFill/>
+          </a:ln>
+        </p:spPr>
+        <p:style>
+          <a:lnRef idx="1">
+            <a:schemeClr val="accent1"/>
+          </a:lnRef>
+          <a:fillRef idx="3">
+            <a:schemeClr val="accent1"/>
+          </a:fillRef>
+          <a:effectRef idx="2">
+            <a:schemeClr val="accent1"/>
+          </a:effectRef>
+          <a:fontRef idx="minor">
+            <a:schemeClr val="lt1"/>
+          </a:fontRef>
+        </p:style>
+        <p:txBody>
+          <a:bodyPr rtlCol="0" anchor="ctr"/>
+          <a:lstStyle/>
+          <a:p>
+            <a:pPr algn="ctr"/>
+          </a:p>
+        </p:txBody>
+      </p:sp>
+      <p:sp>
+        <p:nvSpPr>
+          <p:cNvPr id="21" name="TextBox 20"/>
+          <p:cNvSpPr txBox="1"/>
+          <p:nvPr/>
+        </p:nvSpPr>
+        <p:spPr>
+          <a:xfrm>
+            <a:off x="914400" y="6510528"/>
+            <a:ext cx="2788920" cy="822960"/>
+          </a:xfrm>
+          <a:prstGeom prst="rect">
+            <a:avLst/>
+          </a:prstGeom>
+          <a:noFill/>
+        </p:spPr>
+        <p:txBody>
+          <a:bodyPr wrap="square" lIns="18288" rIns="18288" tIns="0" bIns="0">
+            <a:spAutoFit/>
+          </a:bodyPr>
+          <a:lstStyle/>
+          <a:p>
+            <a:pPr>
+              <a:spcAft>
+                <a:spcPts val="600"/>
+              </a:spcAft>
+              <a:defRPr sz="1300" b="1">
+                <a:solidFill>
+                  <a:srgbClr val="FFFFFF"/>
+                </a:solidFill>
+                <a:latin typeface="Montserrat"/>
+              </a:defRPr>
+            </a:pPr>
+            <a:r>
+              <a:t>SIGN OFF</a:t>
+            </a:r>
+          </a:p>
+        </p:txBody>
+      </p:sp>
+      <p:sp>
+        <p:nvSpPr>
+          <p:cNvPr id="22" name="TextBox 21"/>
+          <p:cNvSpPr txBox="1"/>
+          <p:nvPr/>
+        </p:nvSpPr>
+        <p:spPr>
+          <a:xfrm>
+            <a:off x="4114800" y="6473952"/>
+            <a:ext cx="9646920" cy="841248"/>
+          </a:xfrm>
+          <a:prstGeom prst="rect">
+            <a:avLst/>
+          </a:prstGeom>
+          <a:noFill/>
+        </p:spPr>
+        <p:txBody>
+          <a:bodyPr wrap="square" lIns="18288" rIns="18288" tIns="0" bIns="0">
+            <a:spAutoFit/>
+          </a:bodyPr>
+          <a:lstStyle/>
+          <a:p>
+            <a:pPr>
+              <a:spcAft>
+                <a:spcPts val="600"/>
+              </a:spcAft>
+              <a:defRPr sz="1600" b="0">
+                <a:solidFill>
+                  <a:srgbClr val="202020"/>
+                </a:solidFill>
+                <a:latin typeface="Montserrat"/>
+              </a:defRPr>
+            </a:pPr>
+            <a:r>
+              <a:t>Assessor records competence, gaps and delegated authority—not just quiz completion.</a:t>
             </a:r>
           </a:p>
         </p:txBody>
@@ -29681,7 +29664,7 @@
               </a:defRPr>
             </a:pPr>
             <a:r>
-              <a:t>SHOOTING / COORDINATION, MEDIA AND EQUIPMENT</a:t>
+              <a:t>OWNER DECISIONS STILL REQUIRED</a:t>
             </a:r>
           </a:p>
         </p:txBody>
@@ -29772,14 +29755,14 @@
         </p:nvSpPr>
         <p:spPr>
           <a:xfrm>
-            <a:off x="777240" y="2377440"/>
-            <a:ext cx="3063240" cy="896112"/>
+            <a:off x="777240" y="2468880"/>
+            <a:ext cx="6400800" cy="4480560"/>
           </a:xfrm>
           <a:prstGeom prst="rect">
             <a:avLst/>
           </a:prstGeom>
           <a:solidFill>
-            <a:srgbClr val="7D2B42"/>
+            <a:srgbClr val="FFFFFF"/>
           </a:solidFill>
           <a:ln>
             <a:noFill/>
@@ -29815,33 +29798,33 @@
         </p:nvSpPr>
         <p:spPr>
           <a:xfrm>
-            <a:off x="914400" y="2487168"/>
-            <a:ext cx="2788920" cy="822960"/>
-          </a:xfrm>
-          <a:prstGeom prst="rect">
-            <a:avLst/>
-          </a:prstGeom>
-          <a:noFill/>
-        </p:spPr>
-        <p:txBody>
-          <a:bodyPr wrap="square" lIns="18288" rIns="18288" tIns="0" bIns="0">
-            <a:spAutoFit/>
-          </a:bodyPr>
-          <a:lstStyle/>
-          <a:p>
-            <a:pPr>
-              <a:spcAft>
-                <a:spcPts val="600"/>
-              </a:spcAft>
-              <a:defRPr sz="1300" b="1">
-                <a:solidFill>
-                  <a:srgbClr val="FFFFFF"/>
-                </a:solidFill>
-                <a:latin typeface="Montserrat"/>
-              </a:defRPr>
-            </a:pPr>
-            <a:r>
-              <a:t>AM</a:t>
+            <a:off x="1005840" y="2743200"/>
+            <a:ext cx="5943600" cy="822960"/>
+          </a:xfrm>
+          <a:prstGeom prst="rect">
+            <a:avLst/>
+          </a:prstGeom>
+          <a:noFill/>
+        </p:spPr>
+        <p:txBody>
+          <a:bodyPr wrap="square" lIns="18288" rIns="18288" tIns="0" bIns="0">
+            <a:spAutoFit/>
+          </a:bodyPr>
+          <a:lstStyle/>
+          <a:p>
+            <a:pPr>
+              <a:spcAft>
+                <a:spcPts val="600"/>
+              </a:spcAft>
+              <a:defRPr sz="2200" b="1">
+                <a:solidFill>
+                  <a:srgbClr val="7D2B42"/>
+                </a:solidFill>
+                <a:latin typeface="Montserrat"/>
+              </a:defRPr>
+            </a:pPr>
+            <a:r>
+              <a:t>PEOPLE AND OPERATING LIMITS</a:t>
             </a:r>
           </a:p>
         </p:txBody>
@@ -29854,25 +29837,25 @@
         </p:nvSpPr>
         <p:spPr>
           <a:xfrm>
-            <a:off x="4114800" y="2450592"/>
-            <a:ext cx="9646920" cy="841248"/>
-          </a:xfrm>
-          <a:prstGeom prst="rect">
-            <a:avLst/>
-          </a:prstGeom>
-          <a:noFill/>
-        </p:spPr>
-        <p:txBody>
-          <a:bodyPr wrap="square" lIns="18288" rIns="18288" tIns="0" bIns="0">
-            <a:spAutoFit/>
-          </a:bodyPr>
-          <a:lstStyle/>
-          <a:p>
-            <a:pPr>
-              <a:spcAft>
-                <a:spcPts val="600"/>
-              </a:spcAft>
-              <a:defRPr sz="1600" b="0">
+            <a:off x="1005840" y="3767328"/>
+            <a:ext cx="5943600" cy="2926080"/>
+          </a:xfrm>
+          <a:prstGeom prst="rect">
+            <a:avLst/>
+          </a:prstGeom>
+          <a:noFill/>
+        </p:spPr>
+        <p:txBody>
+          <a:bodyPr wrap="square" lIns="18288" rIns="18288" tIns="0" bIns="0">
+            <a:spAutoFit/>
+          </a:bodyPr>
+          <a:lstStyle/>
+          <a:p>
+            <a:pPr>
+              <a:spcAft>
+                <a:spcPts val="600"/>
+              </a:spcAft>
+              <a:defRPr sz="1900" b="0">
                 <a:solidFill>
                   <a:srgbClr val="202020"/>
                 </a:solidFill>
@@ -29880,7 +29863,7 @@
               </a:defRPr>
             </a:pPr>
             <a:r>
-              <a:t>Arranges outsourced videography/photography, podcast guests and PR person.</a:t>
+              <a:t>MM authority, payment verifier, platform/financial limits, backup reviewers, reporting lines, draft-review location, SLAs and escalation route.</a:t>
             </a:r>
           </a:p>
         </p:txBody>
@@ -29893,14 +29876,14 @@
         </p:nvSpPr>
         <p:spPr>
           <a:xfrm>
-            <a:off x="777240" y="3383280"/>
-            <a:ext cx="3063240" cy="896112"/>
+            <a:off x="7543800" y="2468880"/>
+            <a:ext cx="6400800" cy="4480560"/>
           </a:xfrm>
           <a:prstGeom prst="rect">
             <a:avLst/>
           </a:prstGeom>
           <a:solidFill>
-            <a:srgbClr val="7D2B42"/>
+            <a:srgbClr val="FFFFFF"/>
           </a:solidFill>
           <a:ln>
             <a:noFill/>
@@ -29936,33 +29919,33 @@
         </p:nvSpPr>
         <p:spPr>
           <a:xfrm>
-            <a:off x="914400" y="3493008"/>
-            <a:ext cx="2788920" cy="822960"/>
-          </a:xfrm>
-          <a:prstGeom prst="rect">
-            <a:avLst/>
-          </a:prstGeom>
-          <a:noFill/>
-        </p:spPr>
-        <p:txBody>
-          <a:bodyPr wrap="square" lIns="18288" rIns="18288" tIns="0" bIns="0">
-            <a:spAutoFit/>
-          </a:bodyPr>
-          <a:lstStyle/>
-          <a:p>
-            <a:pPr>
-              <a:spcAft>
-                <a:spcPts val="600"/>
-              </a:spcAft>
-              <a:defRPr sz="1300" b="1">
-                <a:solidFill>
-                  <a:srgbClr val="FFFFFF"/>
-                </a:solidFill>
-                <a:latin typeface="Montserrat"/>
-              </a:defRPr>
-            </a:pPr>
-            <a:r>
-              <a:t>SM</a:t>
+            <a:off x="7772400" y="2743200"/>
+            <a:ext cx="5943600" cy="822960"/>
+          </a:xfrm>
+          <a:prstGeom prst="rect">
+            <a:avLst/>
+          </a:prstGeom>
+          <a:noFill/>
+        </p:spPr>
+        <p:txBody>
+          <a:bodyPr wrap="square" lIns="18288" rIns="18288" tIns="0" bIns="0">
+            <a:spAutoFit/>
+          </a:bodyPr>
+          <a:lstStyle/>
+          <a:p>
+            <a:pPr>
+              <a:spcAft>
+                <a:spcPts val="600"/>
+              </a:spcAft>
+              <a:defRPr sz="2200" b="1">
+                <a:solidFill>
+                  <a:srgbClr val="7D2B42"/>
+                </a:solidFill>
+                <a:latin typeface="Montserrat"/>
+              </a:defRPr>
+            </a:pPr>
+            <a:r>
+              <a:t>COMMERCIAL AND TRAINING</a:t>
             </a:r>
           </a:p>
         </p:txBody>
@@ -29975,25 +29958,25 @@
         </p:nvSpPr>
         <p:spPr>
           <a:xfrm>
-            <a:off x="4114800" y="3456432"/>
-            <a:ext cx="9646920" cy="841248"/>
-          </a:xfrm>
-          <a:prstGeom prst="rect">
-            <a:avLst/>
-          </a:prstGeom>
-          <a:noFill/>
-        </p:spPr>
-        <p:txBody>
-          <a:bodyPr wrap="square" lIns="18288" rIns="18288" tIns="0" bIns="0">
-            <a:spAutoFit/>
-          </a:bodyPr>
-          <a:lstStyle/>
-          <a:p>
-            <a:pPr>
-              <a:spcAft>
-                <a:spcPts val="600"/>
-              </a:spcAft>
-              <a:defRPr sz="1600" b="0">
+            <a:off x="7772400" y="3767328"/>
+            <a:ext cx="5943600" cy="2926080"/>
+          </a:xfrm>
+          <a:prstGeom prst="rect">
+            <a:avLst/>
+          </a:prstGeom>
+          <a:noFill/>
+        </p:spPr>
+        <p:txBody>
+          <a:bodyPr wrap="square" lIns="18288" rIns="18288" tIns="0" bIns="0">
+            <a:spAutoFit/>
+          </a:bodyPr>
+          <a:lstStyle/>
+          <a:p>
+            <a:pPr>
+              <a:spcAft>
+                <a:spcPts val="600"/>
+              </a:spcAft>
+              <a:defRPr sz="1900" b="0">
                 <a:solidFill>
                   <a:srgbClr val="202020"/>
                 </a:solidFill>
@@ -30001,370 +29984,7 @@
               </a:defRPr>
             </a:pPr>
             <a:r>
-              <a:t>Collects source data, hands to assigned editors/designers and captures BTS.</a:t>
-            </a:r>
-          </a:p>
-        </p:txBody>
-      </p:sp>
-      <p:sp>
-        <p:nvSpPr>
-          <p:cNvPr id="14" name="Rectangle 13"/>
-          <p:cNvSpPr/>
-          <p:nvPr/>
-        </p:nvSpPr>
-        <p:spPr>
-          <a:xfrm>
-            <a:off x="777240" y="4389120"/>
-            <a:ext cx="3063240" cy="896112"/>
-          </a:xfrm>
-          <a:prstGeom prst="rect">
-            <a:avLst/>
-          </a:prstGeom>
-          <a:solidFill>
-            <a:srgbClr val="7D2B42"/>
-          </a:solidFill>
-          <a:ln>
-            <a:noFill/>
-          </a:ln>
-        </p:spPr>
-        <p:style>
-          <a:lnRef idx="1">
-            <a:schemeClr val="accent1"/>
-          </a:lnRef>
-          <a:fillRef idx="3">
-            <a:schemeClr val="accent1"/>
-          </a:fillRef>
-          <a:effectRef idx="2">
-            <a:schemeClr val="accent1"/>
-          </a:effectRef>
-          <a:fontRef idx="minor">
-            <a:schemeClr val="lt1"/>
-          </a:fontRef>
-        </p:style>
-        <p:txBody>
-          <a:bodyPr rtlCol="0" anchor="ctr"/>
-          <a:lstStyle/>
-          <a:p>
-            <a:pPr algn="ctr"/>
-          </a:p>
-        </p:txBody>
-      </p:sp>
-      <p:sp>
-        <p:nvSpPr>
-          <p:cNvPr id="15" name="TextBox 14"/>
-          <p:cNvSpPr txBox="1"/>
-          <p:nvPr/>
-        </p:nvSpPr>
-        <p:spPr>
-          <a:xfrm>
-            <a:off x="914400" y="4498848"/>
-            <a:ext cx="2788920" cy="822960"/>
-          </a:xfrm>
-          <a:prstGeom prst="rect">
-            <a:avLst/>
-          </a:prstGeom>
-          <a:noFill/>
-        </p:spPr>
-        <p:txBody>
-          <a:bodyPr wrap="square" lIns="18288" rIns="18288" tIns="0" bIns="0">
-            <a:spAutoFit/>
-          </a:bodyPr>
-          <a:lstStyle/>
-          <a:p>
-            <a:pPr>
-              <a:spcAft>
-                <a:spcPts val="600"/>
-              </a:spcAft>
-              <a:defRPr sz="1300" b="1">
-                <a:solidFill>
-                  <a:srgbClr val="FFFFFF"/>
-                </a:solidFill>
-                <a:latin typeface="Montserrat"/>
-              </a:defRPr>
-            </a:pPr>
-            <a:r>
-              <a:t>SM CUSTODY</a:t>
-            </a:r>
-          </a:p>
-        </p:txBody>
-      </p:sp>
-      <p:sp>
-        <p:nvSpPr>
-          <p:cNvPr id="16" name="TextBox 15"/>
-          <p:cNvSpPr txBox="1"/>
-          <p:nvPr/>
-        </p:nvSpPr>
-        <p:spPr>
-          <a:xfrm>
-            <a:off x="4114800" y="4462272"/>
-            <a:ext cx="9646920" cy="841248"/>
-          </a:xfrm>
-          <a:prstGeom prst="rect">
-            <a:avLst/>
-          </a:prstGeom>
-          <a:noFill/>
-        </p:spPr>
-        <p:txBody>
-          <a:bodyPr wrap="square" lIns="18288" rIns="18288" tIns="0" bIns="0">
-            <a:spAutoFit/>
-          </a:bodyPr>
-          <a:lstStyle/>
-          <a:p>
-            <a:pPr>
-              <a:spcAft>
-                <a:spcPts val="600"/>
-              </a:spcAft>
-              <a:defRPr sz="1600" b="0">
-                <a:solidFill>
-                  <a:srgbClr val="202020"/>
-                </a:solidFill>
-                <a:latin typeface="Montserrat"/>
-              </a:defRPr>
-            </a:pPr>
-            <a:r>
-              <a:t>Full accountability for memory cards and studio tools; issue/return record is recommended.</a:t>
-            </a:r>
-          </a:p>
-        </p:txBody>
-      </p:sp>
-      <p:sp>
-        <p:nvSpPr>
-          <p:cNvPr id="17" name="Rectangle 16"/>
-          <p:cNvSpPr/>
-          <p:nvPr/>
-        </p:nvSpPr>
-        <p:spPr>
-          <a:xfrm>
-            <a:off x="777240" y="5394960"/>
-            <a:ext cx="3063240" cy="896112"/>
-          </a:xfrm>
-          <a:prstGeom prst="rect">
-            <a:avLst/>
-          </a:prstGeom>
-          <a:solidFill>
-            <a:srgbClr val="7D2B42"/>
-          </a:solidFill>
-          <a:ln>
-            <a:noFill/>
-          </a:ln>
-        </p:spPr>
-        <p:style>
-          <a:lnRef idx="1">
-            <a:schemeClr val="accent1"/>
-          </a:lnRef>
-          <a:fillRef idx="3">
-            <a:schemeClr val="accent1"/>
-          </a:fillRef>
-          <a:effectRef idx="2">
-            <a:schemeClr val="accent1"/>
-          </a:effectRef>
-          <a:fontRef idx="minor">
-            <a:schemeClr val="lt1"/>
-          </a:fontRef>
-        </p:style>
-        <p:txBody>
-          <a:bodyPr rtlCol="0" anchor="ctr"/>
-          <a:lstStyle/>
-          <a:p>
-            <a:pPr algn="ctr"/>
-          </a:p>
-        </p:txBody>
-      </p:sp>
-      <p:sp>
-        <p:nvSpPr>
-          <p:cNvPr id="18" name="TextBox 17"/>
-          <p:cNvSpPr txBox="1"/>
-          <p:nvPr/>
-        </p:nvSpPr>
-        <p:spPr>
-          <a:xfrm>
-            <a:off x="914400" y="5504688"/>
-            <a:ext cx="2788920" cy="822960"/>
-          </a:xfrm>
-          <a:prstGeom prst="rect">
-            <a:avLst/>
-          </a:prstGeom>
-          <a:noFill/>
-        </p:spPr>
-        <p:txBody>
-          <a:bodyPr wrap="square" lIns="18288" rIns="18288" tIns="0" bIns="0">
-            <a:spAutoFit/>
-          </a:bodyPr>
-          <a:lstStyle/>
-          <a:p>
-            <a:pPr>
-              <a:spcAft>
-                <a:spcPts val="600"/>
-              </a:spcAft>
-              <a:defRPr sz="1300" b="1">
-                <a:solidFill>
-                  <a:srgbClr val="FFFFFF"/>
-                </a:solidFill>
-                <a:latin typeface="Montserrat"/>
-              </a:defRPr>
-            </a:pPr>
-            <a:r>
-              <a:t>HARD DRIVES</a:t>
-            </a:r>
-          </a:p>
-        </p:txBody>
-      </p:sp>
-      <p:sp>
-        <p:nvSpPr>
-          <p:cNvPr id="19" name="TextBox 18"/>
-          <p:cNvSpPr txBox="1"/>
-          <p:nvPr/>
-        </p:nvSpPr>
-        <p:spPr>
-          <a:xfrm>
-            <a:off x="4114800" y="5468112"/>
-            <a:ext cx="9646920" cy="841248"/>
-          </a:xfrm>
-          <a:prstGeom prst="rect">
-            <a:avLst/>
-          </a:prstGeom>
-          <a:noFill/>
-        </p:spPr>
-        <p:txBody>
-          <a:bodyPr wrap="square" lIns="18288" rIns="18288" tIns="0" bIns="0">
-            <a:spAutoFit/>
-          </a:bodyPr>
-          <a:lstStyle/>
-          <a:p>
-            <a:pPr>
-              <a:spcAft>
-                <a:spcPts val="600"/>
-              </a:spcAft>
-              <a:defRPr sz="1600" b="0">
-                <a:solidFill>
-                  <a:srgbClr val="202020"/>
-                </a:solidFill>
-                <a:latin typeface="Montserrat"/>
-              </a:defRPr>
-            </a:pPr>
-            <a:r>
-              <a:t>Several company drives exist. Name each custodian/location; backup policy is not yet confirmed.</a:t>
-            </a:r>
-          </a:p>
-        </p:txBody>
-      </p:sp>
-      <p:sp>
-        <p:nvSpPr>
-          <p:cNvPr id="20" name="Rectangle 19"/>
-          <p:cNvSpPr/>
-          <p:nvPr/>
-        </p:nvSpPr>
-        <p:spPr>
-          <a:xfrm>
-            <a:off x="777240" y="6400800"/>
-            <a:ext cx="3063240" cy="896112"/>
-          </a:xfrm>
-          <a:prstGeom prst="rect">
-            <a:avLst/>
-          </a:prstGeom>
-          <a:solidFill>
-            <a:srgbClr val="7D2B42"/>
-          </a:solidFill>
-          <a:ln>
-            <a:noFill/>
-          </a:ln>
-        </p:spPr>
-        <p:style>
-          <a:lnRef idx="1">
-            <a:schemeClr val="accent1"/>
-          </a:lnRef>
-          <a:fillRef idx="3">
-            <a:schemeClr val="accent1"/>
-          </a:fillRef>
-          <a:effectRef idx="2">
-            <a:schemeClr val="accent1"/>
-          </a:effectRef>
-          <a:fontRef idx="minor">
-            <a:schemeClr val="lt1"/>
-          </a:fontRef>
-        </p:style>
-        <p:txBody>
-          <a:bodyPr rtlCol="0" anchor="ctr"/>
-          <a:lstStyle/>
-          <a:p>
-            <a:pPr algn="ctr"/>
-          </a:p>
-        </p:txBody>
-      </p:sp>
-      <p:sp>
-        <p:nvSpPr>
-          <p:cNvPr id="21" name="TextBox 20"/>
-          <p:cNvSpPr txBox="1"/>
-          <p:nvPr/>
-        </p:nvSpPr>
-        <p:spPr>
-          <a:xfrm>
-            <a:off x="914400" y="6510528"/>
-            <a:ext cx="2788920" cy="822960"/>
-          </a:xfrm>
-          <a:prstGeom prst="rect">
-            <a:avLst/>
-          </a:prstGeom>
-          <a:noFill/>
-        </p:spPr>
-        <p:txBody>
-          <a:bodyPr wrap="square" lIns="18288" rIns="18288" tIns="0" bIns="0">
-            <a:spAutoFit/>
-          </a:bodyPr>
-          <a:lstStyle/>
-          <a:p>
-            <a:pPr>
-              <a:spcAft>
-                <a:spcPts val="600"/>
-              </a:spcAft>
-              <a:defRPr sz="1300" b="1">
-                <a:solidFill>
-                  <a:srgbClr val="FFFFFF"/>
-                </a:solidFill>
-                <a:latin typeface="Montserrat"/>
-              </a:defRPr>
-            </a:pPr>
-            <a:r>
-              <a:t>RECEIVER CHECK</a:t>
-            </a:r>
-          </a:p>
-        </p:txBody>
-      </p:sp>
-      <p:sp>
-        <p:nvSpPr>
-          <p:cNvPr id="22" name="TextBox 21"/>
-          <p:cNvSpPr txBox="1"/>
-          <p:nvPr/>
-        </p:nvSpPr>
-        <p:spPr>
-          <a:xfrm>
-            <a:off x="4114800" y="6473952"/>
-            <a:ext cx="9646920" cy="841248"/>
-          </a:xfrm>
-          <a:prstGeom prst="rect">
-            <a:avLst/>
-          </a:prstGeom>
-          <a:noFill/>
-        </p:spPr>
-        <p:txBody>
-          <a:bodyPr wrap="square" lIns="18288" rIns="18288" tIns="0" bIns="0">
-            <a:spAutoFit/>
-          </a:bodyPr>
-          <a:lstStyle/>
-          <a:p>
-            <a:pPr>
-              <a:spcAft>
-                <a:spcPts val="600"/>
-              </a:spcAft>
-              <a:defRPr sz="1600" b="0">
-                <a:solidFill>
-                  <a:srgbClr val="202020"/>
-                </a:solidFill>
-                <a:latin typeface="Montserrat"/>
-              </a:defRPr>
-            </a:pPr>
-            <a:r>
-              <a:t>Recommended: confirm files open and are complete before clearing cards; adopt authorization and backup rules.</a:t>
+              <a:t>Remaining balance terms, media funding/taxes/expense basis; assessor and competence sign-off. No policy is invented to fill the gaps.</a:t>
             </a:r>
           </a:p>
         </p:txBody>
@@ -30383,7 +30003,7 @@
     <p:bg>
       <p:bgPr>
         <a:solidFill>
-          <a:srgbClr val="7D2B42"/>
+          <a:srgbClr val="F3F1EE"/>
         </a:solidFill>
         <a:effectLst/>
       </p:bgPr>
@@ -30423,7 +30043,7 @@
               </a:spcAft>
               <a:defRPr sz="2500" b="1">
                 <a:solidFill>
-                  <a:srgbClr val="FFFFFF"/>
+                  <a:srgbClr val="7D2B42"/>
                 </a:solidFill>
                 <a:latin typeface="Montserrat"/>
               </a:defRPr>
@@ -30462,7 +30082,7 @@
               </a:spcAft>
               <a:defRPr sz="1000" b="1">
                 <a:solidFill>
-                  <a:srgbClr val="FFFFFF"/>
+                  <a:srgbClr val="7D2B42"/>
                 </a:solidFill>
                 <a:latin typeface="Montserrat"/>
               </a:defRPr>
@@ -30488,7 +30108,7 @@
             <a:avLst/>
           </a:prstGeom>
           <a:solidFill>
-            <a:srgbClr val="FFFFFF"/>
+            <a:srgbClr val="7D2B42"/>
           </a:solidFill>
           <a:ln>
             <a:noFill/>
@@ -30544,13 +30164,13 @@
               </a:spcAft>
               <a:defRPr sz="3500" b="1">
                 <a:solidFill>
-                  <a:srgbClr val="FFFFFF"/>
+                  <a:srgbClr val="7D2B42"/>
                 </a:solidFill>
                 <a:latin typeface="Bebas Neue"/>
               </a:defRPr>
             </a:pPr>
             <a:r>
-              <a:t>RUN THE SYSTEM THROUGH EVIDENCE, OWNERS AND DECISIONS</a:t>
+              <a:t>COMPANY SOFTWARE / KNOW THE ACCESS BOUNDARY</a:t>
             </a:r>
           </a:p>
         </p:txBody>
@@ -30583,7 +30203,7 @@
               </a:spcAft>
               <a:defRPr sz="900" b="0">
                 <a:solidFill>
-                  <a:srgbClr val="FFFFFF"/>
+                  <a:srgbClr val="555555"/>
                 </a:solidFill>
                 <a:latin typeface="Montserrat"/>
               </a:defRPr>
@@ -30622,85 +30242,805 @@
               </a:spcAft>
               <a:defRPr sz="900" b="0">
                 <a:solidFill>
+                  <a:srgbClr val="555555"/>
+                </a:solidFill>
+                <a:latin typeface="Montserrat"/>
+              </a:defRPr>
+            </a:pPr>
+            <a:r>
+              <a:t>48</a:t>
+            </a:r>
+          </a:p>
+        </p:txBody>
+      </p:sp>
+      <p:sp>
+        <p:nvSpPr>
+          <p:cNvPr id="8" name="Rectangle 7"/>
+          <p:cNvSpPr/>
+          <p:nvPr/>
+        </p:nvSpPr>
+        <p:spPr>
+          <a:xfrm>
+            <a:off x="777240" y="2377440"/>
+            <a:ext cx="3063240" cy="896112"/>
+          </a:xfrm>
+          <a:prstGeom prst="rect">
+            <a:avLst/>
+          </a:prstGeom>
+          <a:solidFill>
+            <a:srgbClr val="7D2B42"/>
+          </a:solidFill>
+          <a:ln>
+            <a:noFill/>
+          </a:ln>
+        </p:spPr>
+        <p:style>
+          <a:lnRef idx="1">
+            <a:schemeClr val="accent1"/>
+          </a:lnRef>
+          <a:fillRef idx="3">
+            <a:schemeClr val="accent1"/>
+          </a:fillRef>
+          <a:effectRef idx="2">
+            <a:schemeClr val="accent1"/>
+          </a:effectRef>
+          <a:fontRef idx="minor">
+            <a:schemeClr val="lt1"/>
+          </a:fontRef>
+        </p:style>
+        <p:txBody>
+          <a:bodyPr rtlCol="0" anchor="ctr"/>
+          <a:lstStyle/>
+          <a:p>
+            <a:pPr algn="ctr"/>
+          </a:p>
+        </p:txBody>
+      </p:sp>
+      <p:sp>
+        <p:nvSpPr>
+          <p:cNvPr id="9" name="TextBox 8"/>
+          <p:cNvSpPr txBox="1"/>
+          <p:nvPr/>
+        </p:nvSpPr>
+        <p:spPr>
+          <a:xfrm>
+            <a:off x="914400" y="2487168"/>
+            <a:ext cx="2788920" cy="822960"/>
+          </a:xfrm>
+          <a:prstGeom prst="rect">
+            <a:avLst/>
+          </a:prstGeom>
+          <a:noFill/>
+        </p:spPr>
+        <p:txBody>
+          <a:bodyPr wrap="square" lIns="18288" rIns="18288" tIns="0" bIns="0">
+            <a:spAutoFit/>
+          </a:bodyPr>
+          <a:lstStyle/>
+          <a:p>
+            <a:pPr>
+              <a:spcAft>
+                <a:spcPts val="600"/>
+              </a:spcAft>
+              <a:defRPr sz="1300" b="1">
+                <a:solidFill>
                   <a:srgbClr val="FFFFFF"/>
                 </a:solidFill>
                 <a:latin typeface="Montserrat"/>
               </a:defRPr>
             </a:pPr>
             <a:r>
-              <a:t>48</a:t>
-            </a:r>
-          </a:p>
-        </p:txBody>
-      </p:sp>
-      <p:sp>
-        <p:nvSpPr>
-          <p:cNvPr id="8" name="TextBox 7"/>
-          <p:cNvSpPr txBox="1"/>
-          <p:nvPr/>
-        </p:nvSpPr>
-        <p:spPr>
-          <a:xfrm>
-            <a:off x="868680" y="2651760"/>
-            <a:ext cx="12801600" cy="2926080"/>
-          </a:xfrm>
-          <a:prstGeom prst="rect">
-            <a:avLst/>
-          </a:prstGeom>
-          <a:noFill/>
-        </p:spPr>
-        <p:txBody>
-          <a:bodyPr wrap="square" lIns="18288" rIns="18288" tIns="0" bIns="0">
-            <a:spAutoFit/>
-          </a:bodyPr>
-          <a:lstStyle/>
-          <a:p>
-            <a:pPr>
-              <a:spcAft>
-                <a:spcPts val="600"/>
-              </a:spcAft>
-              <a:defRPr sz="4300" b="1">
-                <a:solidFill>
-                  <a:srgbClr val="FFCC00"/>
-                </a:solidFill>
-                <a:latin typeface="Montserrat"/>
-              </a:defRPr>
-            </a:pPr>
-            <a:r>
-              <a:t>Know the next gate.</a:t>
-            </a:r>
-          </a:p>
-          <a:p>
-            <a:pPr>
-              <a:spcAft>
-                <a:spcPts val="600"/>
-              </a:spcAft>
-              <a:defRPr sz="4300" b="1">
-                <a:solidFill>
-                  <a:srgbClr val="FFCC00"/>
-                </a:solidFill>
-                <a:latin typeface="Montserrat"/>
-              </a:defRPr>
-            </a:pPr>
-            <a:r>
-              <a:t>Keep one accountable holder.</a:t>
-            </a:r>
-          </a:p>
-          <a:p>
-            <a:pPr>
-              <a:spcAft>
-                <a:spcPts val="600"/>
-              </a:spcAft>
-              <a:defRPr sz="4300" b="1">
-                <a:solidFill>
-                  <a:srgbClr val="FFCC00"/>
-                </a:solidFill>
-                <a:latin typeface="Montserrat"/>
-              </a:defRPr>
-            </a:pPr>
-            <a:r>
-              <a:t>Never lose the approval trail.</a:t>
-            </a:r>
+              <a:t>HIGGSFIELD</a:t>
+            </a:r>
+          </a:p>
+        </p:txBody>
+      </p:sp>
+      <p:sp>
+        <p:nvSpPr>
+          <p:cNvPr id="10" name="TextBox 9"/>
+          <p:cNvSpPr txBox="1"/>
+          <p:nvPr/>
+        </p:nvSpPr>
+        <p:spPr>
+          <a:xfrm>
+            <a:off x="4114800" y="2450592"/>
+            <a:ext cx="9646920" cy="841248"/>
+          </a:xfrm>
+          <a:prstGeom prst="rect">
+            <a:avLst/>
+          </a:prstGeom>
+          <a:noFill/>
+        </p:spPr>
+        <p:txBody>
+          <a:bodyPr wrap="square" lIns="18288" rIns="18288" tIns="0" bIns="0">
+            <a:spAutoFit/>
+          </a:bodyPr>
+          <a:lstStyle/>
+          <a:p>
+            <a:pPr>
+              <a:spcAft>
+                <a:spcPts val="600"/>
+              </a:spcAft>
+              <a:defRPr sz="1600" b="0">
+                <a:solidFill>
+                  <a:srgbClr val="202020"/>
+                </a:solidFill>
+                <a:latin typeface="Montserrat"/>
+              </a:defRPr>
+            </a:pPr>
+            <a:r>
+              <a:t>VE-01/VE-02 ONLY. Forbidden for every other team member; MM is not an exception.</a:t>
+            </a:r>
+          </a:p>
+        </p:txBody>
+      </p:sp>
+      <p:sp>
+        <p:nvSpPr>
+          <p:cNvPr id="11" name="Rectangle 10"/>
+          <p:cNvSpPr/>
+          <p:nvPr/>
+        </p:nvSpPr>
+        <p:spPr>
+          <a:xfrm>
+            <a:off x="777240" y="3383280"/>
+            <a:ext cx="3063240" cy="896112"/>
+          </a:xfrm>
+          <a:prstGeom prst="rect">
+            <a:avLst/>
+          </a:prstGeom>
+          <a:solidFill>
+            <a:srgbClr val="7D2B42"/>
+          </a:solidFill>
+          <a:ln>
+            <a:noFill/>
+          </a:ln>
+        </p:spPr>
+        <p:style>
+          <a:lnRef idx="1">
+            <a:schemeClr val="accent1"/>
+          </a:lnRef>
+          <a:fillRef idx="3">
+            <a:schemeClr val="accent1"/>
+          </a:fillRef>
+          <a:effectRef idx="2">
+            <a:schemeClr val="accent1"/>
+          </a:effectRef>
+          <a:fontRef idx="minor">
+            <a:schemeClr val="lt1"/>
+          </a:fontRef>
+        </p:style>
+        <p:txBody>
+          <a:bodyPr rtlCol="0" anchor="ctr"/>
+          <a:lstStyle/>
+          <a:p>
+            <a:pPr algn="ctr"/>
+          </a:p>
+        </p:txBody>
+      </p:sp>
+      <p:sp>
+        <p:nvSpPr>
+          <p:cNvPr id="12" name="TextBox 11"/>
+          <p:cNvSpPr txBox="1"/>
+          <p:nvPr/>
+        </p:nvSpPr>
+        <p:spPr>
+          <a:xfrm>
+            <a:off x="914400" y="3493008"/>
+            <a:ext cx="2788920" cy="822960"/>
+          </a:xfrm>
+          <a:prstGeom prst="rect">
+            <a:avLst/>
+          </a:prstGeom>
+          <a:noFill/>
+        </p:spPr>
+        <p:txBody>
+          <a:bodyPr wrap="square" lIns="18288" rIns="18288" tIns="0" bIns="0">
+            <a:spAutoFit/>
+          </a:bodyPr>
+          <a:lstStyle/>
+          <a:p>
+            <a:pPr>
+              <a:spcAft>
+                <a:spcPts val="600"/>
+              </a:spcAft>
+              <a:defRPr sz="1300" b="1">
+                <a:solidFill>
+                  <a:srgbClr val="FFFFFF"/>
+                </a:solidFill>
+                <a:latin typeface="Montserrat"/>
+              </a:defRPr>
+            </a:pPr>
+            <a:r>
+              <a:t>CLAUDE + CHATGPT</a:t>
+            </a:r>
+          </a:p>
+        </p:txBody>
+      </p:sp>
+      <p:sp>
+        <p:nvSpPr>
+          <p:cNvPr id="13" name="TextBox 12"/>
+          <p:cNvSpPr txBox="1"/>
+          <p:nvPr/>
+        </p:nvSpPr>
+        <p:spPr>
+          <a:xfrm>
+            <a:off x="4114800" y="3456432"/>
+            <a:ext cx="9646920" cy="841248"/>
+          </a:xfrm>
+          <a:prstGeom prst="rect">
+            <a:avLst/>
+          </a:prstGeom>
+          <a:noFill/>
+        </p:spPr>
+        <p:txBody>
+          <a:bodyPr wrap="square" lIns="18288" rIns="18288" tIns="0" bIns="0">
+            <a:spAutoFit/>
+          </a:bodyPr>
+          <a:lstStyle/>
+          <a:p>
+            <a:pPr>
+              <a:spcAft>
+                <a:spcPts val="600"/>
+              </a:spcAft>
+              <a:defRPr sz="1600" b="0">
+                <a:solidFill>
+                  <a:srgbClr val="202020"/>
+                </a:solidFill>
+                <a:latin typeface="Montserrat"/>
+              </a:defRPr>
+            </a:pPr>
+            <a:r>
+              <a:t>Company subscriptions. Verify assigned seat, administrator and approved data use.</a:t>
+            </a:r>
+          </a:p>
+        </p:txBody>
+      </p:sp>
+      <p:sp>
+        <p:nvSpPr>
+          <p:cNvPr id="14" name="Rectangle 13"/>
+          <p:cNvSpPr/>
+          <p:nvPr/>
+        </p:nvSpPr>
+        <p:spPr>
+          <a:xfrm>
+            <a:off x="777240" y="4389120"/>
+            <a:ext cx="3063240" cy="896112"/>
+          </a:xfrm>
+          <a:prstGeom prst="rect">
+            <a:avLst/>
+          </a:prstGeom>
+          <a:solidFill>
+            <a:srgbClr val="7D2B42"/>
+          </a:solidFill>
+          <a:ln>
+            <a:noFill/>
+          </a:ln>
+        </p:spPr>
+        <p:style>
+          <a:lnRef idx="1">
+            <a:schemeClr val="accent1"/>
+          </a:lnRef>
+          <a:fillRef idx="3">
+            <a:schemeClr val="accent1"/>
+          </a:fillRef>
+          <a:effectRef idx="2">
+            <a:schemeClr val="accent1"/>
+          </a:effectRef>
+          <a:fontRef idx="minor">
+            <a:schemeClr val="lt1"/>
+          </a:fontRef>
+        </p:style>
+        <p:txBody>
+          <a:bodyPr rtlCol="0" anchor="ctr"/>
+          <a:lstStyle/>
+          <a:p>
+            <a:pPr algn="ctr"/>
+          </a:p>
+        </p:txBody>
+      </p:sp>
+      <p:sp>
+        <p:nvSpPr>
+          <p:cNvPr id="15" name="TextBox 14"/>
+          <p:cNvSpPr txBox="1"/>
+          <p:nvPr/>
+        </p:nvSpPr>
+        <p:spPr>
+          <a:xfrm>
+            <a:off x="914400" y="4498848"/>
+            <a:ext cx="2788920" cy="822960"/>
+          </a:xfrm>
+          <a:prstGeom prst="rect">
+            <a:avLst/>
+          </a:prstGeom>
+          <a:noFill/>
+        </p:spPr>
+        <p:txBody>
+          <a:bodyPr wrap="square" lIns="18288" rIns="18288" tIns="0" bIns="0">
+            <a:spAutoFit/>
+          </a:bodyPr>
+          <a:lstStyle/>
+          <a:p>
+            <a:pPr>
+              <a:spcAft>
+                <a:spcPts val="600"/>
+              </a:spcAft>
+              <a:defRPr sz="1300" b="1">
+                <a:solidFill>
+                  <a:srgbClr val="FFFFFF"/>
+                </a:solidFill>
+                <a:latin typeface="Montserrat"/>
+              </a:defRPr>
+            </a:pPr>
+            <a:r>
+              <a:t>CANVA + ADOBE</a:t>
+            </a:r>
+          </a:p>
+        </p:txBody>
+      </p:sp>
+      <p:sp>
+        <p:nvSpPr>
+          <p:cNvPr id="16" name="TextBox 15"/>
+          <p:cNvSpPr txBox="1"/>
+          <p:nvPr/>
+        </p:nvSpPr>
+        <p:spPr>
+          <a:xfrm>
+            <a:off x="4114800" y="4462272"/>
+            <a:ext cx="9646920" cy="841248"/>
+          </a:xfrm>
+          <a:prstGeom prst="rect">
+            <a:avLst/>
+          </a:prstGeom>
+          <a:noFill/>
+        </p:spPr>
+        <p:txBody>
+          <a:bodyPr wrap="square" lIns="18288" rIns="18288" tIns="0" bIns="0">
+            <a:spAutoFit/>
+          </a:bodyPr>
+          <a:lstStyle/>
+          <a:p>
+            <a:pPr>
+              <a:spcAft>
+                <a:spcPts val="600"/>
+              </a:spcAft>
+              <a:defRPr sz="1600" b="0">
+                <a:solidFill>
+                  <a:srgbClr val="202020"/>
+                </a:solidFill>
+                <a:latin typeface="Montserrat"/>
+              </a:defRPr>
+            </a:pPr>
+            <a:r>
+              <a:t>Company-provided programs. Confirm exact licences/applications and seat assignments.</a:t>
+            </a:r>
+          </a:p>
+        </p:txBody>
+      </p:sp>
+      <p:sp>
+        <p:nvSpPr>
+          <p:cNvPr id="17" name="Rectangle 16"/>
+          <p:cNvSpPr/>
+          <p:nvPr/>
+        </p:nvSpPr>
+        <p:spPr>
+          <a:xfrm>
+            <a:off x="777240" y="5394960"/>
+            <a:ext cx="3063240" cy="896112"/>
+          </a:xfrm>
+          <a:prstGeom prst="rect">
+            <a:avLst/>
+          </a:prstGeom>
+          <a:solidFill>
+            <a:srgbClr val="7D2B42"/>
+          </a:solidFill>
+          <a:ln>
+            <a:noFill/>
+          </a:ln>
+        </p:spPr>
+        <p:style>
+          <a:lnRef idx="1">
+            <a:schemeClr val="accent1"/>
+          </a:lnRef>
+          <a:fillRef idx="3">
+            <a:schemeClr val="accent1"/>
+          </a:fillRef>
+          <a:effectRef idx="2">
+            <a:schemeClr val="accent1"/>
+          </a:effectRef>
+          <a:fontRef idx="minor">
+            <a:schemeClr val="lt1"/>
+          </a:fontRef>
+        </p:style>
+        <p:txBody>
+          <a:bodyPr rtlCol="0" anchor="ctr"/>
+          <a:lstStyle/>
+          <a:p>
+            <a:pPr algn="ctr"/>
+          </a:p>
+        </p:txBody>
+      </p:sp>
+      <p:sp>
+        <p:nvSpPr>
+          <p:cNvPr id="18" name="TextBox 17"/>
+          <p:cNvSpPr txBox="1"/>
+          <p:nvPr/>
+        </p:nvSpPr>
+        <p:spPr>
+          <a:xfrm>
+            <a:off x="914400" y="5504688"/>
+            <a:ext cx="2788920" cy="822960"/>
+          </a:xfrm>
+          <a:prstGeom prst="rect">
+            <a:avLst/>
+          </a:prstGeom>
+          <a:noFill/>
+        </p:spPr>
+        <p:txBody>
+          <a:bodyPr wrap="square" lIns="18288" rIns="18288" tIns="0" bIns="0">
+            <a:spAutoFit/>
+          </a:bodyPr>
+          <a:lstStyle/>
+          <a:p>
+            <a:pPr>
+              <a:spcAft>
+                <a:spcPts val="600"/>
+              </a:spcAft>
+              <a:defRPr sz="1300" b="1">
+                <a:solidFill>
+                  <a:srgbClr val="FFFFFF"/>
+                </a:solidFill>
+                <a:latin typeface="Montserrat"/>
+              </a:defRPr>
+            </a:pPr>
+            <a:r>
+              <a:t>NO PASSWORDS HERE</a:t>
+            </a:r>
+          </a:p>
+        </p:txBody>
+      </p:sp>
+      <p:sp>
+        <p:nvSpPr>
+          <p:cNvPr id="19" name="TextBox 18"/>
+          <p:cNvSpPr txBox="1"/>
+          <p:nvPr/>
+        </p:nvSpPr>
+        <p:spPr>
+          <a:xfrm>
+            <a:off x="4114800" y="5468112"/>
+            <a:ext cx="9646920" cy="841248"/>
+          </a:xfrm>
+          <a:prstGeom prst="rect">
+            <a:avLst/>
+          </a:prstGeom>
+          <a:noFill/>
+        </p:spPr>
+        <p:txBody>
+          <a:bodyPr wrap="square" lIns="18288" rIns="18288" tIns="0" bIns="0">
+            <a:spAutoFit/>
+          </a:bodyPr>
+          <a:lstStyle/>
+          <a:p>
+            <a:pPr>
+              <a:spcAft>
+                <a:spcPts val="600"/>
+              </a:spcAft>
+              <a:defRPr sz="1600" b="0">
+                <a:solidFill>
+                  <a:srgbClr val="202020"/>
+                </a:solidFill>
+                <a:latin typeface="Montserrat"/>
+              </a:defRPr>
+            </a:pPr>
+            <a:r>
+              <a:t>Keep credentials in the approved secure route, not this manual or task sheet.</a:t>
+            </a:r>
+          </a:p>
+        </p:txBody>
+      </p:sp>
+    </p:spTree>
+  </p:cSld>
+  <p:clrMapOvr>
+    <a:masterClrMapping/>
+  </p:clrMapOvr>
+</p:sld>
+</file>
+
+<file path=ppt/slides/slide49.xml><?xml version="1.0" encoding="utf-8"?>
+<p:sld xmlns:a="http://schemas.openxmlformats.org/drawingml/2006/main" xmlns:p="http://schemas.openxmlformats.org/presentationml/2006/main" xmlns:r="http://schemas.openxmlformats.org/officeDocument/2006/relationships">
+  <p:cSld>
+    <p:bg>
+      <p:bgPr>
+        <a:solidFill>
+          <a:srgbClr val="F3F1EE"/>
+        </a:solidFill>
+        <a:effectLst/>
+      </p:bgPr>
+    </p:bg>
+    <p:spTree>
+      <p:nvGrpSpPr>
+        <p:cNvPr id="1" name=""/>
+        <p:cNvGrpSpPr/>
+        <p:nvPr/>
+      </p:nvGrpSpPr>
+      <p:grpSpPr/>
+      <p:sp>
+        <p:nvSpPr>
+          <p:cNvPr id="2" name="TextBox 1"/>
+          <p:cNvSpPr txBox="1"/>
+          <p:nvPr/>
+        </p:nvSpPr>
+        <p:spPr>
+          <a:xfrm>
+            <a:off x="640080" y="274320"/>
+            <a:ext cx="1097280" cy="457200"/>
+          </a:xfrm>
+          <a:prstGeom prst="rect">
+            <a:avLst/>
+          </a:prstGeom>
+          <a:noFill/>
+        </p:spPr>
+        <p:txBody>
+          <a:bodyPr wrap="square" lIns="18288" rIns="18288" tIns="0" bIns="0">
+            <a:spAutoFit/>
+          </a:bodyPr>
+          <a:lstStyle/>
+          <a:p>
+            <a:pPr>
+              <a:spcAft>
+                <a:spcPts val="600"/>
+              </a:spcAft>
+              <a:defRPr sz="2500" b="1">
+                <a:solidFill>
+                  <a:srgbClr val="7D2B42"/>
+                </a:solidFill>
+                <a:latin typeface="Montserrat"/>
+              </a:defRPr>
+            </a:pPr>
+            <a:r>
+              <a:t>PMP</a:t>
+            </a:r>
+          </a:p>
+        </p:txBody>
+      </p:sp>
+      <p:sp>
+        <p:nvSpPr>
+          <p:cNvPr id="3" name="TextBox 2"/>
+          <p:cNvSpPr txBox="1"/>
+          <p:nvPr/>
+        </p:nvSpPr>
+        <p:spPr>
+          <a:xfrm>
+            <a:off x="1828800" y="365760"/>
+            <a:ext cx="10972800" cy="320040"/>
+          </a:xfrm>
+          <a:prstGeom prst="rect">
+            <a:avLst/>
+          </a:prstGeom>
+          <a:noFill/>
+        </p:spPr>
+        <p:txBody>
+          <a:bodyPr wrap="square" lIns="18288" rIns="18288" tIns="0" bIns="0">
+            <a:spAutoFit/>
+          </a:bodyPr>
+          <a:lstStyle/>
+          <a:p>
+            <a:pPr>
+              <a:spcAft>
+                <a:spcPts val="600"/>
+              </a:spcAft>
+              <a:defRPr sz="1000" b="1">
+                <a:solidFill>
+                  <a:srgbClr val="7D2B42"/>
+                </a:solidFill>
+                <a:latin typeface="Montserrat"/>
+              </a:defRPr>
+            </a:pPr>
+            <a:r>
+              <a:t>INCOMING MARKETING MANAGER / DETAILED ONBOARDING</a:t>
+            </a:r>
+          </a:p>
+        </p:txBody>
+      </p:sp>
+      <p:sp>
+        <p:nvSpPr>
+          <p:cNvPr id="4" name="Rectangle 3"/>
+          <p:cNvSpPr/>
+          <p:nvPr/>
+        </p:nvSpPr>
+        <p:spPr>
+          <a:xfrm>
+            <a:off x="685800" y="896112"/>
+            <a:ext cx="13258800" cy="13716"/>
+          </a:xfrm>
+          <a:prstGeom prst="rect">
+            <a:avLst/>
+          </a:prstGeom>
+          <a:solidFill>
+            <a:srgbClr val="7D2B42"/>
+          </a:solidFill>
+          <a:ln>
+            <a:noFill/>
+          </a:ln>
+        </p:spPr>
+        <p:style>
+          <a:lnRef idx="1">
+            <a:schemeClr val="accent1"/>
+          </a:lnRef>
+          <a:fillRef idx="3">
+            <a:schemeClr val="accent1"/>
+          </a:fillRef>
+          <a:effectRef idx="2">
+            <a:schemeClr val="accent1"/>
+          </a:effectRef>
+          <a:fontRef idx="minor">
+            <a:schemeClr val="lt1"/>
+          </a:fontRef>
+        </p:style>
+        <p:txBody>
+          <a:bodyPr rtlCol="0" anchor="ctr"/>
+          <a:lstStyle/>
+          <a:p>
+            <a:pPr algn="ctr"/>
+          </a:p>
+        </p:txBody>
+      </p:sp>
+      <p:sp>
+        <p:nvSpPr>
+          <p:cNvPr id="5" name="TextBox 4"/>
+          <p:cNvSpPr txBox="1"/>
+          <p:nvPr/>
+        </p:nvSpPr>
+        <p:spPr>
+          <a:xfrm>
+            <a:off x="731520" y="1188720"/>
+            <a:ext cx="13167360" cy="914400"/>
+          </a:xfrm>
+          <a:prstGeom prst="rect">
+            <a:avLst/>
+          </a:prstGeom>
+          <a:noFill/>
+        </p:spPr>
+        <p:txBody>
+          <a:bodyPr wrap="square" lIns="18288" rIns="18288" tIns="0" bIns="0">
+            <a:spAutoFit/>
+          </a:bodyPr>
+          <a:lstStyle/>
+          <a:p>
+            <a:pPr>
+              <a:spcAft>
+                <a:spcPts val="600"/>
+              </a:spcAft>
+              <a:defRPr sz="3500" b="1">
+                <a:solidFill>
+                  <a:srgbClr val="7D2B42"/>
+                </a:solidFill>
+                <a:latin typeface="Bebas Neue"/>
+              </a:defRPr>
+            </a:pPr>
+            <a:r>
+              <a:t>SHOOTING / COORDINATION, MEDIA AND EQUIPMENT</a:t>
+            </a:r>
+          </a:p>
+        </p:txBody>
+      </p:sp>
+      <p:sp>
+        <p:nvSpPr>
+          <p:cNvPr id="6" name="TextBox 5"/>
+          <p:cNvSpPr txBox="1"/>
+          <p:nvPr/>
+        </p:nvSpPr>
+        <p:spPr>
+          <a:xfrm>
+            <a:off x="731520" y="7772400"/>
+            <a:ext cx="11887200" cy="274320"/>
+          </a:xfrm>
+          <a:prstGeom prst="rect">
+            <a:avLst/>
+          </a:prstGeom>
+          <a:noFill/>
+        </p:spPr>
+        <p:txBody>
+          <a:bodyPr wrap="square" lIns="18288" rIns="18288" tIns="0" bIns="0">
+            <a:spAutoFit/>
+          </a:bodyPr>
+          <a:lstStyle/>
+          <a:p>
+            <a:pPr>
+              <a:spcAft>
+                <a:spcPts val="600"/>
+              </a:spcAft>
+              <a:defRPr sz="900" b="0">
+                <a:solidFill>
+                  <a:srgbClr val="555555"/>
+                </a:solidFill>
+                <a:latin typeface="Montserrat"/>
+              </a:defRPr>
+            </a:pPr>
+            <a:r>
+              <a:t>V1.0 • USE THE RUNBOOK FOR FULL STEPS • LIVE READINESS NOT ASSESSED</a:t>
+            </a:r>
+          </a:p>
+        </p:txBody>
+      </p:sp>
+      <p:sp>
+        <p:nvSpPr>
+          <p:cNvPr id="7" name="TextBox 6"/>
+          <p:cNvSpPr txBox="1"/>
+          <p:nvPr/>
+        </p:nvSpPr>
+        <p:spPr>
+          <a:xfrm>
+            <a:off x="13350240" y="7772400"/>
+            <a:ext cx="548640" cy="274320"/>
+          </a:xfrm>
+          <a:prstGeom prst="rect">
+            <a:avLst/>
+          </a:prstGeom>
+          <a:noFill/>
+        </p:spPr>
+        <p:txBody>
+          <a:bodyPr wrap="square" lIns="18288" rIns="18288" tIns="0" bIns="0">
+            <a:spAutoFit/>
+          </a:bodyPr>
+          <a:lstStyle/>
+          <a:p>
+            <a:pPr>
+              <a:spcAft>
+                <a:spcPts val="600"/>
+              </a:spcAft>
+              <a:defRPr sz="900" b="0">
+                <a:solidFill>
+                  <a:srgbClr val="555555"/>
+                </a:solidFill>
+                <a:latin typeface="Montserrat"/>
+              </a:defRPr>
+            </a:pPr>
+            <a:r>
+              <a:t>49</a:t>
+            </a:r>
+          </a:p>
+        </p:txBody>
+      </p:sp>
+      <p:sp>
+        <p:nvSpPr>
+          <p:cNvPr id="8" name="Rectangle 7"/>
+          <p:cNvSpPr/>
+          <p:nvPr/>
+        </p:nvSpPr>
+        <p:spPr>
+          <a:xfrm>
+            <a:off x="777240" y="2377440"/>
+            <a:ext cx="3063240" cy="896112"/>
+          </a:xfrm>
+          <a:prstGeom prst="rect">
+            <a:avLst/>
+          </a:prstGeom>
+          <a:solidFill>
+            <a:srgbClr val="7D2B42"/>
+          </a:solidFill>
+          <a:ln>
+            <a:noFill/>
+          </a:ln>
+        </p:spPr>
+        <p:style>
+          <a:lnRef idx="1">
+            <a:schemeClr val="accent1"/>
+          </a:lnRef>
+          <a:fillRef idx="3">
+            <a:schemeClr val="accent1"/>
+          </a:fillRef>
+          <a:effectRef idx="2">
+            <a:schemeClr val="accent1"/>
+          </a:effectRef>
+          <a:fontRef idx="minor">
+            <a:schemeClr val="lt1"/>
+          </a:fontRef>
+        </p:style>
+        <p:txBody>
+          <a:bodyPr rtlCol="0" anchor="ctr"/>
+          <a:lstStyle/>
+          <a:p>
+            <a:pPr algn="ctr"/>
           </a:p>
         </p:txBody>
       </p:sp>
@@ -30712,25 +31052,25 @@
         </p:nvSpPr>
         <p:spPr>
           <a:xfrm>
-            <a:off x="868680" y="6263640"/>
-            <a:ext cx="12801600" cy="822960"/>
-          </a:xfrm>
-          <a:prstGeom prst="rect">
-            <a:avLst/>
-          </a:prstGeom>
-          <a:noFill/>
-        </p:spPr>
-        <p:txBody>
-          <a:bodyPr wrap="square" lIns="18288" rIns="18288" tIns="0" bIns="0">
-            <a:spAutoFit/>
-          </a:bodyPr>
-          <a:lstStyle/>
-          <a:p>
-            <a:pPr>
-              <a:spcAft>
-                <a:spcPts val="600"/>
-              </a:spcAft>
-              <a:defRPr sz="2200" b="0">
+            <a:off x="914400" y="2487168"/>
+            <a:ext cx="2788920" cy="822960"/>
+          </a:xfrm>
+          <a:prstGeom prst="rect">
+            <a:avLst/>
+          </a:prstGeom>
+          <a:noFill/>
+        </p:spPr>
+        <p:txBody>
+          <a:bodyPr wrap="square" lIns="18288" rIns="18288" tIns="0" bIns="0">
+            <a:spAutoFit/>
+          </a:bodyPr>
+          <a:lstStyle/>
+          <a:p>
+            <a:pPr>
+              <a:spcAft>
+                <a:spcPts val="600"/>
+              </a:spcAft>
+              <a:defRPr sz="1300" b="1">
                 <a:solidFill>
                   <a:srgbClr val="FFFFFF"/>
                 </a:solidFill>
@@ -30738,7 +31078,530 @@
               </a:defRPr>
             </a:pPr>
             <a:r>
-              <a:t>Use the full manual, practise with the assessor and confirm authority before live operation.</a:t>
+              <a:t>AM</a:t>
+            </a:r>
+          </a:p>
+        </p:txBody>
+      </p:sp>
+      <p:sp>
+        <p:nvSpPr>
+          <p:cNvPr id="10" name="TextBox 9"/>
+          <p:cNvSpPr txBox="1"/>
+          <p:nvPr/>
+        </p:nvSpPr>
+        <p:spPr>
+          <a:xfrm>
+            <a:off x="4114800" y="2450592"/>
+            <a:ext cx="9646920" cy="841248"/>
+          </a:xfrm>
+          <a:prstGeom prst="rect">
+            <a:avLst/>
+          </a:prstGeom>
+          <a:noFill/>
+        </p:spPr>
+        <p:txBody>
+          <a:bodyPr wrap="square" lIns="18288" rIns="18288" tIns="0" bIns="0">
+            <a:spAutoFit/>
+          </a:bodyPr>
+          <a:lstStyle/>
+          <a:p>
+            <a:pPr>
+              <a:spcAft>
+                <a:spcPts val="600"/>
+              </a:spcAft>
+              <a:defRPr sz="1600" b="0">
+                <a:solidFill>
+                  <a:srgbClr val="202020"/>
+                </a:solidFill>
+                <a:latin typeface="Montserrat"/>
+              </a:defRPr>
+            </a:pPr>
+            <a:r>
+              <a:t>Arranges outsourced videography/photography, podcast guests and PR person.</a:t>
+            </a:r>
+          </a:p>
+        </p:txBody>
+      </p:sp>
+      <p:sp>
+        <p:nvSpPr>
+          <p:cNvPr id="11" name="Rectangle 10"/>
+          <p:cNvSpPr/>
+          <p:nvPr/>
+        </p:nvSpPr>
+        <p:spPr>
+          <a:xfrm>
+            <a:off x="777240" y="3383280"/>
+            <a:ext cx="3063240" cy="896112"/>
+          </a:xfrm>
+          <a:prstGeom prst="rect">
+            <a:avLst/>
+          </a:prstGeom>
+          <a:solidFill>
+            <a:srgbClr val="7D2B42"/>
+          </a:solidFill>
+          <a:ln>
+            <a:noFill/>
+          </a:ln>
+        </p:spPr>
+        <p:style>
+          <a:lnRef idx="1">
+            <a:schemeClr val="accent1"/>
+          </a:lnRef>
+          <a:fillRef idx="3">
+            <a:schemeClr val="accent1"/>
+          </a:fillRef>
+          <a:effectRef idx="2">
+            <a:schemeClr val="accent1"/>
+          </a:effectRef>
+          <a:fontRef idx="minor">
+            <a:schemeClr val="lt1"/>
+          </a:fontRef>
+        </p:style>
+        <p:txBody>
+          <a:bodyPr rtlCol="0" anchor="ctr"/>
+          <a:lstStyle/>
+          <a:p>
+            <a:pPr algn="ctr"/>
+          </a:p>
+        </p:txBody>
+      </p:sp>
+      <p:sp>
+        <p:nvSpPr>
+          <p:cNvPr id="12" name="TextBox 11"/>
+          <p:cNvSpPr txBox="1"/>
+          <p:nvPr/>
+        </p:nvSpPr>
+        <p:spPr>
+          <a:xfrm>
+            <a:off x="914400" y="3493008"/>
+            <a:ext cx="2788920" cy="822960"/>
+          </a:xfrm>
+          <a:prstGeom prst="rect">
+            <a:avLst/>
+          </a:prstGeom>
+          <a:noFill/>
+        </p:spPr>
+        <p:txBody>
+          <a:bodyPr wrap="square" lIns="18288" rIns="18288" tIns="0" bIns="0">
+            <a:spAutoFit/>
+          </a:bodyPr>
+          <a:lstStyle/>
+          <a:p>
+            <a:pPr>
+              <a:spcAft>
+                <a:spcPts val="600"/>
+              </a:spcAft>
+              <a:defRPr sz="1300" b="1">
+                <a:solidFill>
+                  <a:srgbClr val="FFFFFF"/>
+                </a:solidFill>
+                <a:latin typeface="Montserrat"/>
+              </a:defRPr>
+            </a:pPr>
+            <a:r>
+              <a:t>SM</a:t>
+            </a:r>
+          </a:p>
+        </p:txBody>
+      </p:sp>
+      <p:sp>
+        <p:nvSpPr>
+          <p:cNvPr id="13" name="TextBox 12"/>
+          <p:cNvSpPr txBox="1"/>
+          <p:nvPr/>
+        </p:nvSpPr>
+        <p:spPr>
+          <a:xfrm>
+            <a:off x="4114800" y="3456432"/>
+            <a:ext cx="9646920" cy="841248"/>
+          </a:xfrm>
+          <a:prstGeom prst="rect">
+            <a:avLst/>
+          </a:prstGeom>
+          <a:noFill/>
+        </p:spPr>
+        <p:txBody>
+          <a:bodyPr wrap="square" lIns="18288" rIns="18288" tIns="0" bIns="0">
+            <a:spAutoFit/>
+          </a:bodyPr>
+          <a:lstStyle/>
+          <a:p>
+            <a:pPr>
+              <a:spcAft>
+                <a:spcPts val="600"/>
+              </a:spcAft>
+              <a:defRPr sz="1600" b="0">
+                <a:solidFill>
+                  <a:srgbClr val="202020"/>
+                </a:solidFill>
+                <a:latin typeface="Montserrat"/>
+              </a:defRPr>
+            </a:pPr>
+            <a:r>
+              <a:t>Collects source data, hands to assigned editors/designers and captures BTS.</a:t>
+            </a:r>
+          </a:p>
+        </p:txBody>
+      </p:sp>
+      <p:sp>
+        <p:nvSpPr>
+          <p:cNvPr id="14" name="Rectangle 13"/>
+          <p:cNvSpPr/>
+          <p:nvPr/>
+        </p:nvSpPr>
+        <p:spPr>
+          <a:xfrm>
+            <a:off x="777240" y="4389120"/>
+            <a:ext cx="3063240" cy="896112"/>
+          </a:xfrm>
+          <a:prstGeom prst="rect">
+            <a:avLst/>
+          </a:prstGeom>
+          <a:solidFill>
+            <a:srgbClr val="7D2B42"/>
+          </a:solidFill>
+          <a:ln>
+            <a:noFill/>
+          </a:ln>
+        </p:spPr>
+        <p:style>
+          <a:lnRef idx="1">
+            <a:schemeClr val="accent1"/>
+          </a:lnRef>
+          <a:fillRef idx="3">
+            <a:schemeClr val="accent1"/>
+          </a:fillRef>
+          <a:effectRef idx="2">
+            <a:schemeClr val="accent1"/>
+          </a:effectRef>
+          <a:fontRef idx="minor">
+            <a:schemeClr val="lt1"/>
+          </a:fontRef>
+        </p:style>
+        <p:txBody>
+          <a:bodyPr rtlCol="0" anchor="ctr"/>
+          <a:lstStyle/>
+          <a:p>
+            <a:pPr algn="ctr"/>
+          </a:p>
+        </p:txBody>
+      </p:sp>
+      <p:sp>
+        <p:nvSpPr>
+          <p:cNvPr id="15" name="TextBox 14"/>
+          <p:cNvSpPr txBox="1"/>
+          <p:nvPr/>
+        </p:nvSpPr>
+        <p:spPr>
+          <a:xfrm>
+            <a:off x="914400" y="4498848"/>
+            <a:ext cx="2788920" cy="822960"/>
+          </a:xfrm>
+          <a:prstGeom prst="rect">
+            <a:avLst/>
+          </a:prstGeom>
+          <a:noFill/>
+        </p:spPr>
+        <p:txBody>
+          <a:bodyPr wrap="square" lIns="18288" rIns="18288" tIns="0" bIns="0">
+            <a:spAutoFit/>
+          </a:bodyPr>
+          <a:lstStyle/>
+          <a:p>
+            <a:pPr>
+              <a:spcAft>
+                <a:spcPts val="600"/>
+              </a:spcAft>
+              <a:defRPr sz="1300" b="1">
+                <a:solidFill>
+                  <a:srgbClr val="FFFFFF"/>
+                </a:solidFill>
+                <a:latin typeface="Montserrat"/>
+              </a:defRPr>
+            </a:pPr>
+            <a:r>
+              <a:t>SM CUSTODY</a:t>
+            </a:r>
+          </a:p>
+        </p:txBody>
+      </p:sp>
+      <p:sp>
+        <p:nvSpPr>
+          <p:cNvPr id="16" name="TextBox 15"/>
+          <p:cNvSpPr txBox="1"/>
+          <p:nvPr/>
+        </p:nvSpPr>
+        <p:spPr>
+          <a:xfrm>
+            <a:off x="4114800" y="4462272"/>
+            <a:ext cx="9646920" cy="841248"/>
+          </a:xfrm>
+          <a:prstGeom prst="rect">
+            <a:avLst/>
+          </a:prstGeom>
+          <a:noFill/>
+        </p:spPr>
+        <p:txBody>
+          <a:bodyPr wrap="square" lIns="18288" rIns="18288" tIns="0" bIns="0">
+            <a:spAutoFit/>
+          </a:bodyPr>
+          <a:lstStyle/>
+          <a:p>
+            <a:pPr>
+              <a:spcAft>
+                <a:spcPts val="600"/>
+              </a:spcAft>
+              <a:defRPr sz="1600" b="0">
+                <a:solidFill>
+                  <a:srgbClr val="202020"/>
+                </a:solidFill>
+                <a:latin typeface="Montserrat"/>
+              </a:defRPr>
+            </a:pPr>
+            <a:r>
+              <a:t>Full accountability for memory cards and studio tools; issue/return record is recommended.</a:t>
+            </a:r>
+          </a:p>
+        </p:txBody>
+      </p:sp>
+      <p:sp>
+        <p:nvSpPr>
+          <p:cNvPr id="17" name="Rectangle 16"/>
+          <p:cNvSpPr/>
+          <p:nvPr/>
+        </p:nvSpPr>
+        <p:spPr>
+          <a:xfrm>
+            <a:off x="777240" y="5394960"/>
+            <a:ext cx="3063240" cy="896112"/>
+          </a:xfrm>
+          <a:prstGeom prst="rect">
+            <a:avLst/>
+          </a:prstGeom>
+          <a:solidFill>
+            <a:srgbClr val="7D2B42"/>
+          </a:solidFill>
+          <a:ln>
+            <a:noFill/>
+          </a:ln>
+        </p:spPr>
+        <p:style>
+          <a:lnRef idx="1">
+            <a:schemeClr val="accent1"/>
+          </a:lnRef>
+          <a:fillRef idx="3">
+            <a:schemeClr val="accent1"/>
+          </a:fillRef>
+          <a:effectRef idx="2">
+            <a:schemeClr val="accent1"/>
+          </a:effectRef>
+          <a:fontRef idx="minor">
+            <a:schemeClr val="lt1"/>
+          </a:fontRef>
+        </p:style>
+        <p:txBody>
+          <a:bodyPr rtlCol="0" anchor="ctr"/>
+          <a:lstStyle/>
+          <a:p>
+            <a:pPr algn="ctr"/>
+          </a:p>
+        </p:txBody>
+      </p:sp>
+      <p:sp>
+        <p:nvSpPr>
+          <p:cNvPr id="18" name="TextBox 17"/>
+          <p:cNvSpPr txBox="1"/>
+          <p:nvPr/>
+        </p:nvSpPr>
+        <p:spPr>
+          <a:xfrm>
+            <a:off x="914400" y="5504688"/>
+            <a:ext cx="2788920" cy="822960"/>
+          </a:xfrm>
+          <a:prstGeom prst="rect">
+            <a:avLst/>
+          </a:prstGeom>
+          <a:noFill/>
+        </p:spPr>
+        <p:txBody>
+          <a:bodyPr wrap="square" lIns="18288" rIns="18288" tIns="0" bIns="0">
+            <a:spAutoFit/>
+          </a:bodyPr>
+          <a:lstStyle/>
+          <a:p>
+            <a:pPr>
+              <a:spcAft>
+                <a:spcPts val="600"/>
+              </a:spcAft>
+              <a:defRPr sz="1300" b="1">
+                <a:solidFill>
+                  <a:srgbClr val="FFFFFF"/>
+                </a:solidFill>
+                <a:latin typeface="Montserrat"/>
+              </a:defRPr>
+            </a:pPr>
+            <a:r>
+              <a:t>HARD DRIVES</a:t>
+            </a:r>
+          </a:p>
+        </p:txBody>
+      </p:sp>
+      <p:sp>
+        <p:nvSpPr>
+          <p:cNvPr id="19" name="TextBox 18"/>
+          <p:cNvSpPr txBox="1"/>
+          <p:nvPr/>
+        </p:nvSpPr>
+        <p:spPr>
+          <a:xfrm>
+            <a:off x="4114800" y="5468112"/>
+            <a:ext cx="9646920" cy="841248"/>
+          </a:xfrm>
+          <a:prstGeom prst="rect">
+            <a:avLst/>
+          </a:prstGeom>
+          <a:noFill/>
+        </p:spPr>
+        <p:txBody>
+          <a:bodyPr wrap="square" lIns="18288" rIns="18288" tIns="0" bIns="0">
+            <a:spAutoFit/>
+          </a:bodyPr>
+          <a:lstStyle/>
+          <a:p>
+            <a:pPr>
+              <a:spcAft>
+                <a:spcPts val="600"/>
+              </a:spcAft>
+              <a:defRPr sz="1600" b="0">
+                <a:solidFill>
+                  <a:srgbClr val="202020"/>
+                </a:solidFill>
+                <a:latin typeface="Montserrat"/>
+              </a:defRPr>
+            </a:pPr>
+            <a:r>
+              <a:t>Several company drives exist. Name each custodian/location; backup policy is not yet confirmed.</a:t>
+            </a:r>
+          </a:p>
+        </p:txBody>
+      </p:sp>
+      <p:sp>
+        <p:nvSpPr>
+          <p:cNvPr id="20" name="Rectangle 19"/>
+          <p:cNvSpPr/>
+          <p:nvPr/>
+        </p:nvSpPr>
+        <p:spPr>
+          <a:xfrm>
+            <a:off x="777240" y="6400800"/>
+            <a:ext cx="3063240" cy="896112"/>
+          </a:xfrm>
+          <a:prstGeom prst="rect">
+            <a:avLst/>
+          </a:prstGeom>
+          <a:solidFill>
+            <a:srgbClr val="7D2B42"/>
+          </a:solidFill>
+          <a:ln>
+            <a:noFill/>
+          </a:ln>
+        </p:spPr>
+        <p:style>
+          <a:lnRef idx="1">
+            <a:schemeClr val="accent1"/>
+          </a:lnRef>
+          <a:fillRef idx="3">
+            <a:schemeClr val="accent1"/>
+          </a:fillRef>
+          <a:effectRef idx="2">
+            <a:schemeClr val="accent1"/>
+          </a:effectRef>
+          <a:fontRef idx="minor">
+            <a:schemeClr val="lt1"/>
+          </a:fontRef>
+        </p:style>
+        <p:txBody>
+          <a:bodyPr rtlCol="0" anchor="ctr"/>
+          <a:lstStyle/>
+          <a:p>
+            <a:pPr algn="ctr"/>
+          </a:p>
+        </p:txBody>
+      </p:sp>
+      <p:sp>
+        <p:nvSpPr>
+          <p:cNvPr id="21" name="TextBox 20"/>
+          <p:cNvSpPr txBox="1"/>
+          <p:nvPr/>
+        </p:nvSpPr>
+        <p:spPr>
+          <a:xfrm>
+            <a:off x="914400" y="6510528"/>
+            <a:ext cx="2788920" cy="822960"/>
+          </a:xfrm>
+          <a:prstGeom prst="rect">
+            <a:avLst/>
+          </a:prstGeom>
+          <a:noFill/>
+        </p:spPr>
+        <p:txBody>
+          <a:bodyPr wrap="square" lIns="18288" rIns="18288" tIns="0" bIns="0">
+            <a:spAutoFit/>
+          </a:bodyPr>
+          <a:lstStyle/>
+          <a:p>
+            <a:pPr>
+              <a:spcAft>
+                <a:spcPts val="600"/>
+              </a:spcAft>
+              <a:defRPr sz="1300" b="1">
+                <a:solidFill>
+                  <a:srgbClr val="FFFFFF"/>
+                </a:solidFill>
+                <a:latin typeface="Montserrat"/>
+              </a:defRPr>
+            </a:pPr>
+            <a:r>
+              <a:t>RECEIVER CHECK</a:t>
+            </a:r>
+          </a:p>
+        </p:txBody>
+      </p:sp>
+      <p:sp>
+        <p:nvSpPr>
+          <p:cNvPr id="22" name="TextBox 21"/>
+          <p:cNvSpPr txBox="1"/>
+          <p:nvPr/>
+        </p:nvSpPr>
+        <p:spPr>
+          <a:xfrm>
+            <a:off x="4114800" y="6473952"/>
+            <a:ext cx="9646920" cy="841248"/>
+          </a:xfrm>
+          <a:prstGeom prst="rect">
+            <a:avLst/>
+          </a:prstGeom>
+          <a:noFill/>
+        </p:spPr>
+        <p:txBody>
+          <a:bodyPr wrap="square" lIns="18288" rIns="18288" tIns="0" bIns="0">
+            <a:spAutoFit/>
+          </a:bodyPr>
+          <a:lstStyle/>
+          <a:p>
+            <a:pPr>
+              <a:spcAft>
+                <a:spcPts val="600"/>
+              </a:spcAft>
+              <a:defRPr sz="1600" b="0">
+                <a:solidFill>
+                  <a:srgbClr val="202020"/>
+                </a:solidFill>
+                <a:latin typeface="Montserrat"/>
+              </a:defRPr>
+            </a:pPr>
+            <a:r>
+              <a:t>Recommended: confirm files open and are complete before clearing cards; adopt authorization and backup rules.</a:t>
             </a:r>
           </a:p>
         </p:txBody>
@@ -31608,6 +32471,1249 @@
             </a:pPr>
             <a:r>
               <a:t>SM receives approved version; final Design/Video archive allowed.</a:t>
+            </a:r>
+          </a:p>
+        </p:txBody>
+      </p:sp>
+    </p:spTree>
+  </p:cSld>
+  <p:clrMapOvr>
+    <a:masterClrMapping/>
+  </p:clrMapOvr>
+</p:sld>
+</file>
+
+<file path=ppt/slides/slide50.xml><?xml version="1.0" encoding="utf-8"?>
+<p:sld xmlns:a="http://schemas.openxmlformats.org/drawingml/2006/main" xmlns:p="http://schemas.openxmlformats.org/presentationml/2006/main" xmlns:r="http://schemas.openxmlformats.org/officeDocument/2006/relationships">
+  <p:cSld>
+    <p:bg>
+      <p:bgPr>
+        <a:solidFill>
+          <a:srgbClr val="F3F1EE"/>
+        </a:solidFill>
+        <a:effectLst/>
+      </p:bgPr>
+    </p:bg>
+    <p:spTree>
+      <p:nvGrpSpPr>
+        <p:cNvPr id="1" name=""/>
+        <p:cNvGrpSpPr/>
+        <p:nvPr/>
+      </p:nvGrpSpPr>
+      <p:grpSpPr/>
+      <p:sp>
+        <p:nvSpPr>
+          <p:cNvPr id="2" name="TextBox 1"/>
+          <p:cNvSpPr txBox="1"/>
+          <p:nvPr/>
+        </p:nvSpPr>
+        <p:spPr>
+          <a:xfrm>
+            <a:off x="640080" y="274320"/>
+            <a:ext cx="1097280" cy="457200"/>
+          </a:xfrm>
+          <a:prstGeom prst="rect">
+            <a:avLst/>
+          </a:prstGeom>
+          <a:noFill/>
+        </p:spPr>
+        <p:txBody>
+          <a:bodyPr wrap="square" lIns="18288" rIns="18288" tIns="0" bIns="0">
+            <a:spAutoFit/>
+          </a:bodyPr>
+          <a:lstStyle/>
+          <a:p>
+            <a:pPr>
+              <a:spcAft>
+                <a:spcPts val="600"/>
+              </a:spcAft>
+              <a:defRPr sz="2500" b="1">
+                <a:solidFill>
+                  <a:srgbClr val="7D2B42"/>
+                </a:solidFill>
+                <a:latin typeface="Montserrat"/>
+              </a:defRPr>
+            </a:pPr>
+            <a:r>
+              <a:t>PMP</a:t>
+            </a:r>
+          </a:p>
+        </p:txBody>
+      </p:sp>
+      <p:sp>
+        <p:nvSpPr>
+          <p:cNvPr id="3" name="TextBox 2"/>
+          <p:cNvSpPr txBox="1"/>
+          <p:nvPr/>
+        </p:nvSpPr>
+        <p:spPr>
+          <a:xfrm>
+            <a:off x="1828800" y="365760"/>
+            <a:ext cx="10972800" cy="320040"/>
+          </a:xfrm>
+          <a:prstGeom prst="rect">
+            <a:avLst/>
+          </a:prstGeom>
+          <a:noFill/>
+        </p:spPr>
+        <p:txBody>
+          <a:bodyPr wrap="square" lIns="18288" rIns="18288" tIns="0" bIns="0">
+            <a:spAutoFit/>
+          </a:bodyPr>
+          <a:lstStyle/>
+          <a:p>
+            <a:pPr>
+              <a:spcAft>
+                <a:spcPts val="600"/>
+              </a:spcAft>
+              <a:defRPr sz="1000" b="1">
+                <a:solidFill>
+                  <a:srgbClr val="7D2B42"/>
+                </a:solidFill>
+                <a:latin typeface="Montserrat"/>
+              </a:defRPr>
+            </a:pPr>
+            <a:r>
+              <a:t>INCOMING MARKETING MANAGER / DETAILED ONBOARDING</a:t>
+            </a:r>
+          </a:p>
+        </p:txBody>
+      </p:sp>
+      <p:sp>
+        <p:nvSpPr>
+          <p:cNvPr id="4" name="Rectangle 3"/>
+          <p:cNvSpPr/>
+          <p:nvPr/>
+        </p:nvSpPr>
+        <p:spPr>
+          <a:xfrm>
+            <a:off x="685800" y="896112"/>
+            <a:ext cx="13258800" cy="13716"/>
+          </a:xfrm>
+          <a:prstGeom prst="rect">
+            <a:avLst/>
+          </a:prstGeom>
+          <a:solidFill>
+            <a:srgbClr val="7D2B42"/>
+          </a:solidFill>
+          <a:ln>
+            <a:noFill/>
+          </a:ln>
+        </p:spPr>
+        <p:style>
+          <a:lnRef idx="1">
+            <a:schemeClr val="accent1"/>
+          </a:lnRef>
+          <a:fillRef idx="3">
+            <a:schemeClr val="accent1"/>
+          </a:fillRef>
+          <a:effectRef idx="2">
+            <a:schemeClr val="accent1"/>
+          </a:effectRef>
+          <a:fontRef idx="minor">
+            <a:schemeClr val="lt1"/>
+          </a:fontRef>
+        </p:style>
+        <p:txBody>
+          <a:bodyPr rtlCol="0" anchor="ctr"/>
+          <a:lstStyle/>
+          <a:p>
+            <a:pPr algn="ctr"/>
+          </a:p>
+        </p:txBody>
+      </p:sp>
+      <p:sp>
+        <p:nvSpPr>
+          <p:cNvPr id="5" name="TextBox 4"/>
+          <p:cNvSpPr txBox="1"/>
+          <p:nvPr/>
+        </p:nvSpPr>
+        <p:spPr>
+          <a:xfrm>
+            <a:off x="731520" y="1188720"/>
+            <a:ext cx="13167360" cy="914400"/>
+          </a:xfrm>
+          <a:prstGeom prst="rect">
+            <a:avLst/>
+          </a:prstGeom>
+          <a:noFill/>
+        </p:spPr>
+        <p:txBody>
+          <a:bodyPr wrap="square" lIns="18288" rIns="18288" tIns="0" bIns="0">
+            <a:spAutoFit/>
+          </a:bodyPr>
+          <a:lstStyle/>
+          <a:p>
+            <a:pPr>
+              <a:spcAft>
+                <a:spcPts val="600"/>
+              </a:spcAft>
+              <a:defRPr sz="3500" b="1">
+                <a:solidFill>
+                  <a:srgbClr val="7D2B42"/>
+                </a:solidFill>
+                <a:latin typeface="Bebas Neue"/>
+              </a:defRPr>
+            </a:pPr>
+            <a:r>
+              <a:t>MONTHLY APPRAISALS / PEOPLE DEVELOPMENT, NOT CLIENT REPORTING</a:t>
+            </a:r>
+          </a:p>
+        </p:txBody>
+      </p:sp>
+      <p:sp>
+        <p:nvSpPr>
+          <p:cNvPr id="6" name="TextBox 5"/>
+          <p:cNvSpPr txBox="1"/>
+          <p:nvPr/>
+        </p:nvSpPr>
+        <p:spPr>
+          <a:xfrm>
+            <a:off x="731520" y="7772400"/>
+            <a:ext cx="11887200" cy="274320"/>
+          </a:xfrm>
+          <a:prstGeom prst="rect">
+            <a:avLst/>
+          </a:prstGeom>
+          <a:noFill/>
+        </p:spPr>
+        <p:txBody>
+          <a:bodyPr wrap="square" lIns="18288" rIns="18288" tIns="0" bIns="0">
+            <a:spAutoFit/>
+          </a:bodyPr>
+          <a:lstStyle/>
+          <a:p>
+            <a:pPr>
+              <a:spcAft>
+                <a:spcPts val="600"/>
+              </a:spcAft>
+              <a:defRPr sz="900" b="0">
+                <a:solidFill>
+                  <a:srgbClr val="555555"/>
+                </a:solidFill>
+                <a:latin typeface="Montserrat"/>
+              </a:defRPr>
+            </a:pPr>
+            <a:r>
+              <a:t>V1.0 • USE THE RUNBOOK FOR FULL STEPS • LIVE READINESS NOT ASSESSED</a:t>
+            </a:r>
+          </a:p>
+        </p:txBody>
+      </p:sp>
+      <p:sp>
+        <p:nvSpPr>
+          <p:cNvPr id="7" name="TextBox 6"/>
+          <p:cNvSpPr txBox="1"/>
+          <p:nvPr/>
+        </p:nvSpPr>
+        <p:spPr>
+          <a:xfrm>
+            <a:off x="13350240" y="7772400"/>
+            <a:ext cx="548640" cy="274320"/>
+          </a:xfrm>
+          <a:prstGeom prst="rect">
+            <a:avLst/>
+          </a:prstGeom>
+          <a:noFill/>
+        </p:spPr>
+        <p:txBody>
+          <a:bodyPr wrap="square" lIns="18288" rIns="18288" tIns="0" bIns="0">
+            <a:spAutoFit/>
+          </a:bodyPr>
+          <a:lstStyle/>
+          <a:p>
+            <a:pPr>
+              <a:spcAft>
+                <a:spcPts val="600"/>
+              </a:spcAft>
+              <a:defRPr sz="900" b="0">
+                <a:solidFill>
+                  <a:srgbClr val="555555"/>
+                </a:solidFill>
+                <a:latin typeface="Montserrat"/>
+              </a:defRPr>
+            </a:pPr>
+            <a:r>
+              <a:t>50</a:t>
+            </a:r>
+          </a:p>
+        </p:txBody>
+      </p:sp>
+      <p:sp>
+        <p:nvSpPr>
+          <p:cNvPr id="8" name="Rectangle 7"/>
+          <p:cNvSpPr/>
+          <p:nvPr/>
+        </p:nvSpPr>
+        <p:spPr>
+          <a:xfrm>
+            <a:off x="777240" y="2377440"/>
+            <a:ext cx="3063240" cy="896112"/>
+          </a:xfrm>
+          <a:prstGeom prst="rect">
+            <a:avLst/>
+          </a:prstGeom>
+          <a:solidFill>
+            <a:srgbClr val="7D2B42"/>
+          </a:solidFill>
+          <a:ln>
+            <a:noFill/>
+          </a:ln>
+        </p:spPr>
+        <p:style>
+          <a:lnRef idx="1">
+            <a:schemeClr val="accent1"/>
+          </a:lnRef>
+          <a:fillRef idx="3">
+            <a:schemeClr val="accent1"/>
+          </a:fillRef>
+          <a:effectRef idx="2">
+            <a:schemeClr val="accent1"/>
+          </a:effectRef>
+          <a:fontRef idx="minor">
+            <a:schemeClr val="lt1"/>
+          </a:fontRef>
+        </p:style>
+        <p:txBody>
+          <a:bodyPr rtlCol="0" anchor="ctr"/>
+          <a:lstStyle/>
+          <a:p>
+            <a:pPr algn="ctr"/>
+          </a:p>
+        </p:txBody>
+      </p:sp>
+      <p:sp>
+        <p:nvSpPr>
+          <p:cNvPr id="9" name="TextBox 8"/>
+          <p:cNvSpPr txBox="1"/>
+          <p:nvPr/>
+        </p:nvSpPr>
+        <p:spPr>
+          <a:xfrm>
+            <a:off x="914400" y="2487168"/>
+            <a:ext cx="2788920" cy="822960"/>
+          </a:xfrm>
+          <a:prstGeom prst="rect">
+            <a:avLst/>
+          </a:prstGeom>
+          <a:noFill/>
+        </p:spPr>
+        <p:txBody>
+          <a:bodyPr wrap="square" lIns="18288" rIns="18288" tIns="0" bIns="0">
+            <a:spAutoFit/>
+          </a:bodyPr>
+          <a:lstStyle/>
+          <a:p>
+            <a:pPr>
+              <a:spcAft>
+                <a:spcPts val="600"/>
+              </a:spcAft>
+              <a:defRPr sz="1300" b="1">
+                <a:solidFill>
+                  <a:srgbClr val="FFFFFF"/>
+                </a:solidFill>
+                <a:latin typeface="Montserrat"/>
+              </a:defRPr>
+            </a:pPr>
+            <a:r>
+              <a:t>MONTHLY</a:t>
+            </a:r>
+          </a:p>
+        </p:txBody>
+      </p:sp>
+      <p:sp>
+        <p:nvSpPr>
+          <p:cNvPr id="10" name="TextBox 9"/>
+          <p:cNvSpPr txBox="1"/>
+          <p:nvPr/>
+        </p:nvSpPr>
+        <p:spPr>
+          <a:xfrm>
+            <a:off x="4114800" y="2450592"/>
+            <a:ext cx="9646920" cy="841248"/>
+          </a:xfrm>
+          <a:prstGeom prst="rect">
+            <a:avLst/>
+          </a:prstGeom>
+          <a:noFill/>
+        </p:spPr>
+        <p:txBody>
+          <a:bodyPr wrap="square" lIns="18288" rIns="18288" tIns="0" bIns="0">
+            <a:spAutoFit/>
+          </a:bodyPr>
+          <a:lstStyle/>
+          <a:p>
+            <a:pPr>
+              <a:spcAft>
+                <a:spcPts val="600"/>
+              </a:spcAft>
+              <a:defRPr sz="1600" b="0">
+                <a:solidFill>
+                  <a:srgbClr val="202020"/>
+                </a:solidFill>
+                <a:latin typeface="Montserrat"/>
+              </a:defRPr>
+            </a:pPr>
+            <a:r>
+              <a:t>Select approved role template and actual month; reviewer assignments confirmed.</a:t>
+            </a:r>
+          </a:p>
+        </p:txBody>
+      </p:sp>
+      <p:sp>
+        <p:nvSpPr>
+          <p:cNvPr id="11" name="Rectangle 10"/>
+          <p:cNvSpPr/>
+          <p:nvPr/>
+        </p:nvSpPr>
+        <p:spPr>
+          <a:xfrm>
+            <a:off x="777240" y="3383280"/>
+            <a:ext cx="3063240" cy="896112"/>
+          </a:xfrm>
+          <a:prstGeom prst="rect">
+            <a:avLst/>
+          </a:prstGeom>
+          <a:solidFill>
+            <a:srgbClr val="7D2B42"/>
+          </a:solidFill>
+          <a:ln>
+            <a:noFill/>
+          </a:ln>
+        </p:spPr>
+        <p:style>
+          <a:lnRef idx="1">
+            <a:schemeClr val="accent1"/>
+          </a:lnRef>
+          <a:fillRef idx="3">
+            <a:schemeClr val="accent1"/>
+          </a:fillRef>
+          <a:effectRef idx="2">
+            <a:schemeClr val="accent1"/>
+          </a:effectRef>
+          <a:fontRef idx="minor">
+            <a:schemeClr val="lt1"/>
+          </a:fontRef>
+        </p:style>
+        <p:txBody>
+          <a:bodyPr rtlCol="0" anchor="ctr"/>
+          <a:lstStyle/>
+          <a:p>
+            <a:pPr algn="ctr"/>
+          </a:p>
+        </p:txBody>
+      </p:sp>
+      <p:sp>
+        <p:nvSpPr>
+          <p:cNvPr id="12" name="TextBox 11"/>
+          <p:cNvSpPr txBox="1"/>
+          <p:nvPr/>
+        </p:nvSpPr>
+        <p:spPr>
+          <a:xfrm>
+            <a:off x="914400" y="3493008"/>
+            <a:ext cx="2788920" cy="822960"/>
+          </a:xfrm>
+          <a:prstGeom prst="rect">
+            <a:avLst/>
+          </a:prstGeom>
+          <a:noFill/>
+        </p:spPr>
+        <p:txBody>
+          <a:bodyPr wrap="square" lIns="18288" rIns="18288" tIns="0" bIns="0">
+            <a:spAutoFit/>
+          </a:bodyPr>
+          <a:lstStyle/>
+          <a:p>
+            <a:pPr>
+              <a:spcAft>
+                <a:spcPts val="600"/>
+              </a:spcAft>
+              <a:defRPr sz="1300" b="1">
+                <a:solidFill>
+                  <a:srgbClr val="FFFFFF"/>
+                </a:solidFill>
+                <a:latin typeface="Montserrat"/>
+              </a:defRPr>
+            </a:pPr>
+            <a:r>
+              <a:t>RATE / EXPLAIN</a:t>
+            </a:r>
+          </a:p>
+        </p:txBody>
+      </p:sp>
+      <p:sp>
+        <p:nvSpPr>
+          <p:cNvPr id="13" name="TextBox 12"/>
+          <p:cNvSpPr txBox="1"/>
+          <p:nvPr/>
+        </p:nvSpPr>
+        <p:spPr>
+          <a:xfrm>
+            <a:off x="4114800" y="3456432"/>
+            <a:ext cx="9646920" cy="841248"/>
+          </a:xfrm>
+          <a:prstGeom prst="rect">
+            <a:avLst/>
+          </a:prstGeom>
+          <a:noFill/>
+        </p:spPr>
+        <p:txBody>
+          <a:bodyPr wrap="square" lIns="18288" rIns="18288" tIns="0" bIns="0">
+            <a:spAutoFit/>
+          </a:bodyPr>
+          <a:lstStyle/>
+          <a:p>
+            <a:pPr>
+              <a:spcAft>
+                <a:spcPts val="600"/>
+              </a:spcAft>
+              <a:defRPr sz="1600" b="0">
+                <a:solidFill>
+                  <a:srgbClr val="202020"/>
+                </a:solidFill>
+                <a:latin typeface="Montserrat"/>
+              </a:defRPr>
+            </a:pPr>
+            <a:r>
+              <a:t>Self-rating before meeting; manager rating, gap and evidence; justify 1/2/5.</a:t>
+            </a:r>
+          </a:p>
+        </p:txBody>
+      </p:sp>
+      <p:sp>
+        <p:nvSpPr>
+          <p:cNvPr id="14" name="Rectangle 13"/>
+          <p:cNvSpPr/>
+          <p:nvPr/>
+        </p:nvSpPr>
+        <p:spPr>
+          <a:xfrm>
+            <a:off x="777240" y="4389120"/>
+            <a:ext cx="3063240" cy="896112"/>
+          </a:xfrm>
+          <a:prstGeom prst="rect">
+            <a:avLst/>
+          </a:prstGeom>
+          <a:solidFill>
+            <a:srgbClr val="7D2B42"/>
+          </a:solidFill>
+          <a:ln>
+            <a:noFill/>
+          </a:ln>
+        </p:spPr>
+        <p:style>
+          <a:lnRef idx="1">
+            <a:schemeClr val="accent1"/>
+          </a:lnRef>
+          <a:fillRef idx="3">
+            <a:schemeClr val="accent1"/>
+          </a:fillRef>
+          <a:effectRef idx="2">
+            <a:schemeClr val="accent1"/>
+          </a:effectRef>
+          <a:fontRef idx="minor">
+            <a:schemeClr val="lt1"/>
+          </a:fontRef>
+        </p:style>
+        <p:txBody>
+          <a:bodyPr rtlCol="0" anchor="ctr"/>
+          <a:lstStyle/>
+          <a:p>
+            <a:pPr algn="ctr"/>
+          </a:p>
+        </p:txBody>
+      </p:sp>
+      <p:sp>
+        <p:nvSpPr>
+          <p:cNvPr id="15" name="TextBox 14"/>
+          <p:cNvSpPr txBox="1"/>
+          <p:nvPr/>
+        </p:nvSpPr>
+        <p:spPr>
+          <a:xfrm>
+            <a:off x="914400" y="4498848"/>
+            <a:ext cx="2788920" cy="822960"/>
+          </a:xfrm>
+          <a:prstGeom prst="rect">
+            <a:avLst/>
+          </a:prstGeom>
+          <a:noFill/>
+        </p:spPr>
+        <p:txBody>
+          <a:bodyPr wrap="square" lIns="18288" rIns="18288" tIns="0" bIns="0">
+            <a:spAutoFit/>
+          </a:bodyPr>
+          <a:lstStyle/>
+          <a:p>
+            <a:pPr>
+              <a:spcAft>
+                <a:spcPts val="600"/>
+              </a:spcAft>
+              <a:defRPr sz="1300" b="1">
+                <a:solidFill>
+                  <a:srgbClr val="FFFFFF"/>
+                </a:solidFill>
+                <a:latin typeface="Montserrat"/>
+              </a:defRPr>
+            </a:pPr>
+            <a:r>
+              <a:t>WEIGHTS</a:t>
+            </a:r>
+          </a:p>
+        </p:txBody>
+      </p:sp>
+      <p:sp>
+        <p:nvSpPr>
+          <p:cNvPr id="16" name="TextBox 15"/>
+          <p:cNvSpPr txBox="1"/>
+          <p:nvPr/>
+        </p:nvSpPr>
+        <p:spPr>
+          <a:xfrm>
+            <a:off x="4114800" y="4462272"/>
+            <a:ext cx="9646920" cy="841248"/>
+          </a:xfrm>
+          <a:prstGeom prst="rect">
+            <a:avLst/>
+          </a:prstGeom>
+          <a:noFill/>
+        </p:spPr>
+        <p:txBody>
+          <a:bodyPr wrap="square" lIns="18288" rIns="18288" tIns="0" bIns="0">
+            <a:spAutoFit/>
+          </a:bodyPr>
+          <a:lstStyle/>
+          <a:p>
+            <a:pPr>
+              <a:spcAft>
+                <a:spcPts val="600"/>
+              </a:spcAft>
+              <a:defRPr sz="1600" b="0">
+                <a:solidFill>
+                  <a:srgbClr val="202020"/>
+                </a:solidFill>
+                <a:latin typeface="Montserrat"/>
+              </a:defRPr>
+            </a:pPr>
+            <a:r>
+              <a:t>30% core, 50% role KPIs, 10% development, 10% culture; use supplied 1–5 anchors.</a:t>
+            </a:r>
+          </a:p>
+        </p:txBody>
+      </p:sp>
+      <p:sp>
+        <p:nvSpPr>
+          <p:cNvPr id="17" name="Rectangle 16"/>
+          <p:cNvSpPr/>
+          <p:nvPr/>
+        </p:nvSpPr>
+        <p:spPr>
+          <a:xfrm>
+            <a:off x="777240" y="5394960"/>
+            <a:ext cx="3063240" cy="896112"/>
+          </a:xfrm>
+          <a:prstGeom prst="rect">
+            <a:avLst/>
+          </a:prstGeom>
+          <a:solidFill>
+            <a:srgbClr val="7D2B42"/>
+          </a:solidFill>
+          <a:ln>
+            <a:noFill/>
+          </a:ln>
+        </p:spPr>
+        <p:style>
+          <a:lnRef idx="1">
+            <a:schemeClr val="accent1"/>
+          </a:lnRef>
+          <a:fillRef idx="3">
+            <a:schemeClr val="accent1"/>
+          </a:fillRef>
+          <a:effectRef idx="2">
+            <a:schemeClr val="accent1"/>
+          </a:effectRef>
+          <a:fontRef idx="minor">
+            <a:schemeClr val="lt1"/>
+          </a:fontRef>
+        </p:style>
+        <p:txBody>
+          <a:bodyPr rtlCol="0" anchor="ctr"/>
+          <a:lstStyle/>
+          <a:p>
+            <a:pPr algn="ctr"/>
+          </a:p>
+        </p:txBody>
+      </p:sp>
+      <p:sp>
+        <p:nvSpPr>
+          <p:cNvPr id="18" name="TextBox 17"/>
+          <p:cNvSpPr txBox="1"/>
+          <p:nvPr/>
+        </p:nvSpPr>
+        <p:spPr>
+          <a:xfrm>
+            <a:off x="914400" y="5504688"/>
+            <a:ext cx="2788920" cy="822960"/>
+          </a:xfrm>
+          <a:prstGeom prst="rect">
+            <a:avLst/>
+          </a:prstGeom>
+          <a:noFill/>
+        </p:spPr>
+        <p:txBody>
+          <a:bodyPr wrap="square" lIns="18288" rIns="18288" tIns="0" bIns="0">
+            <a:spAutoFit/>
+          </a:bodyPr>
+          <a:lstStyle/>
+          <a:p>
+            <a:pPr>
+              <a:spcAft>
+                <a:spcPts val="600"/>
+              </a:spcAft>
+              <a:defRPr sz="1300" b="1">
+                <a:solidFill>
+                  <a:srgbClr val="FFFFFF"/>
+                </a:solidFill>
+                <a:latin typeface="Montserrat"/>
+              </a:defRPr>
+            </a:pPr>
+            <a:r>
+              <a:t>COMPLETE FIRST</a:t>
+            </a:r>
+          </a:p>
+        </p:txBody>
+      </p:sp>
+      <p:sp>
+        <p:nvSpPr>
+          <p:cNvPr id="19" name="TextBox 18"/>
+          <p:cNvSpPr txBox="1"/>
+          <p:nvPr/>
+        </p:nvSpPr>
+        <p:spPr>
+          <a:xfrm>
+            <a:off x="4114800" y="5468112"/>
+            <a:ext cx="9646920" cy="841248"/>
+          </a:xfrm>
+          <a:prstGeom prst="rect">
+            <a:avLst/>
+          </a:prstGeom>
+          <a:noFill/>
+        </p:spPr>
+        <p:txBody>
+          <a:bodyPr wrap="square" lIns="18288" rIns="18288" tIns="0" bIns="0">
+            <a:spAutoFit/>
+          </a:bodyPr>
+          <a:lstStyle/>
+          <a:p>
+            <a:pPr>
+              <a:spcAft>
+                <a:spcPts val="600"/>
+              </a:spcAft>
+              <a:defRPr sz="1600" b="0">
+                <a:solidFill>
+                  <a:srgbClr val="202020"/>
+                </a:solidFill>
+                <a:latin typeface="Montserrat"/>
+              </a:defRPr>
+            </a:pPr>
+            <a:r>
+              <a:t>Blank-as-zero totals are not completed assessments; verify before interpreting grades.</a:t>
+            </a:r>
+          </a:p>
+        </p:txBody>
+      </p:sp>
+      <p:sp>
+        <p:nvSpPr>
+          <p:cNvPr id="20" name="Rectangle 19"/>
+          <p:cNvSpPr/>
+          <p:nvPr/>
+        </p:nvSpPr>
+        <p:spPr>
+          <a:xfrm>
+            <a:off x="777240" y="6400800"/>
+            <a:ext cx="3063240" cy="896112"/>
+          </a:xfrm>
+          <a:prstGeom prst="rect">
+            <a:avLst/>
+          </a:prstGeom>
+          <a:solidFill>
+            <a:srgbClr val="7D2B42"/>
+          </a:solidFill>
+          <a:ln>
+            <a:noFill/>
+          </a:ln>
+        </p:spPr>
+        <p:style>
+          <a:lnRef idx="1">
+            <a:schemeClr val="accent1"/>
+          </a:lnRef>
+          <a:fillRef idx="3">
+            <a:schemeClr val="accent1"/>
+          </a:fillRef>
+          <a:effectRef idx="2">
+            <a:schemeClr val="accent1"/>
+          </a:effectRef>
+          <a:fontRef idx="minor">
+            <a:schemeClr val="lt1"/>
+          </a:fontRef>
+        </p:style>
+        <p:txBody>
+          <a:bodyPr rtlCol="0" anchor="ctr"/>
+          <a:lstStyle/>
+          <a:p>
+            <a:pPr algn="ctr"/>
+          </a:p>
+        </p:txBody>
+      </p:sp>
+      <p:sp>
+        <p:nvSpPr>
+          <p:cNvPr id="21" name="TextBox 20"/>
+          <p:cNvSpPr txBox="1"/>
+          <p:nvPr/>
+        </p:nvSpPr>
+        <p:spPr>
+          <a:xfrm>
+            <a:off x="914400" y="6510528"/>
+            <a:ext cx="2788920" cy="822960"/>
+          </a:xfrm>
+          <a:prstGeom prst="rect">
+            <a:avLst/>
+          </a:prstGeom>
+          <a:noFill/>
+        </p:spPr>
+        <p:txBody>
+          <a:bodyPr wrap="square" lIns="18288" rIns="18288" tIns="0" bIns="0">
+            <a:spAutoFit/>
+          </a:bodyPr>
+          <a:lstStyle/>
+          <a:p>
+            <a:pPr>
+              <a:spcAft>
+                <a:spcPts val="600"/>
+              </a:spcAft>
+              <a:defRPr sz="1300" b="1">
+                <a:solidFill>
+                  <a:srgbClr val="FFFFFF"/>
+                </a:solidFill>
+                <a:latin typeface="Montserrat"/>
+              </a:defRPr>
+            </a:pPr>
+            <a:r>
+              <a:t>NEXT PERIOD</a:t>
+            </a:r>
+          </a:p>
+        </p:txBody>
+      </p:sp>
+      <p:sp>
+        <p:nvSpPr>
+          <p:cNvPr id="22" name="TextBox 21"/>
+          <p:cNvSpPr txBox="1"/>
+          <p:nvPr/>
+        </p:nvSpPr>
+        <p:spPr>
+          <a:xfrm>
+            <a:off x="4114800" y="6473952"/>
+            <a:ext cx="9646920" cy="841248"/>
+          </a:xfrm>
+          <a:prstGeom prst="rect">
+            <a:avLst/>
+          </a:prstGeom>
+          <a:noFill/>
+        </p:spPr>
+        <p:txBody>
+          <a:bodyPr wrap="square" lIns="18288" rIns="18288" tIns="0" bIns="0">
+            <a:spAutoFit/>
+          </a:bodyPr>
+          <a:lstStyle/>
+          <a:p>
+            <a:pPr>
+              <a:spcAft>
+                <a:spcPts val="600"/>
+              </a:spcAft>
+              <a:defRPr sz="1600" b="0">
+                <a:solidFill>
+                  <a:srgbClr val="202020"/>
+                </a:solidFill>
+                <a:latin typeface="Montserrat"/>
+              </a:defRPr>
+            </a:pPr>
+            <a:r>
+              <a:t>Private feedback, SMART goals and training; follow quarterly OKRs within monthly reviews.</a:t>
+            </a:r>
+          </a:p>
+        </p:txBody>
+      </p:sp>
+    </p:spTree>
+  </p:cSld>
+  <p:clrMapOvr>
+    <a:masterClrMapping/>
+  </p:clrMapOvr>
+</p:sld>
+</file>
+
+<file path=ppt/slides/slide51.xml><?xml version="1.0" encoding="utf-8"?>
+<p:sld xmlns:a="http://schemas.openxmlformats.org/drawingml/2006/main" xmlns:p="http://schemas.openxmlformats.org/presentationml/2006/main" xmlns:r="http://schemas.openxmlformats.org/officeDocument/2006/relationships">
+  <p:cSld>
+    <p:bg>
+      <p:bgPr>
+        <a:solidFill>
+          <a:srgbClr val="7D2B42"/>
+        </a:solidFill>
+        <a:effectLst/>
+      </p:bgPr>
+    </p:bg>
+    <p:spTree>
+      <p:nvGrpSpPr>
+        <p:cNvPr id="1" name=""/>
+        <p:cNvGrpSpPr/>
+        <p:nvPr/>
+      </p:nvGrpSpPr>
+      <p:grpSpPr/>
+      <p:sp>
+        <p:nvSpPr>
+          <p:cNvPr id="2" name="TextBox 1"/>
+          <p:cNvSpPr txBox="1"/>
+          <p:nvPr/>
+        </p:nvSpPr>
+        <p:spPr>
+          <a:xfrm>
+            <a:off x="640080" y="274320"/>
+            <a:ext cx="1097280" cy="457200"/>
+          </a:xfrm>
+          <a:prstGeom prst="rect">
+            <a:avLst/>
+          </a:prstGeom>
+          <a:noFill/>
+        </p:spPr>
+        <p:txBody>
+          <a:bodyPr wrap="square" lIns="18288" rIns="18288" tIns="0" bIns="0">
+            <a:spAutoFit/>
+          </a:bodyPr>
+          <a:lstStyle/>
+          <a:p>
+            <a:pPr>
+              <a:spcAft>
+                <a:spcPts val="600"/>
+              </a:spcAft>
+              <a:defRPr sz="2500" b="1">
+                <a:solidFill>
+                  <a:srgbClr val="FFFFFF"/>
+                </a:solidFill>
+                <a:latin typeface="Montserrat"/>
+              </a:defRPr>
+            </a:pPr>
+            <a:r>
+              <a:t>PMP</a:t>
+            </a:r>
+          </a:p>
+        </p:txBody>
+      </p:sp>
+      <p:sp>
+        <p:nvSpPr>
+          <p:cNvPr id="3" name="TextBox 2"/>
+          <p:cNvSpPr txBox="1"/>
+          <p:nvPr/>
+        </p:nvSpPr>
+        <p:spPr>
+          <a:xfrm>
+            <a:off x="1828800" y="365760"/>
+            <a:ext cx="10972800" cy="320040"/>
+          </a:xfrm>
+          <a:prstGeom prst="rect">
+            <a:avLst/>
+          </a:prstGeom>
+          <a:noFill/>
+        </p:spPr>
+        <p:txBody>
+          <a:bodyPr wrap="square" lIns="18288" rIns="18288" tIns="0" bIns="0">
+            <a:spAutoFit/>
+          </a:bodyPr>
+          <a:lstStyle/>
+          <a:p>
+            <a:pPr>
+              <a:spcAft>
+                <a:spcPts val="600"/>
+              </a:spcAft>
+              <a:defRPr sz="1000" b="1">
+                <a:solidFill>
+                  <a:srgbClr val="FFFFFF"/>
+                </a:solidFill>
+                <a:latin typeface="Montserrat"/>
+              </a:defRPr>
+            </a:pPr>
+            <a:r>
+              <a:t>INCOMING MARKETING MANAGER / DETAILED ONBOARDING</a:t>
+            </a:r>
+          </a:p>
+        </p:txBody>
+      </p:sp>
+      <p:sp>
+        <p:nvSpPr>
+          <p:cNvPr id="4" name="Rectangle 3"/>
+          <p:cNvSpPr/>
+          <p:nvPr/>
+        </p:nvSpPr>
+        <p:spPr>
+          <a:xfrm>
+            <a:off x="685800" y="896112"/>
+            <a:ext cx="13258800" cy="13716"/>
+          </a:xfrm>
+          <a:prstGeom prst="rect">
+            <a:avLst/>
+          </a:prstGeom>
+          <a:solidFill>
+            <a:srgbClr val="FFFFFF"/>
+          </a:solidFill>
+          <a:ln>
+            <a:noFill/>
+          </a:ln>
+        </p:spPr>
+        <p:style>
+          <a:lnRef idx="1">
+            <a:schemeClr val="accent1"/>
+          </a:lnRef>
+          <a:fillRef idx="3">
+            <a:schemeClr val="accent1"/>
+          </a:fillRef>
+          <a:effectRef idx="2">
+            <a:schemeClr val="accent1"/>
+          </a:effectRef>
+          <a:fontRef idx="minor">
+            <a:schemeClr val="lt1"/>
+          </a:fontRef>
+        </p:style>
+        <p:txBody>
+          <a:bodyPr rtlCol="0" anchor="ctr"/>
+          <a:lstStyle/>
+          <a:p>
+            <a:pPr algn="ctr"/>
+          </a:p>
+        </p:txBody>
+      </p:sp>
+      <p:sp>
+        <p:nvSpPr>
+          <p:cNvPr id="5" name="TextBox 4"/>
+          <p:cNvSpPr txBox="1"/>
+          <p:nvPr/>
+        </p:nvSpPr>
+        <p:spPr>
+          <a:xfrm>
+            <a:off x="731520" y="1188720"/>
+            <a:ext cx="13167360" cy="914400"/>
+          </a:xfrm>
+          <a:prstGeom prst="rect">
+            <a:avLst/>
+          </a:prstGeom>
+          <a:noFill/>
+        </p:spPr>
+        <p:txBody>
+          <a:bodyPr wrap="square" lIns="18288" rIns="18288" tIns="0" bIns="0">
+            <a:spAutoFit/>
+          </a:bodyPr>
+          <a:lstStyle/>
+          <a:p>
+            <a:pPr>
+              <a:spcAft>
+                <a:spcPts val="600"/>
+              </a:spcAft>
+              <a:defRPr sz="3500" b="1">
+                <a:solidFill>
+                  <a:srgbClr val="FFFFFF"/>
+                </a:solidFill>
+                <a:latin typeface="Bebas Neue"/>
+              </a:defRPr>
+            </a:pPr>
+            <a:r>
+              <a:t>RUN THE SYSTEM THROUGH EVIDENCE, OWNERS AND DECISIONS</a:t>
+            </a:r>
+          </a:p>
+        </p:txBody>
+      </p:sp>
+      <p:sp>
+        <p:nvSpPr>
+          <p:cNvPr id="6" name="TextBox 5"/>
+          <p:cNvSpPr txBox="1"/>
+          <p:nvPr/>
+        </p:nvSpPr>
+        <p:spPr>
+          <a:xfrm>
+            <a:off x="731520" y="7772400"/>
+            <a:ext cx="11887200" cy="274320"/>
+          </a:xfrm>
+          <a:prstGeom prst="rect">
+            <a:avLst/>
+          </a:prstGeom>
+          <a:noFill/>
+        </p:spPr>
+        <p:txBody>
+          <a:bodyPr wrap="square" lIns="18288" rIns="18288" tIns="0" bIns="0">
+            <a:spAutoFit/>
+          </a:bodyPr>
+          <a:lstStyle/>
+          <a:p>
+            <a:pPr>
+              <a:spcAft>
+                <a:spcPts val="600"/>
+              </a:spcAft>
+              <a:defRPr sz="900" b="0">
+                <a:solidFill>
+                  <a:srgbClr val="FFFFFF"/>
+                </a:solidFill>
+                <a:latin typeface="Montserrat"/>
+              </a:defRPr>
+            </a:pPr>
+            <a:r>
+              <a:t>V1.0 • USE THE RUNBOOK FOR FULL STEPS • LIVE READINESS NOT ASSESSED</a:t>
+            </a:r>
+          </a:p>
+        </p:txBody>
+      </p:sp>
+      <p:sp>
+        <p:nvSpPr>
+          <p:cNvPr id="7" name="TextBox 6"/>
+          <p:cNvSpPr txBox="1"/>
+          <p:nvPr/>
+        </p:nvSpPr>
+        <p:spPr>
+          <a:xfrm>
+            <a:off x="13350240" y="7772400"/>
+            <a:ext cx="548640" cy="274320"/>
+          </a:xfrm>
+          <a:prstGeom prst="rect">
+            <a:avLst/>
+          </a:prstGeom>
+          <a:noFill/>
+        </p:spPr>
+        <p:txBody>
+          <a:bodyPr wrap="square" lIns="18288" rIns="18288" tIns="0" bIns="0">
+            <a:spAutoFit/>
+          </a:bodyPr>
+          <a:lstStyle/>
+          <a:p>
+            <a:pPr>
+              <a:spcAft>
+                <a:spcPts val="600"/>
+              </a:spcAft>
+              <a:defRPr sz="900" b="0">
+                <a:solidFill>
+                  <a:srgbClr val="FFFFFF"/>
+                </a:solidFill>
+                <a:latin typeface="Montserrat"/>
+              </a:defRPr>
+            </a:pPr>
+            <a:r>
+              <a:t>51</a:t>
+            </a:r>
+          </a:p>
+        </p:txBody>
+      </p:sp>
+      <p:sp>
+        <p:nvSpPr>
+          <p:cNvPr id="8" name="TextBox 7"/>
+          <p:cNvSpPr txBox="1"/>
+          <p:nvPr/>
+        </p:nvSpPr>
+        <p:spPr>
+          <a:xfrm>
+            <a:off x="868680" y="2651760"/>
+            <a:ext cx="12801600" cy="2926080"/>
+          </a:xfrm>
+          <a:prstGeom prst="rect">
+            <a:avLst/>
+          </a:prstGeom>
+          <a:noFill/>
+        </p:spPr>
+        <p:txBody>
+          <a:bodyPr wrap="square" lIns="18288" rIns="18288" tIns="0" bIns="0">
+            <a:spAutoFit/>
+          </a:bodyPr>
+          <a:lstStyle/>
+          <a:p>
+            <a:pPr>
+              <a:spcAft>
+                <a:spcPts val="600"/>
+              </a:spcAft>
+              <a:defRPr sz="4300" b="1">
+                <a:solidFill>
+                  <a:srgbClr val="FFCC00"/>
+                </a:solidFill>
+                <a:latin typeface="Montserrat"/>
+              </a:defRPr>
+            </a:pPr>
+            <a:r>
+              <a:t>Know the next gate.</a:t>
+            </a:r>
+          </a:p>
+          <a:p>
+            <a:pPr>
+              <a:spcAft>
+                <a:spcPts val="600"/>
+              </a:spcAft>
+              <a:defRPr sz="4300" b="1">
+                <a:solidFill>
+                  <a:srgbClr val="FFCC00"/>
+                </a:solidFill>
+                <a:latin typeface="Montserrat"/>
+              </a:defRPr>
+            </a:pPr>
+            <a:r>
+              <a:t>Keep one accountable holder.</a:t>
+            </a:r>
+          </a:p>
+          <a:p>
+            <a:pPr>
+              <a:spcAft>
+                <a:spcPts val="600"/>
+              </a:spcAft>
+              <a:defRPr sz="4300" b="1">
+                <a:solidFill>
+                  <a:srgbClr val="FFCC00"/>
+                </a:solidFill>
+                <a:latin typeface="Montserrat"/>
+              </a:defRPr>
+            </a:pPr>
+            <a:r>
+              <a:t>Never lose the approval trail.</a:t>
+            </a:r>
+          </a:p>
+        </p:txBody>
+      </p:sp>
+      <p:sp>
+        <p:nvSpPr>
+          <p:cNvPr id="9" name="TextBox 8"/>
+          <p:cNvSpPr txBox="1"/>
+          <p:nvPr/>
+        </p:nvSpPr>
+        <p:spPr>
+          <a:xfrm>
+            <a:off x="868680" y="6263640"/>
+            <a:ext cx="12801600" cy="822960"/>
+          </a:xfrm>
+          <a:prstGeom prst="rect">
+            <a:avLst/>
+          </a:prstGeom>
+          <a:noFill/>
+        </p:spPr>
+        <p:txBody>
+          <a:bodyPr wrap="square" lIns="18288" rIns="18288" tIns="0" bIns="0">
+            <a:spAutoFit/>
+          </a:bodyPr>
+          <a:lstStyle/>
+          <a:p>
+            <a:pPr>
+              <a:spcAft>
+                <a:spcPts val="600"/>
+              </a:spcAft>
+              <a:defRPr sz="2200" b="0">
+                <a:solidFill>
+                  <a:srgbClr val="FFFFFF"/>
+                </a:solidFill>
+                <a:latin typeface="Montserrat"/>
+              </a:defRPr>
+            </a:pPr>
+            <a:r>
+              <a:t>Use the full manual, practise with the assessor and confirm authority before live operation.</a:t>
             </a:r>
           </a:p>
         </p:txBody>
